--- a/Case 3/presentation/All-Kanns_Asset_Management.pptx
+++ b/Case 3/presentation/All-Kanns_Asset_Management.pptx
@@ -17204,7 +17204,7 @@
                 </a:solidFill>
                 <a:latin typeface="Calibri"/>
               </a:rPr>
-              <a:t>€0.86bn</a:t>
+              <a:t>€0.85bn</a:t>
             </a:r>
           </a:p>
         </p:txBody>
@@ -17246,7 +17246,7 @@
                 </a:solidFill>
                 <a:latin typeface="Calibri"/>
               </a:rPr>
-              <a:t>1-year 99% surplus VaR after the receiver-IRS overlay (€1.14bn before)</a:t>
+              <a:t>1-year 99% surplus VaR after the receiver-IRS overlay (€1.21bn before)</a:t>
             </a:r>
           </a:p>
         </p:txBody>
@@ -26550,7 +26550,7 @@
               </a:spcAft>
             </a:pPr>
             <a:r>
-              <a:rPr sz="960" b="0" i="0">
+              <a:rPr sz="940" b="0" i="0">
                 <a:solidFill>
                   <a:srgbClr val="333333"/>
                 </a:solidFill>
@@ -26559,22 +26559,22 @@
               <a:t>•  </a:t>
             </a:r>
             <a:r>
-              <a:rPr sz="960" b="1" i="0">
+              <a:rPr sz="940" b="1" i="0">
                 <a:solidFill>
                   <a:srgbClr val="1F4E5F"/>
                 </a:solidFill>
                 <a:latin typeface="Calibri"/>
               </a:rPr>
-              <a:t>Cash-flow matching.  </a:t>
-            </a:r>
-            <a:r>
-              <a:rPr sz="960" b="0" i="0">
+              <a:t>Cash-flow dedication.  </a:t>
+            </a:r>
+            <a:r>
+              <a:rPr sz="940" b="0" i="0">
                 <a:solidFill>
                   <a:srgbClr val="333333"/>
                 </a:solidFill>
                 <a:latin typeface="Calibri"/>
               </a:rPr>
-              <a:t>Coupons + redemptions timed to the guaranteed schedule.</a:t>
+              <a:t>Stage 1: running cash balance ≥ 0 every year (1.5% reinvestment) – external top-up €0.00bn, covered to year 50.</a:t>
             </a:r>
           </a:p>
           <a:p>
@@ -26587,7 +26587,7 @@
               </a:spcAft>
             </a:pPr>
             <a:r>
-              <a:rPr sz="960" b="0" i="0">
+              <a:rPr sz="940" b="0" i="0">
                 <a:solidFill>
                   <a:srgbClr val="333333"/>
                 </a:solidFill>
@@ -26596,7 +26596,7 @@
               <a:t>•  </a:t>
             </a:r>
             <a:r>
-              <a:rPr sz="960" b="1" i="0">
+              <a:rPr sz="940" b="1" i="0">
                 <a:solidFill>
                   <a:srgbClr val="1F4E5F"/>
                 </a:solidFill>
@@ -26605,13 +26605,13 @@
               <a:t>Duration matching.  </a:t>
             </a:r>
             <a:r>
-              <a:rPr sz="960" b="0" i="0">
+              <a:rPr sz="940" b="0" i="0">
                 <a:solidFill>
                   <a:srgbClr val="333333"/>
                 </a:solidFill>
                 <a:latin typeface="Calibri"/>
               </a:rPr>
-              <a:t>Book duration ≈ liability (≈ 17y core → ≈ 29y with ultra-longs).</a:t>
+              <a:t>≈ 29y KRD-effective, matched to the ≈ 20y / €12.8m-per-bp liability.</a:t>
             </a:r>
           </a:p>
           <a:p>
@@ -26624,7 +26624,7 @@
               </a:spcAft>
             </a:pPr>
             <a:r>
-              <a:rPr sz="960" b="0" i="0">
+              <a:rPr sz="940" b="0" i="0">
                 <a:solidFill>
                   <a:srgbClr val="333333"/>
                 </a:solidFill>
@@ -26633,7 +26633,7 @@
               <a:t>•  </a:t>
             </a:r>
             <a:r>
-              <a:rPr sz="960" b="1" i="0">
+              <a:rPr sz="940" b="1" i="0">
                 <a:solidFill>
                   <a:srgbClr val="1F4E5F"/>
                 </a:solidFill>
@@ -26642,13 +26642,13 @@
               <a:t>Key-rate DV01.  </a:t>
             </a:r>
             <a:r>
-              <a:rPr sz="960" b="0" i="0">
+              <a:rPr sz="940" b="0" i="0">
                 <a:solidFill>
                   <a:srgbClr val="333333"/>
                 </a:solidFill>
                 <a:latin typeface="Calibri"/>
               </a:rPr>
-              <a:t>Match € per bp at each tenor, not just average duration.</a:t>
+              <a:t>Stage 2: match € per bp at each tenor, without giving back Stage-1 coverage or duration.</a:t>
             </a:r>
           </a:p>
           <a:p>
@@ -26661,7 +26661,7 @@
               </a:spcAft>
             </a:pPr>
             <a:r>
-              <a:rPr sz="960" b="0" i="0">
+              <a:rPr sz="940" b="0" i="0">
                 <a:solidFill>
                   <a:srgbClr val="333333"/>
                 </a:solidFill>
@@ -26670,7 +26670,7 @@
               <a:t>•  </a:t>
             </a:r>
             <a:r>
-              <a:rPr sz="960" b="1" i="0">
+              <a:rPr sz="940" b="1" i="0">
                 <a:solidFill>
                   <a:srgbClr val="1F4E5F"/>
                 </a:solidFill>
@@ -26679,7 +26679,7 @@
               <a:t>Receiver-IRS overlay.  </a:t>
             </a:r>
             <a:r>
-              <a:rPr sz="960" b="0" i="0">
+              <a:rPr sz="940" b="0" i="0">
                 <a:solidFill>
                   <a:srgbClr val="333333"/>
                 </a:solidFill>
@@ -26743,7 +26743,7 @@
         <p:spPr>
           <a:xfrm>
             <a:off x="493776" y="5276088"/>
-            <a:ext cx="2194560" cy="384048"/>
+            <a:ext cx="1920240" cy="384048"/>
           </a:xfrm>
           <a:prstGeom prst="rect">
             <a:avLst/>
@@ -26765,13 +26765,13 @@
               </a:spcAft>
             </a:pPr>
             <a:r>
-              <a:rPr sz="1000" b="1" i="0">
+              <a:rPr sz="950" b="1" i="0">
                 <a:solidFill>
                   <a:srgbClr val="333333"/>
                 </a:solidFill>
                 <a:latin typeface="Calibri"/>
               </a:rPr>
-              <a:t>Running yield ≈ 4.0%</a:t>
+              <a:t>11 bonds, ≈ €5.0bn</a:t>
             </a:r>
           </a:p>
         </p:txBody>
@@ -26784,8 +26784,8 @@
         </p:nvSpPr>
         <p:spPr>
           <a:xfrm>
-            <a:off x="2825496" y="5276088"/>
-            <a:ext cx="2125979" cy="384048"/>
+            <a:off x="2551176" y="5276088"/>
+            <a:ext cx="2263140" cy="384048"/>
           </a:xfrm>
           <a:prstGeom prst="rect">
             <a:avLst/>
@@ -26807,13 +26807,13 @@
               </a:spcAft>
             </a:pPr>
             <a:r>
-              <a:rPr sz="1000" b="0" i="0">
+              <a:rPr sz="950" b="0" i="0">
                 <a:solidFill>
                   <a:srgbClr val="333333"/>
                 </a:solidFill>
                 <a:latin typeface="Calibri"/>
               </a:rPr>
-              <a:t>duration ≈ 17–29y</a:t>
+              <a:t>KRD-eff. duration ≈ 29y</a:t>
             </a:r>
           </a:p>
         </p:txBody>
@@ -26826,8 +26826,8 @@
         </p:nvSpPr>
         <p:spPr>
           <a:xfrm>
-            <a:off x="5088636" y="5276088"/>
-            <a:ext cx="2125979" cy="384048"/>
+            <a:off x="4951475" y="5276088"/>
+            <a:ext cx="2263140" cy="384048"/>
           </a:xfrm>
           <a:prstGeom prst="rect">
             <a:avLst/>
@@ -26849,13 +26849,13 @@
               </a:spcAft>
             </a:pPr>
             <a:r>
-              <a:rPr sz="1000" b="0" i="0">
+              <a:rPr sz="950" b="0" i="0">
                 <a:solidFill>
                   <a:srgbClr val="333333"/>
                 </a:solidFill>
                 <a:latin typeface="Calibri"/>
               </a:rPr>
-              <a:t>surplus DV01 gap ≈ 0 after IRS</a:t>
+              <a:t>cash-flow top-up €0.00bn; surplus DV01 gap ≈ 0 after IRS</a:t>
             </a:r>
           </a:p>
         </p:txBody>
@@ -26897,7 +26897,7 @@
                 </a:solidFill>
                 <a:latin typeface="Calibri"/>
               </a:rPr>
-              <a:t>Sources: results/optimization_summary.txt; results_v2/REPORT.md; cashflow_match_v2.size_irs().</a:t>
+              <a:t>Source: results_v2/portfolio_wide.csv (two-stage: Stage 1 cash-flow dedication, Stage 2 KRD shaping) + cashflow_match_v2.size_irs().</a:t>
             </a:r>
           </a:p>
         </p:txBody>
@@ -32742,7 +32742,7 @@
                 </a:solidFill>
                 <a:latin typeface="Calibri"/>
               </a:rPr>
-              <a:t>±100bp: LMP ≈ €1.1bn vs liability ≈ €1.2bn; surplus ≈ +€0.1bn after the ultra-long + IRS match</a:t>
+              <a:t>±100bp: LMP ≈ €1.05bn vs liability ≈ €1.22bn; surplus swing ≈ €0.16bn with the KRD + IRS match (≈ €0.53bn without the IRS)</a:t>
             </a:r>
           </a:p>
         </p:txBody>
@@ -32784,7 +32784,7 @@
                 </a:solidFill>
                 <a:latin typeface="Calibri"/>
               </a:rPr>
-              <a:t>Mitigate – duration + KRD + receiver IRS</a:t>
+              <a:t>Mitigate – cash-flow + KRD + receiver IRS</a:t>
             </a:r>
           </a:p>
         </p:txBody>
@@ -34141,7 +34141,7 @@
                 </a:solidFill>
                 <a:latin typeface="Calibri"/>
               </a:rPr>
-              <a:t>€2.59bn</a:t>
+              <a:t>€2.51bn</a:t>
             </a:r>
           </a:p>
         </p:txBody>
@@ -34183,7 +34183,7 @@
                 </a:solidFill>
                 <a:latin typeface="Calibri"/>
               </a:rPr>
-              <a:t>25.9% of assets</a:t>
+              <a:t>25.1% of assets</a:t>
             </a:r>
           </a:p>
         </p:txBody>
@@ -34267,7 +34267,7 @@
                 </a:solidFill>
                 <a:latin typeface="Calibri"/>
               </a:rPr>
-              <a:t>€1.14bn</a:t>
+              <a:t>€1.21bn</a:t>
             </a:r>
           </a:p>
         </p:txBody>
@@ -34309,7 +34309,7 @@
                 </a:solidFill>
                 <a:latin typeface="Calibri"/>
               </a:rPr>
-              <a:t>16.7% of liab. PV</a:t>
+              <a:t>17.8% of liab. PV</a:t>
             </a:r>
           </a:p>
         </p:txBody>
@@ -34437,7 +34437,7 @@
                 </a:solidFill>
                 <a:latin typeface="Calibri"/>
               </a:rPr>
-              <a:t>€0.86bn</a:t>
+              <a:t>€0.85bn</a:t>
             </a:r>
           </a:p>
         </p:txBody>
@@ -34479,7 +34479,7 @@
                 </a:solidFill>
                 <a:latin typeface="Calibri"/>
               </a:rPr>
-              <a:t>8.6% of assets</a:t>
+              <a:t>8.5% of assets</a:t>
             </a:r>
           </a:p>
         </p:txBody>
@@ -34563,7 +34563,7 @@
                 </a:solidFill>
                 <a:latin typeface="Calibri"/>
               </a:rPr>
-              <a:t>€1.71bn</a:t>
+              <a:t>€1.81bn</a:t>
             </a:r>
           </a:p>
         </p:txBody>
@@ -37686,7 +37686,7 @@
                 </a:solidFill>
                 <a:latin typeface="Calibri"/>
               </a:rPr>
-              <a:t>bond redemptions front-load years 15 and 23–28; the tail is met by reinvested coupons + the return sleeve.</a:t>
+              <a:t>Stage-1 dedication keeps the running cash balance ≥ 0 every year to year 50 – no external top-up; ultra-long / zero-coupon bonds reach the 30y+ tail.</a:t>
             </a:r>
           </a:p>
         </p:txBody>
@@ -42151,7 +42151,7 @@
                 </a:solidFill>
                 <a:latin typeface="Calibri"/>
               </a:rPr>
-              <a:t>1-year 99% surplus VaR €0.86bn after the overlay (−24%); every stress inside the surplus.</a:t>
+              <a:t>1-year 99% surplus VaR €0.85bn after the overlay (−30%); every stress inside the €3.2bn surplus.</a:t>
             </a:r>
           </a:p>
           <a:p>

--- a/Case 3/presentation/All-Kanns_Asset_Management.pptx
+++ b/Case 3/presentation/All-Kanns_Asset_Management.pptx
@@ -17341,7 +17341,7 @@
                 </a:solidFill>
                 <a:latin typeface="Calibri"/>
               </a:rPr>
-              <a:t>a cash-flow- and key-rate-matched bond book clears the €11.3bn guaranteed floor; the surplus funds an aggressive, diversified return portfolio with a 90/10 policyholder profit share. A par receiver-IRS overlay (no cash outlay) closes the residual duration gap.</a:t>
+              <a:t>a cash-flow- and key-rate-matched bond book clears the €11.3bn guaranteed floor; the surplus funds an aggressive, diversified return portfolio, with a 90/10 policyholder profit share from year 15. A par receiver-IRS overlay (no cash outlay) closes the residual duration gap.</a:t>
             </a:r>
           </a:p>
         </p:txBody>
@@ -40264,7 +40264,7 @@
                 </a:solidFill>
                 <a:latin typeface="Calibri Light"/>
               </a:rPr>
-              <a:t>Sharing the Upside – 90 / 10 on the Return Portfolio</a:t>
+              <a:t>Sharing the Upside – 90 / 10 From Year 15</a:t>
             </a:r>
           </a:p>
         </p:txBody>
@@ -40306,7 +40306,7 @@
                 </a:solidFill>
                 <a:latin typeface="Calibri"/>
               </a:rPr>
-              <a:t>A requirement: 90% of the return book's yearly profit goes to policyholders</a:t>
+              <a:t>The whole return compounds until benefits begin; then 90% of profit goes to policyholders</a:t>
             </a:r>
           </a:p>
         </p:txBody>
@@ -40838,7 +40838,7 @@
               </a:spcAft>
             </a:pPr>
             <a:r>
-              <a:rPr sz="930" b="0" i="0">
+              <a:rPr sz="919" b="0" i="0">
                 <a:solidFill>
                   <a:srgbClr val="333333"/>
                 </a:solidFill>
@@ -40847,22 +40847,22 @@
               <a:t>•  </a:t>
             </a:r>
             <a:r>
-              <a:rPr sz="930" b="1" i="0">
+              <a:rPr sz="919" b="1" i="0">
                 <a:solidFill>
                   <a:srgbClr val="1F4E5F"/>
                 </a:solidFill>
                 <a:latin typeface="Calibri"/>
               </a:rPr>
-              <a:t>90% to policyholders.  </a:t>
-            </a:r>
-            <a:r>
-              <a:rPr sz="930" b="0" i="0">
+              <a:t>Years 1–14: no sharing.  </a:t>
+            </a:r>
+            <a:r>
+              <a:rPr sz="919" b="0" i="0">
                 <a:solidFill>
                   <a:srgbClr val="333333"/>
                 </a:solidFill>
                 <a:latin typeface="Calibri"/>
               </a:rPr>
-              <a:t>each year's investment profit on the RSP is 90% distributed, funded by selling an equal EUR amount from every sleeve.</a:t>
+              <a:t>the whole investment return compounds in the book – contributions €5.0bn → return-book MV ≈ €8.4bn by year 10.</a:t>
             </a:r>
           </a:p>
           <a:p>
@@ -40875,7 +40875,7 @@
               </a:spcAft>
             </a:pPr>
             <a:r>
-              <a:rPr sz="930" b="0" i="0">
+              <a:rPr sz="919" b="0" i="0">
                 <a:solidFill>
                   <a:srgbClr val="333333"/>
                 </a:solidFill>
@@ -40884,22 +40884,22 @@
               <a:t>•  </a:t>
             </a:r>
             <a:r>
-              <a:rPr sz="930" b="1" i="0">
+              <a:rPr sz="919" b="1" i="0">
                 <a:solidFill>
                   <a:srgbClr val="1F4E5F"/>
                 </a:solidFill>
                 <a:latin typeface="Calibri"/>
               </a:rPr>
-              <a:t>10% retained, reinvested.  </a:t>
-            </a:r>
-            <a:r>
-              <a:rPr sz="930" b="0" i="0">
+              <a:t>Year 15+: 90 / 10.  </a:t>
+            </a:r>
+            <a:r>
+              <a:rPr sz="919" b="0" i="0">
                 <a:solidFill>
                   <a:srgbClr val="333333"/>
                 </a:solidFill>
                 <a:latin typeface="Calibri"/>
               </a:rPr>
-              <a:t>stays in the book and compounds; losses carry forward and net against future profit first.</a:t>
+              <a:t>90% of each year's investment profit paid to policyholders (equal EUR sold from every sleeve), 10% retained and reinvested; losses carry forward first.</a:t>
             </a:r>
           </a:p>
           <a:p>
@@ -40912,7 +40912,7 @@
               </a:spcAft>
             </a:pPr>
             <a:r>
-              <a:rPr sz="930" b="0" i="0">
+              <a:rPr sz="919" b="0" i="0">
                 <a:solidFill>
                   <a:srgbClr val="333333"/>
                 </a:solidFill>
@@ -40921,22 +40921,22 @@
               <a:t>•  </a:t>
             </a:r>
             <a:r>
-              <a:rPr sz="930" b="1" i="0">
+              <a:rPr sz="919" b="1" i="0">
                 <a:solidFill>
                   <a:srgbClr val="1F4E5F"/>
                 </a:solidFill>
                 <a:latin typeface="Calibri"/>
               </a:rPr>
-              <a:t>Over the 10-year accumulation.  </a:t>
-            </a:r>
-            <a:r>
-              <a:rPr sz="930" b="0" i="0">
+              <a:t>Payout phase (yr 15–20).  </a:t>
+            </a:r>
+            <a:r>
+              <a:rPr sz="919" b="0" i="0">
                 <a:solidFill>
                   <a:srgbClr val="333333"/>
                 </a:solidFill>
                 <a:latin typeface="Calibri"/>
               </a:rPr>
-              <a:t>contributions €5.00bn → return-book MV €5.26bn; €2.31bn shared to policyholders; €0.26bn retained.</a:t>
+              <a:t>≈ €7.8bn cumulative to policyholders, ≈ €0.9bn retained; book ≈ €13.6bn at year 20 (deterministic-return projection).</a:t>
             </a:r>
           </a:p>
           <a:p>
@@ -40949,7 +40949,7 @@
               </a:spcAft>
             </a:pPr>
             <a:r>
-              <a:rPr sz="930" b="0" i="0">
+              <a:rPr sz="919" b="0" i="0">
                 <a:solidFill>
                   <a:srgbClr val="333333"/>
                 </a:solidFill>
@@ -40958,7 +40958,7 @@
               <a:t>•  </a:t>
             </a:r>
             <a:r>
-              <a:rPr sz="930" b="1" i="0">
+              <a:rPr sz="919" b="1" i="0">
                 <a:solidFill>
                   <a:srgbClr val="1F4E5F"/>
                 </a:solidFill>
@@ -40967,7 +40967,7 @@
               <a:t>Guarantee untouched.  </a:t>
             </a:r>
             <a:r>
-              <a:rPr sz="930" b="0" i="0">
+              <a:rPr sz="919" b="0" i="0">
                 <a:solidFill>
                   <a:srgbClr val="333333"/>
                 </a:solidFill>
@@ -41015,7 +41015,7 @@
                 </a:solidFill>
                 <a:latin typeface="Calibri"/>
               </a:rPr>
-              <a:t>Source: return_book.py / results_var/RETURN_BOOK_REPORT.md.  Naive fully-reinvested book (no share) would be €8.39bn.</a:t>
+              <a:t>Source: return_book.py (profit_share_start_year = 15).  Headline VaR uses the conservative flat €5.0bn return book; the projected €8.4bn book is the 'full_projected' sensitivity (assets €13.4bn, Surplus VaR €1.42bn).</a:t>
             </a:r>
           </a:p>
         </p:txBody>

--- a/Case 3/presentation/All-Kanns_Asset_Management.pptx
+++ b/Case 3/presentation/All-Kanns_Asset_Management.pptx
@@ -43,6 +43,7 @@
     <p:sldId id="291" r:id="rId42"/>
     <p:sldId id="292" r:id="rId43"/>
     <p:sldId id="293" r:id="rId44"/>
+    <p:sldId id="294" r:id="rId45"/>
   </p:sldIdLst>
   <p:sldSz cx="12191695" cy="6858000" type="screen4x3"/>
   <p:notesSz cx="6858000" cy="9144000"/>
@@ -13395,7 +13396,7 @@
                 </a:solidFill>
                 <a:latin typeface="Calibri"/>
               </a:rPr>
-              <a:t>A two-sleeve strategy; model median 15-year IRR ≈ 6.0%</a:t>
+              <a:t>A two-sleeve strategy; consistent-pipeline MC median 15-year IRR ≈ 5.9%</a:t>
             </a:r>
           </a:p>
         </p:txBody>
@@ -16988,7 +16989,7 @@
                 </a:solidFill>
                 <a:latin typeface="Calibri"/>
               </a:rPr>
-              <a:t>~6.0% p.a.</a:t>
+              <a:t>~5.9% p.a.</a:t>
             </a:r>
           </a:p>
         </p:txBody>
@@ -17030,7 +17031,7 @@
                 </a:solidFill>
                 <a:latin typeface="Calibri"/>
               </a:rPr>
-              <a:t>Median 15-year IRR; even the 5th-pct path (2.9%) clears the 1.0% guarantee</a:t>
+              <a:t>Median 15-year IRR (money-weighted); median funded ratio 205% at year 15</a:t>
             </a:r>
           </a:p>
         </p:txBody>
@@ -35177,7 +35178,7 @@
                 </a:solidFill>
                 <a:latin typeface="Calibri"/>
               </a:rPr>
-              <a:t>DETERMINISTIC STRESS – SURPLUS P&amp;L</a:t>
+              <a:t>DETERMINISTIC STRESS + 15-YEAR MONTE-CARLO (CONSISTENT PIPELINE)</a:t>
             </a:r>
           </a:p>
         </p:txBody>
@@ -35208,7 +35209,7 @@
       </p:pic>
       <p:pic>
         <p:nvPicPr>
-          <p:cNvPr id="13" name="Picture 12" descr="mc_year15.png"/>
+          <p:cNvPr id="13" name="Picture 12" descr="lc_01_asset_evolution.png"/>
           <p:cNvPicPr>
             <a:picLocks noChangeAspect="1"/>
           </p:cNvPicPr>
@@ -35222,8 +35223,8 @@
         </p:blipFill>
         <p:spPr>
           <a:xfrm>
-            <a:off x="6446520" y="1700784"/>
-            <a:ext cx="5394960" cy="2347245"/>
+            <a:off x="6446520" y="1664208"/>
+            <a:ext cx="5440680" cy="2771283"/>
           </a:xfrm>
           <a:prstGeom prst="rect">
             <a:avLst/>
@@ -35399,7 +35400,7 @@
                 </a:solidFill>
                 <a:latin typeface="Calibri"/>
               </a:rPr>
-              <a:t>€20.7bn</a:t>
+              <a:t>€20.5bn</a:t>
             </a:r>
           </a:p>
         </p:txBody>
@@ -35441,7 +35442,7 @@
                 </a:solidFill>
                 <a:latin typeface="Calibri"/>
               </a:rPr>
-              <a:t>15-year MC</a:t>
+              <a:t>median funded ratio 205%</a:t>
             </a:r>
           </a:p>
         </p:txBody>
@@ -35615,7 +35616,7 @@
                 </a:solidFill>
                 <a:latin typeface="Calibri"/>
               </a:rPr>
-              <a:t>€14.3bn</a:t>
+              <a:t>€11.3bn</a:t>
             </a:r>
           </a:p>
         </p:txBody>
@@ -35657,7 +35658,7 @@
                 </a:solidFill>
                 <a:latin typeface="Calibri"/>
               </a:rPr>
-              <a:t>well above the floor</a:t>
+              <a:t>still above the €10.0bn liability</a:t>
             </a:r>
           </a:p>
         </p:txBody>
@@ -35831,7 +35832,7 @@
                 </a:solidFill>
                 <a:latin typeface="Calibri"/>
               </a:rPr>
-              <a:t>€11.2bn</a:t>
+              <a:t>€7.1bn</a:t>
             </a:r>
           </a:p>
         </p:txBody>
@@ -35873,7 +35874,7 @@
                 </a:solidFill>
                 <a:latin typeface="Calibri"/>
               </a:rPr>
-              <a:t>≈ the €11.3bn floor</a:t>
+              <a:t>the genuine tail – below the floor</a:t>
             </a:r>
           </a:p>
         </p:txBody>
@@ -36005,7 +36006,7 @@
                 </a:solidFill>
                 <a:latin typeface="Calibri"/>
               </a:rPr>
-              <a:t>P(UNDERFUNDED)</a:t>
+              <a:t>P(UNDERFUNDED), 50/50</a:t>
             </a:r>
           </a:p>
         </p:txBody>
@@ -36047,7 +36048,7 @@
                 </a:solidFill>
                 <a:latin typeface="Calibri"/>
               </a:rPr>
-              <a:t>&lt; 0.6%</a:t>
+              <a:t>≈ 2.5%</a:t>
             </a:r>
           </a:p>
         </p:txBody>
@@ -36089,7 +36090,7 @@
                 </a:solidFill>
                 <a:latin typeface="Calibri"/>
               </a:rPr>
-              <a:t>before the glidepath</a:t>
+              <a:t>15y horizon, before the glidepath</a:t>
             </a:r>
           </a:p>
         </p:txBody>
@@ -36131,7 +36132,7 @@
                 </a:solidFill>
                 <a:latin typeface="Calibri"/>
               </a:rPr>
-              <a:t>Sources: results_var/stress_tests_full_*.csv; monte_carlo_ALM_results.xlsx; 15Y median IRR ≈ 6.0%.</a:t>
+              <a:t>Sources: results_var/stress_tests_full_*.csv; mc_lifecycle.py (50k paths, annual Student-t df 5, the actual funding waterfall). 15Y median IRR ≈ 5.9%.</a:t>
             </a:r>
           </a:p>
         </p:txBody>
@@ -36162,52 +36163,8 @@
         </p:nvSpPr>
         <p:spPr>
           <a:xfrm>
-            <a:off x="0" y="0"/>
-            <a:ext cx="12191695" cy="6858000"/>
-          </a:xfrm>
-          <a:prstGeom prst="rect">
-            <a:avLst/>
-          </a:prstGeom>
-          <a:solidFill>
-            <a:srgbClr val="0D2833"/>
-          </a:solidFill>
-          <a:ln>
-            <a:noFill/>
-          </a:ln>
-          <a:effectLst/>
-        </p:spPr>
-        <p:style>
-          <a:lnRef idx="1">
-            <a:schemeClr val="accent1"/>
-          </a:lnRef>
-          <a:fillRef idx="3">
-            <a:schemeClr val="accent1"/>
-          </a:fillRef>
-          <a:effectRef idx="2">
-            <a:schemeClr val="accent1"/>
-          </a:effectRef>
-          <a:fontRef idx="minor">
-            <a:schemeClr val="lt1"/>
-          </a:fontRef>
-        </p:style>
-        <p:txBody>
-          <a:bodyPr rtlCol="0" anchor="ctr"/>
-          <a:lstStyle/>
-          <a:p>
-            <a:pPr algn="ctr"/>
-          </a:p>
-        </p:txBody>
-      </p:sp>
-      <p:sp>
-        <p:nvSpPr>
-          <p:cNvPr id="3" name="Rectangle 2"/>
-          <p:cNvSpPr/>
-          <p:nvPr/>
-        </p:nvSpPr>
-        <p:spPr>
-          <a:xfrm>
-            <a:off x="914400" y="2395728"/>
-            <a:ext cx="1371600" cy="45720"/>
+            <a:off x="0" y="274320"/>
+            <a:ext cx="128016" cy="566928"/>
           </a:xfrm>
           <a:prstGeom prst="rect">
             <a:avLst/>
@@ -36244,14 +36201,58 @@
       </p:sp>
       <p:sp>
         <p:nvSpPr>
+          <p:cNvPr id="3" name="Rectangle 2"/>
+          <p:cNvSpPr/>
+          <p:nvPr/>
+        </p:nvSpPr>
+        <p:spPr>
+          <a:xfrm>
+            <a:off x="11759184" y="182880"/>
+            <a:ext cx="310896" cy="310896"/>
+          </a:xfrm>
+          <a:prstGeom prst="rect">
+            <a:avLst/>
+          </a:prstGeom>
+          <a:solidFill>
+            <a:srgbClr val="E080E0"/>
+          </a:solidFill>
+          <a:ln>
+            <a:noFill/>
+          </a:ln>
+          <a:effectLst/>
+        </p:spPr>
+        <p:style>
+          <a:lnRef idx="1">
+            <a:schemeClr val="accent1"/>
+          </a:lnRef>
+          <a:fillRef idx="3">
+            <a:schemeClr val="accent1"/>
+          </a:fillRef>
+          <a:effectRef idx="2">
+            <a:schemeClr val="accent1"/>
+          </a:effectRef>
+          <a:fontRef idx="minor">
+            <a:schemeClr val="lt1"/>
+          </a:fontRef>
+        </p:style>
+        <p:txBody>
+          <a:bodyPr rtlCol="0" anchor="ctr"/>
+          <a:lstStyle/>
+          <a:p>
+            <a:pPr algn="ctr"/>
+          </a:p>
+        </p:txBody>
+      </p:sp>
+      <p:sp>
+        <p:nvSpPr>
           <p:cNvPr id="4" name="TextBox 3"/>
           <p:cNvSpPr txBox="1"/>
           <p:nvPr/>
         </p:nvSpPr>
         <p:spPr>
           <a:xfrm>
-            <a:off x="914400" y="1965960"/>
-            <a:ext cx="7315200" cy="365760"/>
+            <a:off x="384048" y="219456"/>
+            <a:ext cx="10881360" cy="566928"/>
           </a:xfrm>
           <a:prstGeom prst="rect">
             <a:avLst/>
@@ -36273,27 +36274,113 @@
               </a:spcAft>
             </a:pPr>
             <a:r>
-              <a:rPr sz="1300" b="1" i="0">
+              <a:rPr sz="2400" b="1" i="0">
+                <a:solidFill>
+                  <a:srgbClr val="12323F"/>
+                </a:solidFill>
+                <a:latin typeface="Calibri Light"/>
+              </a:rPr>
+              <a:t>15-Year Monte-Carlo – Does It Reach the Destination?</a:t>
+            </a:r>
+          </a:p>
+        </p:txBody>
+      </p:sp>
+      <p:sp>
+        <p:nvSpPr>
+          <p:cNvPr id="5" name="TextBox 4"/>
+          <p:cNvSpPr txBox="1"/>
+          <p:nvPr/>
+        </p:nvSpPr>
+        <p:spPr>
+          <a:xfrm>
+            <a:off x="402336" y="749808"/>
+            <a:ext cx="11155680" cy="365760"/>
+          </a:xfrm>
+          <a:prstGeom prst="rect">
+            <a:avLst/>
+          </a:prstGeom>
+          <a:noFill/>
+        </p:spPr>
+        <p:txBody>
+          <a:bodyPr wrap="square" lIns="54864" rIns="54864" tIns="36576" bIns="36576" anchor="t">
+            <a:spAutoFit/>
+          </a:bodyPr>
+          <a:lstStyle/>
+          <a:p>
+            <a:pPr algn="l">
+              <a:lnSpc>
+                <a:spcPct val="106000"/>
+              </a:lnSpc>
+              <a:spcAft>
+                <a:spcPts val="400"/>
+              </a:spcAft>
+            </a:pPr>
+            <a:r>
+              <a:rPr sz="1250" b="0" i="0">
                 <a:solidFill>
                   <a:srgbClr val="3B8E9E"/>
                 </a:solidFill>
                 <a:latin typeface="Calibri"/>
               </a:rPr>
-              <a:t>SECTION 06</a:t>
-            </a:r>
-          </a:p>
-        </p:txBody>
-      </p:sp>
-      <p:sp>
-        <p:nvSpPr>
-          <p:cNvPr id="5" name="TextBox 4"/>
-          <p:cNvSpPr txBox="1"/>
-          <p:nvPr/>
-        </p:nvSpPr>
-        <p:spPr>
-          <a:xfrm>
-            <a:off x="914400" y="2606040"/>
-            <a:ext cx="10241280" cy="1280160"/>
+              <a:t>Consistent pipeline: the real funding waterfall, Student-t returns, 50,000 paths</a:t>
+            </a:r>
+          </a:p>
+        </p:txBody>
+      </p:sp>
+      <p:sp>
+        <p:nvSpPr>
+          <p:cNvPr id="6" name="Rectangle 5"/>
+          <p:cNvSpPr/>
+          <p:nvPr/>
+        </p:nvSpPr>
+        <p:spPr>
+          <a:xfrm>
+            <a:off x="402336" y="1133856"/>
+            <a:ext cx="11430000" cy="12801"/>
+          </a:xfrm>
+          <a:prstGeom prst="rect">
+            <a:avLst/>
+          </a:prstGeom>
+          <a:solidFill>
+            <a:srgbClr val="C7D3D7"/>
+          </a:solidFill>
+          <a:ln>
+            <a:noFill/>
+          </a:ln>
+          <a:effectLst/>
+        </p:spPr>
+        <p:style>
+          <a:lnRef idx="1">
+            <a:schemeClr val="accent1"/>
+          </a:lnRef>
+          <a:fillRef idx="3">
+            <a:schemeClr val="accent1"/>
+          </a:fillRef>
+          <a:effectRef idx="2">
+            <a:schemeClr val="accent1"/>
+          </a:effectRef>
+          <a:fontRef idx="minor">
+            <a:schemeClr val="lt1"/>
+          </a:fontRef>
+        </p:style>
+        <p:txBody>
+          <a:bodyPr rtlCol="0" anchor="ctr"/>
+          <a:lstStyle/>
+          <a:p>
+            <a:pPr algn="ctr"/>
+          </a:p>
+        </p:txBody>
+      </p:sp>
+      <p:sp>
+        <p:nvSpPr>
+          <p:cNvPr id="7" name="TextBox 6"/>
+          <p:cNvSpPr txBox="1"/>
+          <p:nvPr/>
+        </p:nvSpPr>
+        <p:spPr>
+          <a:xfrm>
+            <a:off x="11338560" y="164592"/>
+            <a:ext cx="640080" cy="274320"/>
           </a:xfrm>
           <a:prstGeom prst="rect">
             <a:avLst/>
@@ -36306,6 +36393,260 @@
           </a:bodyPr>
           <a:lstStyle/>
           <a:p>
+            <a:pPr algn="r">
+              <a:lnSpc>
+                <a:spcPct val="106000"/>
+              </a:lnSpc>
+              <a:spcAft>
+                <a:spcPts val="400"/>
+              </a:spcAft>
+            </a:pPr>
+            <a:r>
+              <a:rPr sz="1200" b="0" i="0">
+                <a:solidFill>
+                  <a:srgbClr val="8A8A8A"/>
+                </a:solidFill>
+                <a:latin typeface="Calibri"/>
+              </a:rPr>
+              <a:t>28</a:t>
+            </a:r>
+          </a:p>
+        </p:txBody>
+      </p:sp>
+      <p:sp>
+        <p:nvSpPr>
+          <p:cNvPr id="8" name="TextBox 7"/>
+          <p:cNvSpPr txBox="1"/>
+          <p:nvPr/>
+        </p:nvSpPr>
+        <p:spPr>
+          <a:xfrm>
+            <a:off x="402336" y="6437376"/>
+            <a:ext cx="11338560" cy="274320"/>
+          </a:xfrm>
+          <a:prstGeom prst="rect">
+            <a:avLst/>
+          </a:prstGeom>
+          <a:noFill/>
+        </p:spPr>
+        <p:txBody>
+          <a:bodyPr wrap="square" lIns="54864" rIns="54864" tIns="36576" bIns="36576">
+            <a:spAutoFit/>
+          </a:bodyPr>
+          <a:lstStyle/>
+          <a:p>
+            <a:r>
+              <a:rPr sz="800" b="0" i="0">
+                <a:solidFill>
+                  <a:srgbClr val="B6C2C6"/>
+                </a:solidFill>
+                <a:latin typeface="Calibri"/>
+              </a:rPr>
+              <a:t>CLIENT SITUATION</a:t>
+            </a:r>
+            <a:r>
+              <a:rPr sz="800" b="0" i="0">
+                <a:solidFill>
+                  <a:srgbClr val="B6C2C6"/>
+                </a:solidFill>
+                <a:latin typeface="Calibri"/>
+              </a:rPr>
+              <a:t>   |   </a:t>
+            </a:r>
+            <a:r>
+              <a:rPr sz="800" b="0" i="0">
+                <a:solidFill>
+                  <a:srgbClr val="B6C2C6"/>
+                </a:solidFill>
+                <a:latin typeface="Calibri"/>
+              </a:rPr>
+              <a:t>OUR SELLING POINTS</a:t>
+            </a:r>
+            <a:r>
+              <a:rPr sz="800" b="0" i="0">
+                <a:solidFill>
+                  <a:srgbClr val="B6C2C6"/>
+                </a:solidFill>
+                <a:latin typeface="Calibri"/>
+              </a:rPr>
+              <a:t>   |   </a:t>
+            </a:r>
+            <a:r>
+              <a:rPr sz="800" b="0" i="0">
+                <a:solidFill>
+                  <a:srgbClr val="B6C2C6"/>
+                </a:solidFill>
+                <a:latin typeface="Calibri"/>
+              </a:rPr>
+              <a:t>STRATEGIC CHALLENGES &amp; MARKET OVERVIEW</a:t>
+            </a:r>
+            <a:r>
+              <a:rPr sz="800" b="0" i="0">
+                <a:solidFill>
+                  <a:srgbClr val="B6C2C6"/>
+                </a:solidFill>
+                <a:latin typeface="Calibri"/>
+              </a:rPr>
+              <a:t>   |   </a:t>
+            </a:r>
+            <a:r>
+              <a:rPr sz="800" b="0" i="0">
+                <a:solidFill>
+                  <a:srgbClr val="B6C2C6"/>
+                </a:solidFill>
+                <a:latin typeface="Calibri"/>
+              </a:rPr>
+              <a:t>PRODUCT STRATEGY</a:t>
+            </a:r>
+            <a:r>
+              <a:rPr sz="800" b="0" i="0">
+                <a:solidFill>
+                  <a:srgbClr val="B6C2C6"/>
+                </a:solidFill>
+                <a:latin typeface="Calibri"/>
+              </a:rPr>
+              <a:t>   |   </a:t>
+            </a:r>
+            <a:r>
+              <a:rPr sz="800" b="1" i="0">
+                <a:solidFill>
+                  <a:srgbClr val="1F4E5F"/>
+                </a:solidFill>
+                <a:latin typeface="Calibri"/>
+              </a:rPr>
+              <a:t>PORTFOLIO RESULTS</a:t>
+            </a:r>
+            <a:r>
+              <a:rPr sz="800" b="0" i="0">
+                <a:solidFill>
+                  <a:srgbClr val="B6C2C6"/>
+                </a:solidFill>
+                <a:latin typeface="Calibri"/>
+              </a:rPr>
+              <a:t>   |   </a:t>
+            </a:r>
+            <a:r>
+              <a:rPr sz="800" b="0" i="0">
+                <a:solidFill>
+                  <a:srgbClr val="B6C2C6"/>
+                </a:solidFill>
+                <a:latin typeface="Calibri"/>
+              </a:rPr>
+              <a:t>WHAT HAPPENS WITH THE UPSIDE</a:t>
+            </a:r>
+          </a:p>
+        </p:txBody>
+      </p:sp>
+      <p:sp>
+        <p:nvSpPr>
+          <p:cNvPr id="9" name="Rectangle 8"/>
+          <p:cNvSpPr/>
+          <p:nvPr/>
+        </p:nvSpPr>
+        <p:spPr>
+          <a:xfrm>
+            <a:off x="0" y="6729984"/>
+            <a:ext cx="12191695" cy="128016"/>
+          </a:xfrm>
+          <a:prstGeom prst="rect">
+            <a:avLst/>
+          </a:prstGeom>
+          <a:solidFill>
+            <a:srgbClr val="1F4E5F"/>
+          </a:solidFill>
+          <a:ln>
+            <a:noFill/>
+          </a:ln>
+          <a:effectLst/>
+        </p:spPr>
+        <p:style>
+          <a:lnRef idx="1">
+            <a:schemeClr val="accent1"/>
+          </a:lnRef>
+          <a:fillRef idx="3">
+            <a:schemeClr val="accent1"/>
+          </a:fillRef>
+          <a:effectRef idx="2">
+            <a:schemeClr val="accent1"/>
+          </a:effectRef>
+          <a:fontRef idx="minor">
+            <a:schemeClr val="lt1"/>
+          </a:fontRef>
+        </p:style>
+        <p:txBody>
+          <a:bodyPr rtlCol="0" anchor="ctr"/>
+          <a:lstStyle/>
+          <a:p>
+            <a:pPr algn="ctr"/>
+          </a:p>
+        </p:txBody>
+      </p:sp>
+      <p:sp>
+        <p:nvSpPr>
+          <p:cNvPr id="10" name="Rectangle 9"/>
+          <p:cNvSpPr/>
+          <p:nvPr/>
+        </p:nvSpPr>
+        <p:spPr>
+          <a:xfrm>
+            <a:off x="402336" y="1316736"/>
+            <a:ext cx="11430000" cy="329184"/>
+          </a:xfrm>
+          <a:prstGeom prst="rect">
+            <a:avLst/>
+          </a:prstGeom>
+          <a:solidFill>
+            <a:srgbClr val="1F4E5F"/>
+          </a:solidFill>
+          <a:ln>
+            <a:noFill/>
+          </a:ln>
+          <a:effectLst/>
+        </p:spPr>
+        <p:style>
+          <a:lnRef idx="1">
+            <a:schemeClr val="accent1"/>
+          </a:lnRef>
+          <a:fillRef idx="3">
+            <a:schemeClr val="accent1"/>
+          </a:fillRef>
+          <a:effectRef idx="2">
+            <a:schemeClr val="accent1"/>
+          </a:effectRef>
+          <a:fontRef idx="minor">
+            <a:schemeClr val="lt1"/>
+          </a:fontRef>
+        </p:style>
+        <p:txBody>
+          <a:bodyPr rtlCol="0" anchor="ctr"/>
+          <a:lstStyle/>
+          <a:p>
+            <a:pPr algn="ctr"/>
+          </a:p>
+        </p:txBody>
+      </p:sp>
+      <p:sp>
+        <p:nvSpPr>
+          <p:cNvPr id="11" name="TextBox 10"/>
+          <p:cNvSpPr txBox="1"/>
+          <p:nvPr/>
+        </p:nvSpPr>
+        <p:spPr>
+          <a:xfrm>
+            <a:off x="548640" y="1330451"/>
+            <a:ext cx="11155680" cy="301752"/>
+          </a:xfrm>
+          <a:prstGeom prst="rect">
+            <a:avLst/>
+          </a:prstGeom>
+          <a:noFill/>
+        </p:spPr>
+        <p:txBody>
+          <a:bodyPr wrap="square" lIns="54864" rIns="54864" tIns="36576" bIns="36576" anchor="ctr">
+            <a:spAutoFit/>
+          </a:bodyPr>
+          <a:lstStyle/>
+          <a:p>
             <a:pPr algn="l">
               <a:lnSpc>
                 <a:spcPct val="106000"/>
@@ -36315,27 +36656,165 @@
               </a:spcAft>
             </a:pPr>
             <a:r>
-              <a:rPr sz="4000" b="1" i="0">
+              <a:rPr sz="1100" b="1" i="0">
                 <a:solidFill>
                   <a:srgbClr val="FFFFFF"/>
                 </a:solidFill>
-                <a:latin typeface="Calibri Light"/>
-              </a:rPr>
-              <a:t>What Happens With the Upside</a:t>
-            </a:r>
-          </a:p>
-        </p:txBody>
-      </p:sp>
-      <p:sp>
-        <p:nvSpPr>
-          <p:cNvPr id="6" name="TextBox 5"/>
-          <p:cNvSpPr txBox="1"/>
-          <p:nvPr/>
-        </p:nvSpPr>
-        <p:spPr>
-          <a:xfrm>
-            <a:off x="914400" y="3977639"/>
-            <a:ext cx="9875520" cy="914400"/>
+                <a:latin typeface="Calibri"/>
+              </a:rPr>
+              <a:t>YEAR-15 OUTCOME DISTRIBUTIONS</a:t>
+            </a:r>
+          </a:p>
+        </p:txBody>
+      </p:sp>
+      <p:pic>
+        <p:nvPicPr>
+          <p:cNvPr id="12" name="Picture 11" descr="lc_05_funding_ratio_distribution.png"/>
+          <p:cNvPicPr>
+            <a:picLocks noChangeAspect="1"/>
+          </p:cNvPicPr>
+          <p:nvPr/>
+        </p:nvPicPr>
+        <p:blipFill>
+          <a:blip r:embed="rId2"/>
+          <a:stretch>
+            <a:fillRect/>
+          </a:stretch>
+        </p:blipFill>
+        <p:spPr>
+          <a:xfrm>
+            <a:off x="402336" y="1737360"/>
+            <a:ext cx="5669280" cy="2647080"/>
+          </a:xfrm>
+          <a:prstGeom prst="rect">
+            <a:avLst/>
+          </a:prstGeom>
+        </p:spPr>
+      </p:pic>
+      <p:pic>
+        <p:nvPicPr>
+          <p:cNvPr id="13" name="Picture 12" descr="lc_03_15year_IRR_distribution.png"/>
+          <p:cNvPicPr>
+            <a:picLocks noChangeAspect="1"/>
+          </p:cNvPicPr>
+          <p:nvPr/>
+        </p:nvPicPr>
+        <p:blipFill>
+          <a:blip r:embed="rId3"/>
+          <a:stretch>
+            <a:fillRect/>
+          </a:stretch>
+        </p:blipFill>
+        <p:spPr>
+          <a:xfrm>
+            <a:off x="6309360" y="1737360"/>
+            <a:ext cx="5669280" cy="2647080"/>
+          </a:xfrm>
+          <a:prstGeom prst="rect">
+            <a:avLst/>
+          </a:prstGeom>
+        </p:spPr>
+      </p:pic>
+      <p:sp>
+        <p:nvSpPr>
+          <p:cNvPr id="14" name="Rounded Rectangle 13"/>
+          <p:cNvSpPr/>
+          <p:nvPr/>
+        </p:nvSpPr>
+        <p:spPr>
+          <a:xfrm>
+            <a:off x="402336" y="5029200"/>
+            <a:ext cx="2692908" cy="1143000"/>
+          </a:xfrm>
+          <a:prstGeom prst="roundRect">
+            <a:avLst>
+              <a:gd name="adj" fmla="val 4500"/>
+            </a:avLst>
+          </a:prstGeom>
+          <a:solidFill>
+            <a:srgbClr val="EDF2F4"/>
+          </a:solidFill>
+          <a:ln>
+            <a:noFill/>
+          </a:ln>
+          <a:effectLst/>
+        </p:spPr>
+        <p:style>
+          <a:lnRef idx="1">
+            <a:schemeClr val="accent1"/>
+          </a:lnRef>
+          <a:fillRef idx="3">
+            <a:schemeClr val="accent1"/>
+          </a:fillRef>
+          <a:effectRef idx="2">
+            <a:schemeClr val="accent1"/>
+          </a:effectRef>
+          <a:fontRef idx="minor">
+            <a:schemeClr val="lt1"/>
+          </a:fontRef>
+        </p:style>
+        <p:txBody>
+          <a:bodyPr rtlCol="0" anchor="ctr"/>
+          <a:lstStyle/>
+          <a:p>
+            <a:pPr algn="ctr"/>
+          </a:p>
+        </p:txBody>
+      </p:sp>
+      <p:sp>
+        <p:nvSpPr>
+          <p:cNvPr id="15" name="Rectangle 14"/>
+          <p:cNvSpPr/>
+          <p:nvPr/>
+        </p:nvSpPr>
+        <p:spPr>
+          <a:xfrm>
+            <a:off x="402336" y="5029200"/>
+            <a:ext cx="2692908" cy="45720"/>
+          </a:xfrm>
+          <a:prstGeom prst="rect">
+            <a:avLst/>
+          </a:prstGeom>
+          <a:solidFill>
+            <a:srgbClr val="3B8E9E"/>
+          </a:solidFill>
+          <a:ln>
+            <a:noFill/>
+          </a:ln>
+          <a:effectLst/>
+        </p:spPr>
+        <p:style>
+          <a:lnRef idx="1">
+            <a:schemeClr val="accent1"/>
+          </a:lnRef>
+          <a:fillRef idx="3">
+            <a:schemeClr val="accent1"/>
+          </a:fillRef>
+          <a:effectRef idx="2">
+            <a:schemeClr val="accent1"/>
+          </a:effectRef>
+          <a:fontRef idx="minor">
+            <a:schemeClr val="lt1"/>
+          </a:fontRef>
+        </p:style>
+        <p:txBody>
+          <a:bodyPr rtlCol="0" anchor="ctr"/>
+          <a:lstStyle/>
+          <a:p>
+            <a:pPr algn="ctr"/>
+          </a:p>
+        </p:txBody>
+      </p:sp>
+      <p:sp>
+        <p:nvSpPr>
+          <p:cNvPr id="16" name="TextBox 15"/>
+          <p:cNvSpPr txBox="1"/>
+          <p:nvPr/>
+        </p:nvSpPr>
+        <p:spPr>
+          <a:xfrm>
+            <a:off x="548640" y="5148072"/>
+            <a:ext cx="2418588" cy="256032"/>
           </a:xfrm>
           <a:prstGeom prst="rect">
             <a:avLst/>
@@ -36357,13 +36836,787 @@
               </a:spcAft>
             </a:pPr>
             <a:r>
-              <a:rPr sz="1400" b="0" i="0">
-                <a:solidFill>
-                  <a:srgbClr val="AEC4CB"/>
-                </a:solidFill>
-                <a:latin typeface="Calibri"/>
-              </a:rPr>
-              <a:t>The cash-flow structure, the flows under every election scenario, and the 90/10 share</a:t>
+              <a:rPr sz="900" b="1" i="0">
+                <a:solidFill>
+                  <a:srgbClr val="3B8E9E"/>
+                </a:solidFill>
+                <a:latin typeface="Calibri"/>
+              </a:rPr>
+              <a:t>MEDIAN FUNDED RATIO</a:t>
+            </a:r>
+          </a:p>
+        </p:txBody>
+      </p:sp>
+      <p:sp>
+        <p:nvSpPr>
+          <p:cNvPr id="17" name="TextBox 16"/>
+          <p:cNvSpPr txBox="1"/>
+          <p:nvPr/>
+        </p:nvSpPr>
+        <p:spPr>
+          <a:xfrm>
+            <a:off x="548640" y="5413248"/>
+            <a:ext cx="2418588" cy="457200"/>
+          </a:xfrm>
+          <a:prstGeom prst="rect">
+            <a:avLst/>
+          </a:prstGeom>
+          <a:noFill/>
+        </p:spPr>
+        <p:txBody>
+          <a:bodyPr wrap="square" lIns="54864" rIns="54864" tIns="36576" bIns="36576" anchor="t">
+            <a:spAutoFit/>
+          </a:bodyPr>
+          <a:lstStyle/>
+          <a:p>
+            <a:pPr algn="l">
+              <a:lnSpc>
+                <a:spcPct val="106000"/>
+              </a:lnSpc>
+              <a:spcAft>
+                <a:spcPts val="400"/>
+              </a:spcAft>
+            </a:pPr>
+            <a:r>
+              <a:rPr sz="2100" b="1" i="0">
+                <a:solidFill>
+                  <a:srgbClr val="12323F"/>
+                </a:solidFill>
+                <a:latin typeface="Calibri"/>
+              </a:rPr>
+              <a:t>205%</a:t>
+            </a:r>
+          </a:p>
+        </p:txBody>
+      </p:sp>
+      <p:sp>
+        <p:nvSpPr>
+          <p:cNvPr id="18" name="TextBox 17"/>
+          <p:cNvSpPr txBox="1"/>
+          <p:nvPr/>
+        </p:nvSpPr>
+        <p:spPr>
+          <a:xfrm>
+            <a:off x="548640" y="5925312"/>
+            <a:ext cx="2418588" cy="365760"/>
+          </a:xfrm>
+          <a:prstGeom prst="rect">
+            <a:avLst/>
+          </a:prstGeom>
+          <a:noFill/>
+        </p:spPr>
+        <p:txBody>
+          <a:bodyPr wrap="square" lIns="54864" rIns="54864" tIns="36576" bIns="36576" anchor="t">
+            <a:spAutoFit/>
+          </a:bodyPr>
+          <a:lstStyle/>
+          <a:p>
+            <a:pPr algn="l">
+              <a:lnSpc>
+                <a:spcPct val="102000"/>
+              </a:lnSpc>
+              <a:spcAft>
+                <a:spcPts val="400"/>
+              </a:spcAft>
+            </a:pPr>
+            <a:r>
+              <a:rPr sz="950" b="0" i="0">
+                <a:solidFill>
+                  <a:srgbClr val="333333"/>
+                </a:solidFill>
+                <a:latin typeface="Calibri"/>
+              </a:rPr>
+              <a:t>assets / 50-50 year-15 liability</a:t>
+            </a:r>
+          </a:p>
+        </p:txBody>
+      </p:sp>
+      <p:sp>
+        <p:nvSpPr>
+          <p:cNvPr id="19" name="Rounded Rectangle 18"/>
+          <p:cNvSpPr/>
+          <p:nvPr/>
+        </p:nvSpPr>
+        <p:spPr>
+          <a:xfrm>
+            <a:off x="3314699" y="5029200"/>
+            <a:ext cx="2692908" cy="1143000"/>
+          </a:xfrm>
+          <a:prstGeom prst="roundRect">
+            <a:avLst>
+              <a:gd name="adj" fmla="val 4500"/>
+            </a:avLst>
+          </a:prstGeom>
+          <a:solidFill>
+            <a:srgbClr val="EDF2F4"/>
+          </a:solidFill>
+          <a:ln>
+            <a:noFill/>
+          </a:ln>
+          <a:effectLst/>
+        </p:spPr>
+        <p:style>
+          <a:lnRef idx="1">
+            <a:schemeClr val="accent1"/>
+          </a:lnRef>
+          <a:fillRef idx="3">
+            <a:schemeClr val="accent1"/>
+          </a:fillRef>
+          <a:effectRef idx="2">
+            <a:schemeClr val="accent1"/>
+          </a:effectRef>
+          <a:fontRef idx="minor">
+            <a:schemeClr val="lt1"/>
+          </a:fontRef>
+        </p:style>
+        <p:txBody>
+          <a:bodyPr rtlCol="0" anchor="ctr"/>
+          <a:lstStyle/>
+          <a:p>
+            <a:pPr algn="ctr"/>
+          </a:p>
+        </p:txBody>
+      </p:sp>
+      <p:sp>
+        <p:nvSpPr>
+          <p:cNvPr id="20" name="Rectangle 19"/>
+          <p:cNvSpPr/>
+          <p:nvPr/>
+        </p:nvSpPr>
+        <p:spPr>
+          <a:xfrm>
+            <a:off x="3314699" y="5029200"/>
+            <a:ext cx="2692908" cy="45720"/>
+          </a:xfrm>
+          <a:prstGeom prst="rect">
+            <a:avLst/>
+          </a:prstGeom>
+          <a:solidFill>
+            <a:srgbClr val="3B8E9E"/>
+          </a:solidFill>
+          <a:ln>
+            <a:noFill/>
+          </a:ln>
+          <a:effectLst/>
+        </p:spPr>
+        <p:style>
+          <a:lnRef idx="1">
+            <a:schemeClr val="accent1"/>
+          </a:lnRef>
+          <a:fillRef idx="3">
+            <a:schemeClr val="accent1"/>
+          </a:fillRef>
+          <a:effectRef idx="2">
+            <a:schemeClr val="accent1"/>
+          </a:effectRef>
+          <a:fontRef idx="minor">
+            <a:schemeClr val="lt1"/>
+          </a:fontRef>
+        </p:style>
+        <p:txBody>
+          <a:bodyPr rtlCol="0" anchor="ctr"/>
+          <a:lstStyle/>
+          <a:p>
+            <a:pPr algn="ctr"/>
+          </a:p>
+        </p:txBody>
+      </p:sp>
+      <p:sp>
+        <p:nvSpPr>
+          <p:cNvPr id="21" name="TextBox 20"/>
+          <p:cNvSpPr txBox="1"/>
+          <p:nvPr/>
+        </p:nvSpPr>
+        <p:spPr>
+          <a:xfrm>
+            <a:off x="3461003" y="5148072"/>
+            <a:ext cx="2418588" cy="256032"/>
+          </a:xfrm>
+          <a:prstGeom prst="rect">
+            <a:avLst/>
+          </a:prstGeom>
+          <a:noFill/>
+        </p:spPr>
+        <p:txBody>
+          <a:bodyPr wrap="square" lIns="54864" rIns="54864" tIns="36576" bIns="36576" anchor="t">
+            <a:spAutoFit/>
+          </a:bodyPr>
+          <a:lstStyle/>
+          <a:p>
+            <a:pPr algn="l">
+              <a:lnSpc>
+                <a:spcPct val="106000"/>
+              </a:lnSpc>
+              <a:spcAft>
+                <a:spcPts val="400"/>
+              </a:spcAft>
+            </a:pPr>
+            <a:r>
+              <a:rPr sz="900" b="1" i="0">
+                <a:solidFill>
+                  <a:srgbClr val="3B8E9E"/>
+                </a:solidFill>
+                <a:latin typeface="Calibri"/>
+              </a:rPr>
+              <a:t>MEDIAN 15Y IRR</a:t>
+            </a:r>
+          </a:p>
+        </p:txBody>
+      </p:sp>
+      <p:sp>
+        <p:nvSpPr>
+          <p:cNvPr id="22" name="TextBox 21"/>
+          <p:cNvSpPr txBox="1"/>
+          <p:nvPr/>
+        </p:nvSpPr>
+        <p:spPr>
+          <a:xfrm>
+            <a:off x="3461003" y="5413248"/>
+            <a:ext cx="2418588" cy="457200"/>
+          </a:xfrm>
+          <a:prstGeom prst="rect">
+            <a:avLst/>
+          </a:prstGeom>
+          <a:noFill/>
+        </p:spPr>
+        <p:txBody>
+          <a:bodyPr wrap="square" lIns="54864" rIns="54864" tIns="36576" bIns="36576" anchor="t">
+            <a:spAutoFit/>
+          </a:bodyPr>
+          <a:lstStyle/>
+          <a:p>
+            <a:pPr algn="l">
+              <a:lnSpc>
+                <a:spcPct val="106000"/>
+              </a:lnSpc>
+              <a:spcAft>
+                <a:spcPts val="400"/>
+              </a:spcAft>
+            </a:pPr>
+            <a:r>
+              <a:rPr sz="2100" b="1" i="0">
+                <a:solidFill>
+                  <a:srgbClr val="12323F"/>
+                </a:solidFill>
+                <a:latin typeface="Calibri"/>
+              </a:rPr>
+              <a:t>5.9%</a:t>
+            </a:r>
+          </a:p>
+        </p:txBody>
+      </p:sp>
+      <p:sp>
+        <p:nvSpPr>
+          <p:cNvPr id="23" name="TextBox 22"/>
+          <p:cNvSpPr txBox="1"/>
+          <p:nvPr/>
+        </p:nvSpPr>
+        <p:spPr>
+          <a:xfrm>
+            <a:off x="3461003" y="5925312"/>
+            <a:ext cx="2418588" cy="365760"/>
+          </a:xfrm>
+          <a:prstGeom prst="rect">
+            <a:avLst/>
+          </a:prstGeom>
+          <a:noFill/>
+        </p:spPr>
+        <p:txBody>
+          <a:bodyPr wrap="square" lIns="54864" rIns="54864" tIns="36576" bIns="36576" anchor="t">
+            <a:spAutoFit/>
+          </a:bodyPr>
+          <a:lstStyle/>
+          <a:p>
+            <a:pPr algn="l">
+              <a:lnSpc>
+                <a:spcPct val="102000"/>
+              </a:lnSpc>
+              <a:spcAft>
+                <a:spcPts val="400"/>
+              </a:spcAft>
+            </a:pPr>
+            <a:r>
+              <a:rPr sz="950" b="0" i="0">
+                <a:solidFill>
+                  <a:srgbClr val="333333"/>
+                </a:solidFill>
+                <a:latin typeface="Calibri"/>
+              </a:rPr>
+              <a:t>5th pct 1.0%, 0.5th pct −2.8%</a:t>
+            </a:r>
+          </a:p>
+        </p:txBody>
+      </p:sp>
+      <p:sp>
+        <p:nvSpPr>
+          <p:cNvPr id="24" name="Rounded Rectangle 23"/>
+          <p:cNvSpPr/>
+          <p:nvPr/>
+        </p:nvSpPr>
+        <p:spPr>
+          <a:xfrm>
+            <a:off x="6227064" y="5029200"/>
+            <a:ext cx="2692908" cy="1143000"/>
+          </a:xfrm>
+          <a:prstGeom prst="roundRect">
+            <a:avLst>
+              <a:gd name="adj" fmla="val 4500"/>
+            </a:avLst>
+          </a:prstGeom>
+          <a:solidFill>
+            <a:srgbClr val="EDF2F4"/>
+          </a:solidFill>
+          <a:ln>
+            <a:noFill/>
+          </a:ln>
+          <a:effectLst/>
+        </p:spPr>
+        <p:style>
+          <a:lnRef idx="1">
+            <a:schemeClr val="accent1"/>
+          </a:lnRef>
+          <a:fillRef idx="3">
+            <a:schemeClr val="accent1"/>
+          </a:fillRef>
+          <a:effectRef idx="2">
+            <a:schemeClr val="accent1"/>
+          </a:effectRef>
+          <a:fontRef idx="minor">
+            <a:schemeClr val="lt1"/>
+          </a:fontRef>
+        </p:style>
+        <p:txBody>
+          <a:bodyPr rtlCol="0" anchor="ctr"/>
+          <a:lstStyle/>
+          <a:p>
+            <a:pPr algn="ctr"/>
+          </a:p>
+        </p:txBody>
+      </p:sp>
+      <p:sp>
+        <p:nvSpPr>
+          <p:cNvPr id="25" name="Rectangle 24"/>
+          <p:cNvSpPr/>
+          <p:nvPr/>
+        </p:nvSpPr>
+        <p:spPr>
+          <a:xfrm>
+            <a:off x="6227064" y="5029200"/>
+            <a:ext cx="2692908" cy="45720"/>
+          </a:xfrm>
+          <a:prstGeom prst="rect">
+            <a:avLst/>
+          </a:prstGeom>
+          <a:solidFill>
+            <a:srgbClr val="3B8E9E"/>
+          </a:solidFill>
+          <a:ln>
+            <a:noFill/>
+          </a:ln>
+          <a:effectLst/>
+        </p:spPr>
+        <p:style>
+          <a:lnRef idx="1">
+            <a:schemeClr val="accent1"/>
+          </a:lnRef>
+          <a:fillRef idx="3">
+            <a:schemeClr val="accent1"/>
+          </a:fillRef>
+          <a:effectRef idx="2">
+            <a:schemeClr val="accent1"/>
+          </a:effectRef>
+          <a:fontRef idx="minor">
+            <a:schemeClr val="lt1"/>
+          </a:fontRef>
+        </p:style>
+        <p:txBody>
+          <a:bodyPr rtlCol="0" anchor="ctr"/>
+          <a:lstStyle/>
+          <a:p>
+            <a:pPr algn="ctr"/>
+          </a:p>
+        </p:txBody>
+      </p:sp>
+      <p:sp>
+        <p:nvSpPr>
+          <p:cNvPr id="26" name="TextBox 25"/>
+          <p:cNvSpPr txBox="1"/>
+          <p:nvPr/>
+        </p:nvSpPr>
+        <p:spPr>
+          <a:xfrm>
+            <a:off x="6373368" y="5148072"/>
+            <a:ext cx="2418588" cy="256032"/>
+          </a:xfrm>
+          <a:prstGeom prst="rect">
+            <a:avLst/>
+          </a:prstGeom>
+          <a:noFill/>
+        </p:spPr>
+        <p:txBody>
+          <a:bodyPr wrap="square" lIns="54864" rIns="54864" tIns="36576" bIns="36576" anchor="t">
+            <a:spAutoFit/>
+          </a:bodyPr>
+          <a:lstStyle/>
+          <a:p>
+            <a:pPr algn="l">
+              <a:lnSpc>
+                <a:spcPct val="106000"/>
+              </a:lnSpc>
+              <a:spcAft>
+                <a:spcPts val="400"/>
+              </a:spcAft>
+            </a:pPr>
+            <a:r>
+              <a:rPr sz="900" b="1" i="0">
+                <a:solidFill>
+                  <a:srgbClr val="3B8E9E"/>
+                </a:solidFill>
+                <a:latin typeface="Calibri"/>
+              </a:rPr>
+              <a:t>P(UNDERFUNDED), 50/50</a:t>
+            </a:r>
+          </a:p>
+        </p:txBody>
+      </p:sp>
+      <p:sp>
+        <p:nvSpPr>
+          <p:cNvPr id="27" name="TextBox 26"/>
+          <p:cNvSpPr txBox="1"/>
+          <p:nvPr/>
+        </p:nvSpPr>
+        <p:spPr>
+          <a:xfrm>
+            <a:off x="6373368" y="5413248"/>
+            <a:ext cx="2418588" cy="457200"/>
+          </a:xfrm>
+          <a:prstGeom prst="rect">
+            <a:avLst/>
+          </a:prstGeom>
+          <a:noFill/>
+        </p:spPr>
+        <p:txBody>
+          <a:bodyPr wrap="square" lIns="54864" rIns="54864" tIns="36576" bIns="36576" anchor="t">
+            <a:spAutoFit/>
+          </a:bodyPr>
+          <a:lstStyle/>
+          <a:p>
+            <a:pPr algn="l">
+              <a:lnSpc>
+                <a:spcPct val="106000"/>
+              </a:lnSpc>
+              <a:spcAft>
+                <a:spcPts val="400"/>
+              </a:spcAft>
+            </a:pPr>
+            <a:r>
+              <a:rPr sz="2100" b="1" i="0">
+                <a:solidFill>
+                  <a:srgbClr val="12323F"/>
+                </a:solidFill>
+                <a:latin typeface="Calibri"/>
+              </a:rPr>
+              <a:t>≈ 2.5%</a:t>
+            </a:r>
+          </a:p>
+        </p:txBody>
+      </p:sp>
+      <p:sp>
+        <p:nvSpPr>
+          <p:cNvPr id="28" name="TextBox 27"/>
+          <p:cNvSpPr txBox="1"/>
+          <p:nvPr/>
+        </p:nvSpPr>
+        <p:spPr>
+          <a:xfrm>
+            <a:off x="6373368" y="5925312"/>
+            <a:ext cx="2418588" cy="365760"/>
+          </a:xfrm>
+          <a:prstGeom prst="rect">
+            <a:avLst/>
+          </a:prstGeom>
+          <a:noFill/>
+        </p:spPr>
+        <p:txBody>
+          <a:bodyPr wrap="square" lIns="54864" rIns="54864" tIns="36576" bIns="36576" anchor="t">
+            <a:spAutoFit/>
+          </a:bodyPr>
+          <a:lstStyle/>
+          <a:p>
+            <a:pPr algn="l">
+              <a:lnSpc>
+                <a:spcPct val="102000"/>
+              </a:lnSpc>
+              <a:spcAft>
+                <a:spcPts val="400"/>
+              </a:spcAft>
+            </a:pPr>
+            <a:r>
+              <a:rPr sz="950" b="0" i="0">
+                <a:solidFill>
+                  <a:srgbClr val="333333"/>
+                </a:solidFill>
+                <a:latin typeface="Calibri"/>
+              </a:rPr>
+              <a:t>rises to ≈ 5% at a 100% lump election</a:t>
+            </a:r>
+          </a:p>
+        </p:txBody>
+      </p:sp>
+      <p:sp>
+        <p:nvSpPr>
+          <p:cNvPr id="29" name="Rounded Rectangle 28"/>
+          <p:cNvSpPr/>
+          <p:nvPr/>
+        </p:nvSpPr>
+        <p:spPr>
+          <a:xfrm>
+            <a:off x="9139428" y="5029200"/>
+            <a:ext cx="2692908" cy="1143000"/>
+          </a:xfrm>
+          <a:prstGeom prst="roundRect">
+            <a:avLst>
+              <a:gd name="adj" fmla="val 4500"/>
+            </a:avLst>
+          </a:prstGeom>
+          <a:solidFill>
+            <a:srgbClr val="EDF2F4"/>
+          </a:solidFill>
+          <a:ln>
+            <a:noFill/>
+          </a:ln>
+          <a:effectLst/>
+        </p:spPr>
+        <p:style>
+          <a:lnRef idx="1">
+            <a:schemeClr val="accent1"/>
+          </a:lnRef>
+          <a:fillRef idx="3">
+            <a:schemeClr val="accent1"/>
+          </a:fillRef>
+          <a:effectRef idx="2">
+            <a:schemeClr val="accent1"/>
+          </a:effectRef>
+          <a:fontRef idx="minor">
+            <a:schemeClr val="lt1"/>
+          </a:fontRef>
+        </p:style>
+        <p:txBody>
+          <a:bodyPr rtlCol="0" anchor="ctr"/>
+          <a:lstStyle/>
+          <a:p>
+            <a:pPr algn="ctr"/>
+          </a:p>
+        </p:txBody>
+      </p:sp>
+      <p:sp>
+        <p:nvSpPr>
+          <p:cNvPr id="30" name="Rectangle 29"/>
+          <p:cNvSpPr/>
+          <p:nvPr/>
+        </p:nvSpPr>
+        <p:spPr>
+          <a:xfrm>
+            <a:off x="9139428" y="5029200"/>
+            <a:ext cx="2692908" cy="45720"/>
+          </a:xfrm>
+          <a:prstGeom prst="rect">
+            <a:avLst/>
+          </a:prstGeom>
+          <a:solidFill>
+            <a:srgbClr val="3B8E9E"/>
+          </a:solidFill>
+          <a:ln>
+            <a:noFill/>
+          </a:ln>
+          <a:effectLst/>
+        </p:spPr>
+        <p:style>
+          <a:lnRef idx="1">
+            <a:schemeClr val="accent1"/>
+          </a:lnRef>
+          <a:fillRef idx="3">
+            <a:schemeClr val="accent1"/>
+          </a:fillRef>
+          <a:effectRef idx="2">
+            <a:schemeClr val="accent1"/>
+          </a:effectRef>
+          <a:fontRef idx="minor">
+            <a:schemeClr val="lt1"/>
+          </a:fontRef>
+        </p:style>
+        <p:txBody>
+          <a:bodyPr rtlCol="0" anchor="ctr"/>
+          <a:lstStyle/>
+          <a:p>
+            <a:pPr algn="ctr"/>
+          </a:p>
+        </p:txBody>
+      </p:sp>
+      <p:sp>
+        <p:nvSpPr>
+          <p:cNvPr id="31" name="TextBox 30"/>
+          <p:cNvSpPr txBox="1"/>
+          <p:nvPr/>
+        </p:nvSpPr>
+        <p:spPr>
+          <a:xfrm>
+            <a:off x="9285732" y="5148072"/>
+            <a:ext cx="2418588" cy="256032"/>
+          </a:xfrm>
+          <a:prstGeom prst="rect">
+            <a:avLst/>
+          </a:prstGeom>
+          <a:noFill/>
+        </p:spPr>
+        <p:txBody>
+          <a:bodyPr wrap="square" lIns="54864" rIns="54864" tIns="36576" bIns="36576" anchor="t">
+            <a:spAutoFit/>
+          </a:bodyPr>
+          <a:lstStyle/>
+          <a:p>
+            <a:pPr algn="l">
+              <a:lnSpc>
+                <a:spcPct val="106000"/>
+              </a:lnSpc>
+              <a:spcAft>
+                <a:spcPts val="400"/>
+              </a:spcAft>
+            </a:pPr>
+            <a:r>
+              <a:rPr sz="900" b="1" i="0">
+                <a:solidFill>
+                  <a:srgbClr val="3B8E9E"/>
+                </a:solidFill>
+                <a:latin typeface="Calibri"/>
+              </a:rPr>
+              <a:t>MEAN ANNUAL RETURN</a:t>
+            </a:r>
+          </a:p>
+        </p:txBody>
+      </p:sp>
+      <p:sp>
+        <p:nvSpPr>
+          <p:cNvPr id="32" name="TextBox 31"/>
+          <p:cNvSpPr txBox="1"/>
+          <p:nvPr/>
+        </p:nvSpPr>
+        <p:spPr>
+          <a:xfrm>
+            <a:off x="9285732" y="5413248"/>
+            <a:ext cx="2418588" cy="457200"/>
+          </a:xfrm>
+          <a:prstGeom prst="rect">
+            <a:avLst/>
+          </a:prstGeom>
+          <a:noFill/>
+        </p:spPr>
+        <p:txBody>
+          <a:bodyPr wrap="square" lIns="54864" rIns="54864" tIns="36576" bIns="36576" anchor="t">
+            <a:spAutoFit/>
+          </a:bodyPr>
+          <a:lstStyle/>
+          <a:p>
+            <a:pPr algn="l">
+              <a:lnSpc>
+                <a:spcPct val="106000"/>
+              </a:lnSpc>
+              <a:spcAft>
+                <a:spcPts val="400"/>
+              </a:spcAft>
+            </a:pPr>
+            <a:r>
+              <a:rPr sz="2100" b="1" i="0">
+                <a:solidFill>
+                  <a:srgbClr val="12323F"/>
+                </a:solidFill>
+                <a:latin typeface="Calibri"/>
+              </a:rPr>
+              <a:t>6.3%</a:t>
+            </a:r>
+          </a:p>
+        </p:txBody>
+      </p:sp>
+      <p:sp>
+        <p:nvSpPr>
+          <p:cNvPr id="33" name="TextBox 32"/>
+          <p:cNvSpPr txBox="1"/>
+          <p:nvPr/>
+        </p:nvSpPr>
+        <p:spPr>
+          <a:xfrm>
+            <a:off x="9285732" y="5925312"/>
+            <a:ext cx="2418588" cy="365760"/>
+          </a:xfrm>
+          <a:prstGeom prst="rect">
+            <a:avLst/>
+          </a:prstGeom>
+          <a:noFill/>
+        </p:spPr>
+        <p:txBody>
+          <a:bodyPr wrap="square" lIns="54864" rIns="54864" tIns="36576" bIns="36576" anchor="t">
+            <a:spAutoFit/>
+          </a:bodyPr>
+          <a:lstStyle/>
+          <a:p>
+            <a:pPr algn="l">
+              <a:lnSpc>
+                <a:spcPct val="102000"/>
+              </a:lnSpc>
+              <a:spcAft>
+                <a:spcPts val="400"/>
+              </a:spcAft>
+            </a:pPr>
+            <a:r>
+              <a:rPr sz="950" b="0" i="0">
+                <a:solidFill>
+                  <a:srgbClr val="333333"/>
+                </a:solidFill>
+                <a:latin typeface="Calibri"/>
+              </a:rPr>
+              <a:t>contribution-stripped</a:t>
+            </a:r>
+          </a:p>
+        </p:txBody>
+      </p:sp>
+      <p:sp>
+        <p:nvSpPr>
+          <p:cNvPr id="34" name="TextBox 33"/>
+          <p:cNvSpPr txBox="1"/>
+          <p:nvPr/>
+        </p:nvSpPr>
+        <p:spPr>
+          <a:xfrm>
+            <a:off x="402336" y="6309360"/>
+            <a:ext cx="11430000" cy="365760"/>
+          </a:xfrm>
+          <a:prstGeom prst="rect">
+            <a:avLst/>
+          </a:prstGeom>
+          <a:noFill/>
+        </p:spPr>
+        <p:txBody>
+          <a:bodyPr wrap="square" lIns="54864" rIns="54864" tIns="36576" bIns="36576" anchor="t">
+            <a:spAutoFit/>
+          </a:bodyPr>
+          <a:lstStyle/>
+          <a:p>
+            <a:pPr algn="l">
+              <a:lnSpc>
+                <a:spcPct val="106000"/>
+              </a:lnSpc>
+              <a:spcAft>
+                <a:spcPts val="400"/>
+              </a:spcAft>
+            </a:pPr>
+            <a:r>
+              <a:rPr sz="800" b="0" i="1">
+                <a:solidFill>
+                  <a:srgbClr val="8A8A8A"/>
+                </a:solidFill>
+                <a:latin typeface="Calibri"/>
+              </a:rPr>
+              <a:t>The tail is fatter than an assumed 70/30 blend: the waterfall loads the volatile RSP far more heavily by year 15. Source: mc_lifecycle.py / results_var/MC_LIFECYCLE_REPORT.md.</a:t>
             </a:r>
           </a:p>
         </p:txBody>
@@ -36394,8 +37647,52 @@
         </p:nvSpPr>
         <p:spPr>
           <a:xfrm>
-            <a:off x="0" y="274320"/>
-            <a:ext cx="128016" cy="566928"/>
+            <a:off x="0" y="0"/>
+            <a:ext cx="12191695" cy="6858000"/>
+          </a:xfrm>
+          <a:prstGeom prst="rect">
+            <a:avLst/>
+          </a:prstGeom>
+          <a:solidFill>
+            <a:srgbClr val="0D2833"/>
+          </a:solidFill>
+          <a:ln>
+            <a:noFill/>
+          </a:ln>
+          <a:effectLst/>
+        </p:spPr>
+        <p:style>
+          <a:lnRef idx="1">
+            <a:schemeClr val="accent1"/>
+          </a:lnRef>
+          <a:fillRef idx="3">
+            <a:schemeClr val="accent1"/>
+          </a:fillRef>
+          <a:effectRef idx="2">
+            <a:schemeClr val="accent1"/>
+          </a:effectRef>
+          <a:fontRef idx="minor">
+            <a:schemeClr val="lt1"/>
+          </a:fontRef>
+        </p:style>
+        <p:txBody>
+          <a:bodyPr rtlCol="0" anchor="ctr"/>
+          <a:lstStyle/>
+          <a:p>
+            <a:pPr algn="ctr"/>
+          </a:p>
+        </p:txBody>
+      </p:sp>
+      <p:sp>
+        <p:nvSpPr>
+          <p:cNvPr id="3" name="Rectangle 2"/>
+          <p:cNvSpPr/>
+          <p:nvPr/>
+        </p:nvSpPr>
+        <p:spPr>
+          <a:xfrm>
+            <a:off x="914400" y="2395728"/>
+            <a:ext cx="1371600" cy="45720"/>
           </a:xfrm>
           <a:prstGeom prst="rect">
             <a:avLst/>
@@ -36432,58 +37729,14 @@
       </p:sp>
       <p:sp>
         <p:nvSpPr>
-          <p:cNvPr id="3" name="Rectangle 2"/>
-          <p:cNvSpPr/>
-          <p:nvPr/>
-        </p:nvSpPr>
-        <p:spPr>
-          <a:xfrm>
-            <a:off x="11759184" y="182880"/>
-            <a:ext cx="310896" cy="310896"/>
-          </a:xfrm>
-          <a:prstGeom prst="rect">
-            <a:avLst/>
-          </a:prstGeom>
-          <a:solidFill>
-            <a:srgbClr val="E080E0"/>
-          </a:solidFill>
-          <a:ln>
-            <a:noFill/>
-          </a:ln>
-          <a:effectLst/>
-        </p:spPr>
-        <p:style>
-          <a:lnRef idx="1">
-            <a:schemeClr val="accent1"/>
-          </a:lnRef>
-          <a:fillRef idx="3">
-            <a:schemeClr val="accent1"/>
-          </a:fillRef>
-          <a:effectRef idx="2">
-            <a:schemeClr val="accent1"/>
-          </a:effectRef>
-          <a:fontRef idx="minor">
-            <a:schemeClr val="lt1"/>
-          </a:fontRef>
-        </p:style>
-        <p:txBody>
-          <a:bodyPr rtlCol="0" anchor="ctr"/>
-          <a:lstStyle/>
-          <a:p>
-            <a:pPr algn="ctr"/>
-          </a:p>
-        </p:txBody>
-      </p:sp>
-      <p:sp>
-        <p:nvSpPr>
           <p:cNvPr id="4" name="TextBox 3"/>
           <p:cNvSpPr txBox="1"/>
           <p:nvPr/>
         </p:nvSpPr>
         <p:spPr>
           <a:xfrm>
-            <a:off x="384048" y="219456"/>
-            <a:ext cx="10881360" cy="566928"/>
+            <a:off x="914400" y="1965960"/>
+            <a:ext cx="7315200" cy="365760"/>
           </a:xfrm>
           <a:prstGeom prst="rect">
             <a:avLst/>
@@ -36505,27 +37758,69 @@
               </a:spcAft>
             </a:pPr>
             <a:r>
-              <a:rPr sz="2400" b="1" i="0">
-                <a:solidFill>
-                  <a:srgbClr val="12323F"/>
+              <a:rPr sz="1300" b="1" i="0">
+                <a:solidFill>
+                  <a:srgbClr val="3B8E9E"/>
+                </a:solidFill>
+                <a:latin typeface="Calibri"/>
+              </a:rPr>
+              <a:t>SECTION 06</a:t>
+            </a:r>
+          </a:p>
+        </p:txBody>
+      </p:sp>
+      <p:sp>
+        <p:nvSpPr>
+          <p:cNvPr id="5" name="TextBox 4"/>
+          <p:cNvSpPr txBox="1"/>
+          <p:nvPr/>
+        </p:nvSpPr>
+        <p:spPr>
+          <a:xfrm>
+            <a:off x="914400" y="2606040"/>
+            <a:ext cx="10241280" cy="1280160"/>
+          </a:xfrm>
+          <a:prstGeom prst="rect">
+            <a:avLst/>
+          </a:prstGeom>
+          <a:noFill/>
+        </p:spPr>
+        <p:txBody>
+          <a:bodyPr wrap="square" lIns="54864" rIns="54864" tIns="36576" bIns="36576" anchor="t">
+            <a:spAutoFit/>
+          </a:bodyPr>
+          <a:lstStyle/>
+          <a:p>
+            <a:pPr algn="l">
+              <a:lnSpc>
+                <a:spcPct val="106000"/>
+              </a:lnSpc>
+              <a:spcAft>
+                <a:spcPts val="400"/>
+              </a:spcAft>
+            </a:pPr>
+            <a:r>
+              <a:rPr sz="4000" b="1" i="0">
+                <a:solidFill>
+                  <a:srgbClr val="FFFFFF"/>
                 </a:solidFill>
                 <a:latin typeface="Calibri Light"/>
               </a:rPr>
-              <a:t>The Cash-Flow Structure</a:t>
-            </a:r>
-          </a:p>
-        </p:txBody>
-      </p:sp>
-      <p:sp>
-        <p:nvSpPr>
-          <p:cNvPr id="5" name="TextBox 4"/>
-          <p:cNvSpPr txBox="1"/>
-          <p:nvPr/>
-        </p:nvSpPr>
-        <p:spPr>
-          <a:xfrm>
-            <a:off x="402336" y="749808"/>
-            <a:ext cx="11155680" cy="365760"/>
+              <a:t>What Happens With the Upside</a:t>
+            </a:r>
+          </a:p>
+        </p:txBody>
+      </p:sp>
+      <p:sp>
+        <p:nvSpPr>
+          <p:cNvPr id="6" name="TextBox 5"/>
+          <p:cNvSpPr txBox="1"/>
+          <p:nvPr/>
+        </p:nvSpPr>
+        <p:spPr>
+          <a:xfrm>
+            <a:off x="914400" y="3977639"/>
+            <a:ext cx="9875520" cy="914400"/>
           </a:xfrm>
           <a:prstGeom prst="rect">
             <a:avLst/>
@@ -36547,1146 +37842,13 @@
               </a:spcAft>
             </a:pPr>
             <a:r>
-              <a:rPr sz="1250" b="0" i="0">
-                <a:solidFill>
-                  <a:srgbClr val="3B8E9E"/>
-                </a:solidFill>
-                <a:latin typeface="Calibri"/>
-              </a:rPr>
-              <a:t>Contributions in for 10 years; a year-15 spike, then a 35-year pension tail</a:t>
-            </a:r>
-          </a:p>
-        </p:txBody>
-      </p:sp>
-      <p:sp>
-        <p:nvSpPr>
-          <p:cNvPr id="6" name="Rectangle 5"/>
-          <p:cNvSpPr/>
-          <p:nvPr/>
-        </p:nvSpPr>
-        <p:spPr>
-          <a:xfrm>
-            <a:off x="402336" y="1133856"/>
-            <a:ext cx="11430000" cy="12801"/>
-          </a:xfrm>
-          <a:prstGeom prst="rect">
-            <a:avLst/>
-          </a:prstGeom>
-          <a:solidFill>
-            <a:srgbClr val="C7D3D7"/>
-          </a:solidFill>
-          <a:ln>
-            <a:noFill/>
-          </a:ln>
-          <a:effectLst/>
-        </p:spPr>
-        <p:style>
-          <a:lnRef idx="1">
-            <a:schemeClr val="accent1"/>
-          </a:lnRef>
-          <a:fillRef idx="3">
-            <a:schemeClr val="accent1"/>
-          </a:fillRef>
-          <a:effectRef idx="2">
-            <a:schemeClr val="accent1"/>
-          </a:effectRef>
-          <a:fontRef idx="minor">
-            <a:schemeClr val="lt1"/>
-          </a:fontRef>
-        </p:style>
-        <p:txBody>
-          <a:bodyPr rtlCol="0" anchor="ctr"/>
-          <a:lstStyle/>
-          <a:p>
-            <a:pPr algn="ctr"/>
-          </a:p>
-        </p:txBody>
-      </p:sp>
-      <p:sp>
-        <p:nvSpPr>
-          <p:cNvPr id="7" name="TextBox 6"/>
-          <p:cNvSpPr txBox="1"/>
-          <p:nvPr/>
-        </p:nvSpPr>
-        <p:spPr>
-          <a:xfrm>
-            <a:off x="11338560" y="164592"/>
-            <a:ext cx="640080" cy="274320"/>
-          </a:xfrm>
-          <a:prstGeom prst="rect">
-            <a:avLst/>
-          </a:prstGeom>
-          <a:noFill/>
-        </p:spPr>
-        <p:txBody>
-          <a:bodyPr wrap="square" lIns="54864" rIns="54864" tIns="36576" bIns="36576" anchor="t">
-            <a:spAutoFit/>
-          </a:bodyPr>
-          <a:lstStyle/>
-          <a:p>
-            <a:pPr algn="r">
-              <a:lnSpc>
-                <a:spcPct val="106000"/>
-              </a:lnSpc>
-              <a:spcAft>
-                <a:spcPts val="400"/>
-              </a:spcAft>
-            </a:pPr>
-            <a:r>
-              <a:rPr sz="1200" b="0" i="0">
-                <a:solidFill>
-                  <a:srgbClr val="8A8A8A"/>
-                </a:solidFill>
-                <a:latin typeface="Calibri"/>
-              </a:rPr>
-              <a:t>28</a:t>
-            </a:r>
-          </a:p>
-        </p:txBody>
-      </p:sp>
-      <p:sp>
-        <p:nvSpPr>
-          <p:cNvPr id="8" name="TextBox 7"/>
-          <p:cNvSpPr txBox="1"/>
-          <p:nvPr/>
-        </p:nvSpPr>
-        <p:spPr>
-          <a:xfrm>
-            <a:off x="402336" y="6437376"/>
-            <a:ext cx="11338560" cy="274320"/>
-          </a:xfrm>
-          <a:prstGeom prst="rect">
-            <a:avLst/>
-          </a:prstGeom>
-          <a:noFill/>
-        </p:spPr>
-        <p:txBody>
-          <a:bodyPr wrap="square" lIns="54864" rIns="54864" tIns="36576" bIns="36576">
-            <a:spAutoFit/>
-          </a:bodyPr>
-          <a:lstStyle/>
-          <a:p>
-            <a:r>
-              <a:rPr sz="800" b="0" i="0">
-                <a:solidFill>
-                  <a:srgbClr val="B6C2C6"/>
-                </a:solidFill>
-                <a:latin typeface="Calibri"/>
-              </a:rPr>
-              <a:t>CLIENT SITUATION</a:t>
-            </a:r>
-            <a:r>
-              <a:rPr sz="800" b="0" i="0">
-                <a:solidFill>
-                  <a:srgbClr val="B6C2C6"/>
-                </a:solidFill>
-                <a:latin typeface="Calibri"/>
-              </a:rPr>
-              <a:t>   |   </a:t>
-            </a:r>
-            <a:r>
-              <a:rPr sz="800" b="0" i="0">
-                <a:solidFill>
-                  <a:srgbClr val="B6C2C6"/>
-                </a:solidFill>
-                <a:latin typeface="Calibri"/>
-              </a:rPr>
-              <a:t>OUR SELLING POINTS</a:t>
-            </a:r>
-            <a:r>
-              <a:rPr sz="800" b="0" i="0">
-                <a:solidFill>
-                  <a:srgbClr val="B6C2C6"/>
-                </a:solidFill>
-                <a:latin typeface="Calibri"/>
-              </a:rPr>
-              <a:t>   |   </a:t>
-            </a:r>
-            <a:r>
-              <a:rPr sz="800" b="0" i="0">
-                <a:solidFill>
-                  <a:srgbClr val="B6C2C6"/>
-                </a:solidFill>
-                <a:latin typeface="Calibri"/>
-              </a:rPr>
-              <a:t>STRATEGIC CHALLENGES &amp; MARKET OVERVIEW</a:t>
-            </a:r>
-            <a:r>
-              <a:rPr sz="800" b="0" i="0">
-                <a:solidFill>
-                  <a:srgbClr val="B6C2C6"/>
-                </a:solidFill>
-                <a:latin typeface="Calibri"/>
-              </a:rPr>
-              <a:t>   |   </a:t>
-            </a:r>
-            <a:r>
-              <a:rPr sz="800" b="0" i="0">
-                <a:solidFill>
-                  <a:srgbClr val="B6C2C6"/>
-                </a:solidFill>
-                <a:latin typeface="Calibri"/>
-              </a:rPr>
-              <a:t>PRODUCT STRATEGY</a:t>
-            </a:r>
-            <a:r>
-              <a:rPr sz="800" b="0" i="0">
-                <a:solidFill>
-                  <a:srgbClr val="B6C2C6"/>
-                </a:solidFill>
-                <a:latin typeface="Calibri"/>
-              </a:rPr>
-              <a:t>   |   </a:t>
-            </a:r>
-            <a:r>
-              <a:rPr sz="800" b="0" i="0">
-                <a:solidFill>
-                  <a:srgbClr val="B6C2C6"/>
-                </a:solidFill>
-                <a:latin typeface="Calibri"/>
-              </a:rPr>
-              <a:t>PORTFOLIO RESULTS</a:t>
-            </a:r>
-            <a:r>
-              <a:rPr sz="800" b="0" i="0">
-                <a:solidFill>
-                  <a:srgbClr val="B6C2C6"/>
-                </a:solidFill>
-                <a:latin typeface="Calibri"/>
-              </a:rPr>
-              <a:t>   |   </a:t>
-            </a:r>
-            <a:r>
-              <a:rPr sz="800" b="1" i="0">
-                <a:solidFill>
-                  <a:srgbClr val="1F4E5F"/>
-                </a:solidFill>
-                <a:latin typeface="Calibri"/>
-              </a:rPr>
-              <a:t>WHAT HAPPENS WITH THE UPSIDE</a:t>
-            </a:r>
-          </a:p>
-        </p:txBody>
-      </p:sp>
-      <p:sp>
-        <p:nvSpPr>
-          <p:cNvPr id="9" name="Rectangle 8"/>
-          <p:cNvSpPr/>
-          <p:nvPr/>
-        </p:nvSpPr>
-        <p:spPr>
-          <a:xfrm>
-            <a:off x="0" y="6729984"/>
-            <a:ext cx="12191695" cy="128016"/>
-          </a:xfrm>
-          <a:prstGeom prst="rect">
-            <a:avLst/>
-          </a:prstGeom>
-          <a:solidFill>
-            <a:srgbClr val="1F4E5F"/>
-          </a:solidFill>
-          <a:ln>
-            <a:noFill/>
-          </a:ln>
-          <a:effectLst/>
-        </p:spPr>
-        <p:style>
-          <a:lnRef idx="1">
-            <a:schemeClr val="accent1"/>
-          </a:lnRef>
-          <a:fillRef idx="3">
-            <a:schemeClr val="accent1"/>
-          </a:fillRef>
-          <a:effectRef idx="2">
-            <a:schemeClr val="accent1"/>
-          </a:effectRef>
-          <a:fontRef idx="minor">
-            <a:schemeClr val="lt1"/>
-          </a:fontRef>
-        </p:style>
-        <p:txBody>
-          <a:bodyPr rtlCol="0" anchor="ctr"/>
-          <a:lstStyle/>
-          <a:p>
-            <a:pPr algn="ctr"/>
-          </a:p>
-        </p:txBody>
-      </p:sp>
-      <p:sp>
-        <p:nvSpPr>
-          <p:cNvPr id="10" name="Rectangle 9"/>
-          <p:cNvSpPr/>
-          <p:nvPr/>
-        </p:nvSpPr>
-        <p:spPr>
-          <a:xfrm>
-            <a:off x="402336" y="1316736"/>
-            <a:ext cx="11430000" cy="329184"/>
-          </a:xfrm>
-          <a:prstGeom prst="rect">
-            <a:avLst/>
-          </a:prstGeom>
-          <a:solidFill>
-            <a:srgbClr val="1F4E5F"/>
-          </a:solidFill>
-          <a:ln>
-            <a:noFill/>
-          </a:ln>
-          <a:effectLst/>
-        </p:spPr>
-        <p:style>
-          <a:lnRef idx="1">
-            <a:schemeClr val="accent1"/>
-          </a:lnRef>
-          <a:fillRef idx="3">
-            <a:schemeClr val="accent1"/>
-          </a:fillRef>
-          <a:effectRef idx="2">
-            <a:schemeClr val="accent1"/>
-          </a:effectRef>
-          <a:fontRef idx="minor">
-            <a:schemeClr val="lt1"/>
-          </a:fontRef>
-        </p:style>
-        <p:txBody>
-          <a:bodyPr rtlCol="0" anchor="ctr"/>
-          <a:lstStyle/>
-          <a:p>
-            <a:pPr algn="ctr"/>
-          </a:p>
-        </p:txBody>
-      </p:sp>
-      <p:sp>
-        <p:nvSpPr>
-          <p:cNvPr id="11" name="TextBox 10"/>
-          <p:cNvSpPr txBox="1"/>
-          <p:nvPr/>
-        </p:nvSpPr>
-        <p:spPr>
-          <a:xfrm>
-            <a:off x="548640" y="1330451"/>
-            <a:ext cx="11155680" cy="301752"/>
-          </a:xfrm>
-          <a:prstGeom prst="rect">
-            <a:avLst/>
-          </a:prstGeom>
-          <a:noFill/>
-        </p:spPr>
-        <p:txBody>
-          <a:bodyPr wrap="square" lIns="54864" rIns="54864" tIns="36576" bIns="36576" anchor="ctr">
-            <a:spAutoFit/>
-          </a:bodyPr>
-          <a:lstStyle/>
-          <a:p>
-            <a:pPr algn="l">
-              <a:lnSpc>
-                <a:spcPct val="106000"/>
-              </a:lnSpc>
-              <a:spcAft>
-                <a:spcPts val="400"/>
-              </a:spcAft>
-            </a:pPr>
-            <a:r>
-              <a:rPr sz="1100" b="1" i="0">
-                <a:solidFill>
-                  <a:srgbClr val="FFFFFF"/>
-                </a:solidFill>
-                <a:latin typeface="Calibri"/>
-              </a:rPr>
-              <a:t>ASSET VS. GUARANTEED-LIABILITY CASH FLOWS</a:t>
-            </a:r>
-          </a:p>
-        </p:txBody>
-      </p:sp>
-      <p:pic>
-        <p:nvPicPr>
-          <p:cNvPr id="12" name="Picture 11" descr="cf_annual.png"/>
-          <p:cNvPicPr>
-            <a:picLocks noChangeAspect="1"/>
-          </p:cNvPicPr>
-          <p:nvPr/>
-        </p:nvPicPr>
-        <p:blipFill>
-          <a:blip r:embed="rId2"/>
-          <a:stretch>
-            <a:fillRect/>
-          </a:stretch>
-        </p:blipFill>
-        <p:spPr>
-          <a:xfrm>
-            <a:off x="402336" y="1783080"/>
-            <a:ext cx="6949440" cy="2949825"/>
-          </a:xfrm>
-          <a:prstGeom prst="rect">
-            <a:avLst/>
-          </a:prstGeom>
-        </p:spPr>
-      </p:pic>
-      <p:sp>
-        <p:nvSpPr>
-          <p:cNvPr id="13" name="Rectangle 12"/>
-          <p:cNvSpPr/>
-          <p:nvPr/>
-        </p:nvSpPr>
-        <p:spPr>
-          <a:xfrm>
-            <a:off x="402336" y="5029200"/>
-            <a:ext cx="6949440" cy="347472"/>
-          </a:xfrm>
-          <a:prstGeom prst="rect">
-            <a:avLst/>
-          </a:prstGeom>
-          <a:solidFill>
-            <a:srgbClr val="EDF2F4"/>
-          </a:solidFill>
-          <a:ln>
-            <a:noFill/>
-          </a:ln>
-          <a:effectLst/>
-        </p:spPr>
-        <p:style>
-          <a:lnRef idx="1">
-            <a:schemeClr val="accent1"/>
-          </a:lnRef>
-          <a:fillRef idx="3">
-            <a:schemeClr val="accent1"/>
-          </a:fillRef>
-          <a:effectRef idx="2">
-            <a:schemeClr val="accent1"/>
-          </a:effectRef>
-          <a:fontRef idx="minor">
-            <a:schemeClr val="lt1"/>
-          </a:fontRef>
-        </p:style>
-        <p:txBody>
-          <a:bodyPr rtlCol="0" anchor="ctr"/>
-          <a:lstStyle/>
-          <a:p>
-            <a:pPr algn="ctr"/>
-          </a:p>
-        </p:txBody>
-      </p:sp>
-      <p:sp>
-        <p:nvSpPr>
-          <p:cNvPr id="14" name="TextBox 13"/>
-          <p:cNvSpPr txBox="1"/>
-          <p:nvPr/>
-        </p:nvSpPr>
-        <p:spPr>
-          <a:xfrm>
-            <a:off x="493776" y="5047488"/>
-            <a:ext cx="1530705" cy="347472"/>
-          </a:xfrm>
-          <a:prstGeom prst="rect">
-            <a:avLst/>
-          </a:prstGeom>
-          <a:noFill/>
-        </p:spPr>
-        <p:txBody>
-          <a:bodyPr wrap="square" lIns="54864" rIns="54864" tIns="36576" bIns="36576" anchor="ctr">
-            <a:spAutoFit/>
-          </a:bodyPr>
-          <a:lstStyle/>
-          <a:p>
-            <a:pPr algn="l">
-              <a:lnSpc>
-                <a:spcPct val="106000"/>
-              </a:lnSpc>
-              <a:spcAft>
-                <a:spcPts val="400"/>
-              </a:spcAft>
-            </a:pPr>
-            <a:r>
-              <a:rPr sz="950" b="1" i="0">
-                <a:solidFill>
-                  <a:srgbClr val="333333"/>
-                </a:solidFill>
-                <a:latin typeface="Calibri"/>
-              </a:rPr>
-              <a:t>Years 1–10</a:t>
-            </a:r>
-          </a:p>
-        </p:txBody>
-      </p:sp>
-      <p:sp>
-        <p:nvSpPr>
-          <p:cNvPr id="15" name="TextBox 14"/>
-          <p:cNvSpPr txBox="1"/>
-          <p:nvPr/>
-        </p:nvSpPr>
-        <p:spPr>
-          <a:xfrm>
-            <a:off x="2161641" y="5047488"/>
-            <a:ext cx="2503627" cy="347472"/>
-          </a:xfrm>
-          <a:prstGeom prst="rect">
-            <a:avLst/>
-          </a:prstGeom>
-          <a:noFill/>
-        </p:spPr>
-        <p:txBody>
-          <a:bodyPr wrap="square" lIns="54864" rIns="54864" tIns="36576" bIns="36576" anchor="ctr">
-            <a:spAutoFit/>
-          </a:bodyPr>
-          <a:lstStyle/>
-          <a:p>
-            <a:pPr algn="r">
-              <a:lnSpc>
-                <a:spcPct val="106000"/>
-              </a:lnSpc>
-              <a:spcAft>
-                <a:spcPts val="400"/>
-              </a:spcAft>
-            </a:pPr>
-            <a:r>
-              <a:rPr sz="950" b="0" i="0">
-                <a:solidFill>
-                  <a:srgbClr val="333333"/>
-                </a:solidFill>
-                <a:latin typeface="Calibri"/>
-              </a:rPr>
-              <a:t>+ €0.5bn / yr contributions</a:t>
-            </a:r>
-          </a:p>
-        </p:txBody>
-      </p:sp>
-      <p:sp>
-        <p:nvSpPr>
-          <p:cNvPr id="16" name="TextBox 15"/>
-          <p:cNvSpPr txBox="1"/>
-          <p:nvPr/>
-        </p:nvSpPr>
-        <p:spPr>
-          <a:xfrm>
-            <a:off x="4802428" y="5047488"/>
-            <a:ext cx="2503627" cy="347472"/>
-          </a:xfrm>
-          <a:prstGeom prst="rect">
-            <a:avLst/>
-          </a:prstGeom>
-          <a:noFill/>
-        </p:spPr>
-        <p:txBody>
-          <a:bodyPr wrap="square" lIns="54864" rIns="54864" tIns="36576" bIns="36576" anchor="ctr">
-            <a:spAutoFit/>
-          </a:bodyPr>
-          <a:lstStyle/>
-          <a:p>
-            <a:pPr algn="r">
-              <a:lnSpc>
-                <a:spcPct val="106000"/>
-              </a:lnSpc>
-              <a:spcAft>
-                <a:spcPts val="400"/>
-              </a:spcAft>
-            </a:pPr>
-            <a:r>
-              <a:rPr sz="950" b="0" i="0">
-                <a:solidFill>
-                  <a:srgbClr val="333333"/>
-                </a:solidFill>
-                <a:latin typeface="Calibri"/>
-              </a:rPr>
-              <a:t>→ Return portfolio</a:t>
-            </a:r>
-          </a:p>
-        </p:txBody>
-      </p:sp>
-      <p:sp>
-        <p:nvSpPr>
-          <p:cNvPr id="17" name="TextBox 16"/>
-          <p:cNvSpPr txBox="1"/>
-          <p:nvPr/>
-        </p:nvSpPr>
-        <p:spPr>
-          <a:xfrm>
-            <a:off x="493776" y="5394959"/>
-            <a:ext cx="1530705" cy="347472"/>
-          </a:xfrm>
-          <a:prstGeom prst="rect">
-            <a:avLst/>
-          </a:prstGeom>
-          <a:noFill/>
-        </p:spPr>
-        <p:txBody>
-          <a:bodyPr wrap="square" lIns="54864" rIns="54864" tIns="36576" bIns="36576" anchor="ctr">
-            <a:spAutoFit/>
-          </a:bodyPr>
-          <a:lstStyle/>
-          <a:p>
-            <a:pPr algn="l">
-              <a:lnSpc>
-                <a:spcPct val="106000"/>
-              </a:lnSpc>
-              <a:spcAft>
-                <a:spcPts val="400"/>
-              </a:spcAft>
-            </a:pPr>
-            <a:r>
-              <a:rPr sz="950" b="1" i="0">
-                <a:solidFill>
-                  <a:srgbClr val="333333"/>
-                </a:solidFill>
-                <a:latin typeface="Calibri"/>
-              </a:rPr>
-              <a:t>Year 15</a:t>
-            </a:r>
-          </a:p>
-        </p:txBody>
-      </p:sp>
-      <p:sp>
-        <p:nvSpPr>
-          <p:cNvPr id="18" name="TextBox 17"/>
-          <p:cNvSpPr txBox="1"/>
-          <p:nvPr/>
-        </p:nvSpPr>
-        <p:spPr>
-          <a:xfrm>
-            <a:off x="2161641" y="5394959"/>
-            <a:ext cx="2503627" cy="347472"/>
-          </a:xfrm>
-          <a:prstGeom prst="rect">
-            <a:avLst/>
-          </a:prstGeom>
-          <a:noFill/>
-        </p:spPr>
-        <p:txBody>
-          <a:bodyPr wrap="square" lIns="54864" rIns="54864" tIns="36576" bIns="36576" anchor="ctr">
-            <a:spAutoFit/>
-          </a:bodyPr>
-          <a:lstStyle/>
-          <a:p>
-            <a:pPr algn="r">
-              <a:lnSpc>
-                <a:spcPct val="106000"/>
-              </a:lnSpc>
-              <a:spcAft>
-                <a:spcPts val="400"/>
-              </a:spcAft>
-            </a:pPr>
-            <a:r>
-              <a:rPr sz="950" b="0" i="0">
-                <a:solidFill>
-                  <a:srgbClr val="333333"/>
-                </a:solidFill>
-                <a:latin typeface="Calibri"/>
-              </a:rPr>
-              <a:t>− €5.65bn lump sum (50/50)</a:t>
-            </a:r>
-          </a:p>
-        </p:txBody>
-      </p:sp>
-      <p:sp>
-        <p:nvSpPr>
-          <p:cNvPr id="19" name="TextBox 18"/>
-          <p:cNvSpPr txBox="1"/>
-          <p:nvPr/>
-        </p:nvSpPr>
-        <p:spPr>
-          <a:xfrm>
-            <a:off x="4802428" y="5394959"/>
-            <a:ext cx="2503627" cy="347472"/>
-          </a:xfrm>
-          <a:prstGeom prst="rect">
-            <a:avLst/>
-          </a:prstGeom>
-          <a:noFill/>
-        </p:spPr>
-        <p:txBody>
-          <a:bodyPr wrap="square" lIns="54864" rIns="54864" tIns="36576" bIns="36576" anchor="ctr">
-            <a:spAutoFit/>
-          </a:bodyPr>
-          <a:lstStyle/>
-          <a:p>
-            <a:pPr algn="r">
-              <a:lnSpc>
-                <a:spcPct val="106000"/>
-              </a:lnSpc>
-              <a:spcAft>
-                <a:spcPts val="400"/>
-              </a:spcAft>
-            </a:pPr>
-            <a:r>
-              <a:rPr sz="950" b="0" i="0">
-                <a:solidFill>
-                  <a:srgbClr val="333333"/>
-                </a:solidFill>
-                <a:latin typeface="Calibri"/>
-              </a:rPr>
-              <a:t>→ safe sleeve</a:t>
-            </a:r>
-          </a:p>
-        </p:txBody>
-      </p:sp>
-      <p:sp>
-        <p:nvSpPr>
-          <p:cNvPr id="20" name="Rectangle 19"/>
-          <p:cNvSpPr/>
-          <p:nvPr/>
-        </p:nvSpPr>
-        <p:spPr>
-          <a:xfrm>
-            <a:off x="402336" y="5724144"/>
-            <a:ext cx="6949440" cy="347472"/>
-          </a:xfrm>
-          <a:prstGeom prst="rect">
-            <a:avLst/>
-          </a:prstGeom>
-          <a:solidFill>
-            <a:srgbClr val="EDF2F4"/>
-          </a:solidFill>
-          <a:ln>
-            <a:noFill/>
-          </a:ln>
-          <a:effectLst/>
-        </p:spPr>
-        <p:style>
-          <a:lnRef idx="1">
-            <a:schemeClr val="accent1"/>
-          </a:lnRef>
-          <a:fillRef idx="3">
-            <a:schemeClr val="accent1"/>
-          </a:fillRef>
-          <a:effectRef idx="2">
-            <a:schemeClr val="accent1"/>
-          </a:effectRef>
-          <a:fontRef idx="minor">
-            <a:schemeClr val="lt1"/>
-          </a:fontRef>
-        </p:style>
-        <p:txBody>
-          <a:bodyPr rtlCol="0" anchor="ctr"/>
-          <a:lstStyle/>
-          <a:p>
-            <a:pPr algn="ctr"/>
-          </a:p>
-        </p:txBody>
-      </p:sp>
-      <p:sp>
-        <p:nvSpPr>
-          <p:cNvPr id="21" name="TextBox 20"/>
-          <p:cNvSpPr txBox="1"/>
-          <p:nvPr/>
-        </p:nvSpPr>
-        <p:spPr>
-          <a:xfrm>
-            <a:off x="493776" y="5742431"/>
-            <a:ext cx="1530705" cy="347472"/>
-          </a:xfrm>
-          <a:prstGeom prst="rect">
-            <a:avLst/>
-          </a:prstGeom>
-          <a:noFill/>
-        </p:spPr>
-        <p:txBody>
-          <a:bodyPr wrap="square" lIns="54864" rIns="54864" tIns="36576" bIns="36576" anchor="ctr">
-            <a:spAutoFit/>
-          </a:bodyPr>
-          <a:lstStyle/>
-          <a:p>
-            <a:pPr algn="l">
-              <a:lnSpc>
-                <a:spcPct val="106000"/>
-              </a:lnSpc>
-              <a:spcAft>
-                <a:spcPts val="400"/>
-              </a:spcAft>
-            </a:pPr>
-            <a:r>
-              <a:rPr sz="950" b="1" i="0">
-                <a:solidFill>
-                  <a:srgbClr val="333333"/>
-                </a:solidFill>
-                <a:latin typeface="Calibri"/>
-              </a:rPr>
-              <a:t>Years 16–50</a:t>
-            </a:r>
-          </a:p>
-        </p:txBody>
-      </p:sp>
-      <p:sp>
-        <p:nvSpPr>
-          <p:cNvPr id="22" name="TextBox 21"/>
-          <p:cNvSpPr txBox="1"/>
-          <p:nvPr/>
-        </p:nvSpPr>
-        <p:spPr>
-          <a:xfrm>
-            <a:off x="2161641" y="5742431"/>
-            <a:ext cx="2503627" cy="347472"/>
-          </a:xfrm>
-          <a:prstGeom prst="rect">
-            <a:avLst/>
-          </a:prstGeom>
-          <a:noFill/>
-        </p:spPr>
-        <p:txBody>
-          <a:bodyPr wrap="square" lIns="54864" rIns="54864" tIns="36576" bIns="36576" anchor="ctr">
-            <a:spAutoFit/>
-          </a:bodyPr>
-          <a:lstStyle/>
-          <a:p>
-            <a:pPr algn="r">
-              <a:lnSpc>
-                <a:spcPct val="106000"/>
-              </a:lnSpc>
-              <a:spcAft>
-                <a:spcPts val="400"/>
-              </a:spcAft>
-            </a:pPr>
-            <a:r>
-              <a:rPr sz="950" b="0" i="0">
-                <a:solidFill>
-                  <a:srgbClr val="333333"/>
-                </a:solidFill>
-                <a:latin typeface="Calibri"/>
-              </a:rPr>
-              <a:t>− ≈ €0.3bn / yr pension tail</a:t>
-            </a:r>
-          </a:p>
-        </p:txBody>
-      </p:sp>
-      <p:sp>
-        <p:nvSpPr>
-          <p:cNvPr id="23" name="TextBox 22"/>
-          <p:cNvSpPr txBox="1"/>
-          <p:nvPr/>
-        </p:nvSpPr>
-        <p:spPr>
-          <a:xfrm>
-            <a:off x="4802428" y="5742431"/>
-            <a:ext cx="2503627" cy="347472"/>
-          </a:xfrm>
-          <a:prstGeom prst="rect">
-            <a:avLst/>
-          </a:prstGeom>
-          <a:noFill/>
-        </p:spPr>
-        <p:txBody>
-          <a:bodyPr wrap="square" lIns="54864" rIns="54864" tIns="36576" bIns="36576" anchor="ctr">
-            <a:spAutoFit/>
-          </a:bodyPr>
-          <a:lstStyle/>
-          <a:p>
-            <a:pPr algn="r">
-              <a:lnSpc>
-                <a:spcPct val="106000"/>
-              </a:lnSpc>
-              <a:spcAft>
-                <a:spcPts val="400"/>
-              </a:spcAft>
-            </a:pPr>
-            <a:r>
-              <a:rPr sz="950" b="0" i="0">
-                <a:solidFill>
-                  <a:srgbClr val="333333"/>
-                </a:solidFill>
-                <a:latin typeface="Calibri"/>
-              </a:rPr>
-              <a:t>→ coupons + reinvestment</a:t>
-            </a:r>
-          </a:p>
-        </p:txBody>
-      </p:sp>
-      <p:sp>
-        <p:nvSpPr>
-          <p:cNvPr id="24" name="Rounded Rectangle 23"/>
-          <p:cNvSpPr/>
-          <p:nvPr/>
-        </p:nvSpPr>
-        <p:spPr>
-          <a:xfrm>
-            <a:off x="7498079" y="1783080"/>
-            <a:ext cx="4334256" cy="4114800"/>
-          </a:xfrm>
-          <a:prstGeom prst="roundRect">
-            <a:avLst>
-              <a:gd name="adj" fmla="val 4500"/>
-            </a:avLst>
-          </a:prstGeom>
-          <a:solidFill>
-            <a:srgbClr val="EDF2F4"/>
-          </a:solidFill>
-          <a:ln>
-            <a:noFill/>
-          </a:ln>
-          <a:effectLst/>
-        </p:spPr>
-        <p:style>
-          <a:lnRef idx="1">
-            <a:schemeClr val="accent1"/>
-          </a:lnRef>
-          <a:fillRef idx="3">
-            <a:schemeClr val="accent1"/>
-          </a:fillRef>
-          <a:effectRef idx="2">
-            <a:schemeClr val="accent1"/>
-          </a:effectRef>
-          <a:fontRef idx="minor">
-            <a:schemeClr val="lt1"/>
-          </a:fontRef>
-        </p:style>
-        <p:txBody>
-          <a:bodyPr rtlCol="0" anchor="ctr"/>
-          <a:lstStyle/>
-          <a:p>
-            <a:pPr algn="ctr"/>
-          </a:p>
-        </p:txBody>
-      </p:sp>
-      <p:sp>
-        <p:nvSpPr>
-          <p:cNvPr id="25" name="Rectangle 24"/>
-          <p:cNvSpPr/>
-          <p:nvPr/>
-        </p:nvSpPr>
-        <p:spPr>
-          <a:xfrm>
-            <a:off x="7498079" y="1783080"/>
-            <a:ext cx="4334256" cy="50292"/>
-          </a:xfrm>
-          <a:prstGeom prst="rect">
-            <a:avLst/>
-          </a:prstGeom>
-          <a:solidFill>
-            <a:srgbClr val="3B8E9E"/>
-          </a:solidFill>
-          <a:ln>
-            <a:noFill/>
-          </a:ln>
-          <a:effectLst/>
-        </p:spPr>
-        <p:style>
-          <a:lnRef idx="1">
-            <a:schemeClr val="accent1"/>
-          </a:lnRef>
-          <a:fillRef idx="3">
-            <a:schemeClr val="accent1"/>
-          </a:fillRef>
-          <a:effectRef idx="2">
-            <a:schemeClr val="accent1"/>
-          </a:effectRef>
-          <a:fontRef idx="minor">
-            <a:schemeClr val="lt1"/>
-          </a:fontRef>
-        </p:style>
-        <p:txBody>
-          <a:bodyPr rtlCol="0" anchor="ctr"/>
-          <a:lstStyle/>
-          <a:p>
-            <a:pPr algn="ctr"/>
-          </a:p>
-        </p:txBody>
-      </p:sp>
-      <p:sp>
-        <p:nvSpPr>
-          <p:cNvPr id="26" name="TextBox 25"/>
-          <p:cNvSpPr txBox="1"/>
-          <p:nvPr/>
-        </p:nvSpPr>
-        <p:spPr>
-          <a:xfrm>
-            <a:off x="7662671" y="1911095"/>
-            <a:ext cx="4005072" cy="365760"/>
-          </a:xfrm>
-          <a:prstGeom prst="rect">
-            <a:avLst/>
-          </a:prstGeom>
-          <a:noFill/>
-        </p:spPr>
-        <p:txBody>
-          <a:bodyPr wrap="square" lIns="54864" rIns="54864" tIns="36576" bIns="36576" anchor="t">
-            <a:spAutoFit/>
-          </a:bodyPr>
-          <a:lstStyle/>
-          <a:p>
-            <a:pPr algn="l">
-              <a:lnSpc>
-                <a:spcPct val="106000"/>
-              </a:lnSpc>
-              <a:spcAft>
-                <a:spcPts val="400"/>
-              </a:spcAft>
-            </a:pPr>
-            <a:r>
-              <a:rPr sz="1300" b="1" i="0">
-                <a:solidFill>
-                  <a:srgbClr val="1F4E5F"/>
-                </a:solidFill>
-                <a:latin typeface="Calibri"/>
-              </a:rPr>
-              <a:t>Reading the structure</a:t>
-            </a:r>
-          </a:p>
-        </p:txBody>
-      </p:sp>
-      <p:sp>
-        <p:nvSpPr>
-          <p:cNvPr id="27" name="TextBox 26"/>
-          <p:cNvSpPr txBox="1"/>
-          <p:nvPr/>
-        </p:nvSpPr>
-        <p:spPr>
-          <a:xfrm>
-            <a:off x="7626096" y="2386584"/>
-            <a:ext cx="4041648" cy="3383280"/>
-          </a:xfrm>
-          <a:prstGeom prst="rect">
-            <a:avLst/>
-          </a:prstGeom>
-          <a:noFill/>
-        </p:spPr>
-        <p:txBody>
-          <a:bodyPr wrap="square" lIns="54864" rIns="54864" tIns="36576" bIns="36576">
-            <a:spAutoFit/>
-          </a:bodyPr>
-          <a:lstStyle/>
-          <a:p>
-            <a:pPr>
-              <a:lnSpc>
-                <a:spcPct val="105000"/>
-              </a:lnSpc>
-              <a:spcAft>
-                <a:spcPts val="500"/>
-              </a:spcAft>
-            </a:pPr>
-            <a:r>
-              <a:rPr sz="919" b="0" i="0">
-                <a:solidFill>
-                  <a:srgbClr val="333333"/>
-                </a:solidFill>
-                <a:latin typeface="Calibri"/>
-              </a:rPr>
-              <a:t>•  </a:t>
-            </a:r>
-            <a:r>
-              <a:rPr sz="919" b="1" i="0">
-                <a:solidFill>
-                  <a:srgbClr val="1F4E5F"/>
-                </a:solidFill>
-                <a:latin typeface="Calibri"/>
-              </a:rPr>
-              <a:t>Years 1–10.  </a:t>
-            </a:r>
-            <a:r>
-              <a:rPr sz="919" b="0" i="0">
-                <a:solidFill>
-                  <a:srgbClr val="333333"/>
-                </a:solidFill>
-                <a:latin typeface="Calibri"/>
-              </a:rPr>
-              <a:t>€0.5bn/yr contributions fund the RSP; the LMP coupons accrue.</a:t>
-            </a:r>
-          </a:p>
-          <a:p>
-            <a:pPr>
-              <a:lnSpc>
-                <a:spcPct val="105000"/>
-              </a:lnSpc>
-              <a:spcAft>
-                <a:spcPts val="500"/>
-              </a:spcAft>
-            </a:pPr>
-            <a:r>
-              <a:rPr sz="919" b="0" i="0">
-                <a:solidFill>
-                  <a:srgbClr val="333333"/>
-                </a:solidFill>
-                <a:latin typeface="Calibri"/>
-              </a:rPr>
-              <a:t>•  </a:t>
-            </a:r>
-            <a:r>
-              <a:rPr sz="919" b="1" i="0">
-                <a:solidFill>
-                  <a:srgbClr val="1F4E5F"/>
-                </a:solidFill>
-                <a:latin typeface="Calibri"/>
-              </a:rPr>
-              <a:t>Year 15.  </a:t>
-            </a:r>
-            <a:r>
-              <a:rPr sz="919" b="0" i="0">
-                <a:solidFill>
-                  <a:srgbClr val="333333"/>
-                </a:solidFill>
-                <a:latin typeface="Calibri"/>
-              </a:rPr>
-              <a:t>the lump-sum spike – €5.65bn at 50/50 (€2.3–9.0bn across the election).</a:t>
-            </a:r>
-          </a:p>
-          <a:p>
-            <a:pPr>
-              <a:lnSpc>
-                <a:spcPct val="105000"/>
-              </a:lnSpc>
-              <a:spcAft>
-                <a:spcPts val="500"/>
-              </a:spcAft>
-            </a:pPr>
-            <a:r>
-              <a:rPr sz="919" b="0" i="0">
-                <a:solidFill>
-                  <a:srgbClr val="333333"/>
-                </a:solidFill>
-                <a:latin typeface="Calibri"/>
-              </a:rPr>
-              <a:t>•  </a:t>
-            </a:r>
-            <a:r>
-              <a:rPr sz="919" b="1" i="0">
-                <a:solidFill>
-                  <a:srgbClr val="1F4E5F"/>
-                </a:solidFill>
-                <a:latin typeface="Calibri"/>
-              </a:rPr>
-              <a:t>Years 16–50.  </a:t>
-            </a:r>
-            <a:r>
-              <a:rPr sz="919" b="0" i="0">
-                <a:solidFill>
-                  <a:srgbClr val="333333"/>
-                </a:solidFill>
-                <a:latin typeface="Calibri"/>
-              </a:rPr>
-              <a:t>≈ €0.3bn/yr pension tail, decaying with mortality; 11% of PV beyond year 30.</a:t>
-            </a:r>
-          </a:p>
-          <a:p>
-            <a:pPr>
-              <a:lnSpc>
-                <a:spcPct val="105000"/>
-              </a:lnSpc>
-              <a:spcAft>
-                <a:spcPts val="500"/>
-              </a:spcAft>
-            </a:pPr>
-            <a:r>
-              <a:rPr sz="919" b="0" i="0">
-                <a:solidFill>
-                  <a:srgbClr val="333333"/>
-                </a:solidFill>
-                <a:latin typeface="Calibri"/>
-              </a:rPr>
-              <a:t>•  </a:t>
-            </a:r>
-            <a:r>
-              <a:rPr sz="919" b="1" i="0">
-                <a:solidFill>
-                  <a:srgbClr val="1F4E5F"/>
-                </a:solidFill>
-                <a:latin typeface="Calibri"/>
-              </a:rPr>
-              <a:t>Coverage.  </a:t>
-            </a:r>
-            <a:r>
-              <a:rPr sz="919" b="0" i="0">
-                <a:solidFill>
-                  <a:srgbClr val="333333"/>
-                </a:solidFill>
-                <a:latin typeface="Calibri"/>
-              </a:rPr>
-              <a:t>Stage-1 dedication keeps the running cash balance ≥ 0 every year to year 50 – no external top-up; ultra-long / zero-coupon bonds reach the 30y+ tail.</a:t>
+              <a:rPr sz="1400" b="0" i="0">
+                <a:solidFill>
+                  <a:srgbClr val="AEC4CB"/>
+                </a:solidFill>
+                <a:latin typeface="Calibri"/>
+              </a:rPr>
+              <a:t>The cash-flow structure, the flows under every election scenario, and the 90/10 share</a:t>
             </a:r>
           </a:p>
         </p:txBody>
@@ -37834,7 +37996,7 @@
                 </a:solidFill>
                 <a:latin typeface="Calibri Light"/>
               </a:rPr>
-              <a:t>Flows Under Every Scenario</a:t>
+              <a:t>The Cash-Flow Structure</a:t>
             </a:r>
           </a:p>
         </p:txBody>
@@ -37876,7 +38038,7 @@
                 </a:solidFill>
                 <a:latin typeface="Calibri"/>
               </a:rPr>
-              <a:t>The year-15 need and the pension tail move with the election; the surplus absorbs the market path</a:t>
+              <a:t>Contributions in for 10 years; a year-15 spike, then a 35-year pension tail</a:t>
             </a:r>
           </a:p>
         </p:txBody>
@@ -38216,275 +38378,45 @@
                 </a:solidFill>
                 <a:latin typeface="Calibri"/>
               </a:rPr>
-              <a:t>POLICYHOLDER-ELECTION SCENARIOS</a:t>
-            </a:r>
-          </a:p>
-        </p:txBody>
-      </p:sp>
-      <p:sp>
-        <p:nvSpPr>
-          <p:cNvPr id="12" name="Rectangle 11"/>
+              <a:t>ASSET VS. GUARANTEED-LIABILITY CASH FLOWS</a:t>
+            </a:r>
+          </a:p>
+        </p:txBody>
+      </p:sp>
+      <p:pic>
+        <p:nvPicPr>
+          <p:cNvPr id="12" name="Picture 11" descr="cf_annual.png"/>
+          <p:cNvPicPr>
+            <a:picLocks noChangeAspect="1"/>
+          </p:cNvPicPr>
+          <p:nvPr/>
+        </p:nvPicPr>
+        <p:blipFill>
+          <a:blip r:embed="rId2"/>
+          <a:stretch>
+            <a:fillRect/>
+          </a:stretch>
+        </p:blipFill>
+        <p:spPr>
+          <a:xfrm>
+            <a:off x="402336" y="1783080"/>
+            <a:ext cx="6949440" cy="2949825"/>
+          </a:xfrm>
+          <a:prstGeom prst="rect">
+            <a:avLst/>
+          </a:prstGeom>
+        </p:spPr>
+      </p:pic>
+      <p:sp>
+        <p:nvSpPr>
+          <p:cNvPr id="13" name="Rectangle 12"/>
           <p:cNvSpPr/>
           <p:nvPr/>
         </p:nvSpPr>
         <p:spPr>
           <a:xfrm>
-            <a:off x="402336" y="1828800"/>
-            <a:ext cx="11430000" cy="420624"/>
-          </a:xfrm>
-          <a:prstGeom prst="rect">
-            <a:avLst/>
-          </a:prstGeom>
-          <a:solidFill>
-            <a:srgbClr val="1F4E5F"/>
-          </a:solidFill>
-          <a:ln>
-            <a:noFill/>
-          </a:ln>
-          <a:effectLst/>
-        </p:spPr>
-        <p:style>
-          <a:lnRef idx="1">
-            <a:schemeClr val="accent1"/>
-          </a:lnRef>
-          <a:fillRef idx="3">
-            <a:schemeClr val="accent1"/>
-          </a:fillRef>
-          <a:effectRef idx="2">
-            <a:schemeClr val="accent1"/>
-          </a:effectRef>
-          <a:fontRef idx="minor">
-            <a:schemeClr val="lt1"/>
-          </a:fontRef>
-        </p:style>
-        <p:txBody>
-          <a:bodyPr rtlCol="0" anchor="ctr"/>
-          <a:lstStyle/>
-          <a:p>
-            <a:pPr algn="ctr"/>
-          </a:p>
-        </p:txBody>
-      </p:sp>
-      <p:sp>
-        <p:nvSpPr>
-          <p:cNvPr id="13" name="TextBox 12"/>
-          <p:cNvSpPr txBox="1"/>
-          <p:nvPr/>
-        </p:nvSpPr>
-        <p:spPr>
-          <a:xfrm>
-            <a:off x="493776" y="1847088"/>
-            <a:ext cx="2606040" cy="420624"/>
-          </a:xfrm>
-          <a:prstGeom prst="rect">
-            <a:avLst/>
-          </a:prstGeom>
-          <a:noFill/>
-        </p:spPr>
-        <p:txBody>
-          <a:bodyPr wrap="square" lIns="54864" rIns="54864" tIns="36576" bIns="36576" anchor="ctr">
-            <a:spAutoFit/>
-          </a:bodyPr>
-          <a:lstStyle/>
-          <a:p>
-            <a:pPr algn="l">
-              <a:lnSpc>
-                <a:spcPct val="106000"/>
-              </a:lnSpc>
-              <a:spcAft>
-                <a:spcPts val="400"/>
-              </a:spcAft>
-            </a:pPr>
-            <a:r>
-              <a:rPr sz="950" b="1" i="0">
-                <a:solidFill>
-                  <a:srgbClr val="FFFFFF"/>
-                </a:solidFill>
-                <a:latin typeface="Calibri"/>
-              </a:rPr>
-              <a:t>Election</a:t>
-            </a:r>
-          </a:p>
-        </p:txBody>
-      </p:sp>
-      <p:sp>
-        <p:nvSpPr>
-          <p:cNvPr id="14" name="TextBox 13"/>
-          <p:cNvSpPr txBox="1"/>
-          <p:nvPr/>
-        </p:nvSpPr>
-        <p:spPr>
-          <a:xfrm>
-            <a:off x="3236976" y="1847088"/>
-            <a:ext cx="2034540" cy="420624"/>
-          </a:xfrm>
-          <a:prstGeom prst="rect">
-            <a:avLst/>
-          </a:prstGeom>
-          <a:noFill/>
-        </p:spPr>
-        <p:txBody>
-          <a:bodyPr wrap="square" lIns="54864" rIns="54864" tIns="36576" bIns="36576" anchor="ctr">
-            <a:spAutoFit/>
-          </a:bodyPr>
-          <a:lstStyle/>
-          <a:p>
-            <a:pPr algn="r">
-              <a:lnSpc>
-                <a:spcPct val="106000"/>
-              </a:lnSpc>
-              <a:spcAft>
-                <a:spcPts val="400"/>
-              </a:spcAft>
-            </a:pPr>
-            <a:r>
-              <a:rPr sz="950" b="1" i="0">
-                <a:solidFill>
-                  <a:srgbClr val="FFFFFF"/>
-                </a:solidFill>
-                <a:latin typeface="Calibri"/>
-              </a:rPr>
-              <a:t>Lump-sum at yr 15</a:t>
-            </a:r>
-          </a:p>
-        </p:txBody>
-      </p:sp>
-      <p:sp>
-        <p:nvSpPr>
-          <p:cNvPr id="15" name="TextBox 14"/>
-          <p:cNvSpPr txBox="1"/>
-          <p:nvPr/>
-        </p:nvSpPr>
-        <p:spPr>
-          <a:xfrm>
-            <a:off x="5408675" y="1847088"/>
-            <a:ext cx="2034540" cy="420624"/>
-          </a:xfrm>
-          <a:prstGeom prst="rect">
-            <a:avLst/>
-          </a:prstGeom>
-          <a:noFill/>
-        </p:spPr>
-        <p:txBody>
-          <a:bodyPr wrap="square" lIns="54864" rIns="54864" tIns="36576" bIns="36576" anchor="ctr">
-            <a:spAutoFit/>
-          </a:bodyPr>
-          <a:lstStyle/>
-          <a:p>
-            <a:pPr algn="r">
-              <a:lnSpc>
-                <a:spcPct val="106000"/>
-              </a:lnSpc>
-              <a:spcAft>
-                <a:spcPts val="400"/>
-              </a:spcAft>
-            </a:pPr>
-            <a:r>
-              <a:rPr sz="950" b="1" i="0">
-                <a:solidFill>
-                  <a:srgbClr val="FFFFFF"/>
-                </a:solidFill>
-                <a:latin typeface="Calibri"/>
-              </a:rPr>
-              <a:t>Pensioners</a:t>
-            </a:r>
-          </a:p>
-        </p:txBody>
-      </p:sp>
-      <p:sp>
-        <p:nvSpPr>
-          <p:cNvPr id="16" name="TextBox 15"/>
-          <p:cNvSpPr txBox="1"/>
-          <p:nvPr/>
-        </p:nvSpPr>
-        <p:spPr>
-          <a:xfrm>
-            <a:off x="7580375" y="1847088"/>
-            <a:ext cx="2034540" cy="420624"/>
-          </a:xfrm>
-          <a:prstGeom prst="rect">
-            <a:avLst/>
-          </a:prstGeom>
-          <a:noFill/>
-        </p:spPr>
-        <p:txBody>
-          <a:bodyPr wrap="square" lIns="54864" rIns="54864" tIns="36576" bIns="36576" anchor="ctr">
-            <a:spAutoFit/>
-          </a:bodyPr>
-          <a:lstStyle/>
-          <a:p>
-            <a:pPr algn="r">
-              <a:lnSpc>
-                <a:spcPct val="106000"/>
-              </a:lnSpc>
-              <a:spcAft>
-                <a:spcPts val="400"/>
-              </a:spcAft>
-            </a:pPr>
-            <a:r>
-              <a:rPr sz="950" b="1" i="0">
-                <a:solidFill>
-                  <a:srgbClr val="FFFFFF"/>
-                </a:solidFill>
-                <a:latin typeface="Calibri"/>
-              </a:rPr>
-              <a:t>Pension PV at yr 15</a:t>
-            </a:r>
-          </a:p>
-        </p:txBody>
-      </p:sp>
-      <p:sp>
-        <p:nvSpPr>
-          <p:cNvPr id="17" name="TextBox 16"/>
-          <p:cNvSpPr txBox="1"/>
-          <p:nvPr/>
-        </p:nvSpPr>
-        <p:spPr>
-          <a:xfrm>
-            <a:off x="9752076" y="1847088"/>
-            <a:ext cx="2034540" cy="420624"/>
-          </a:xfrm>
-          <a:prstGeom prst="rect">
-            <a:avLst/>
-          </a:prstGeom>
-          <a:noFill/>
-        </p:spPr>
-        <p:txBody>
-          <a:bodyPr wrap="square" lIns="54864" rIns="54864" tIns="36576" bIns="36576" anchor="ctr">
-            <a:spAutoFit/>
-          </a:bodyPr>
-          <a:lstStyle/>
-          <a:p>
-            <a:pPr algn="r">
-              <a:lnSpc>
-                <a:spcPct val="106000"/>
-              </a:lnSpc>
-              <a:spcAft>
-                <a:spcPts val="400"/>
-              </a:spcAft>
-            </a:pPr>
-            <a:r>
-              <a:rPr sz="950" b="1" i="0">
-                <a:solidFill>
-                  <a:srgbClr val="FFFFFF"/>
-                </a:solidFill>
-                <a:latin typeface="Calibri"/>
-              </a:rPr>
-              <a:t>Total PV today</a:t>
-            </a:r>
-          </a:p>
-        </p:txBody>
-      </p:sp>
-      <p:sp>
-        <p:nvSpPr>
-          <p:cNvPr id="18" name="Rectangle 17"/>
-          <p:cNvSpPr/>
-          <p:nvPr/>
-        </p:nvSpPr>
-        <p:spPr>
-          <a:xfrm>
-            <a:off x="402336" y="2249424"/>
-            <a:ext cx="11430000" cy="420624"/>
+            <a:off x="402336" y="5029200"/>
+            <a:ext cx="6949440" cy="347472"/>
           </a:xfrm>
           <a:prstGeom prst="rect">
             <a:avLst/>
@@ -38521,14 +38453,224 @@
       </p:sp>
       <p:sp>
         <p:nvSpPr>
+          <p:cNvPr id="14" name="TextBox 13"/>
+          <p:cNvSpPr txBox="1"/>
+          <p:nvPr/>
+        </p:nvSpPr>
+        <p:spPr>
+          <a:xfrm>
+            <a:off x="493776" y="5047488"/>
+            <a:ext cx="1530705" cy="347472"/>
+          </a:xfrm>
+          <a:prstGeom prst="rect">
+            <a:avLst/>
+          </a:prstGeom>
+          <a:noFill/>
+        </p:spPr>
+        <p:txBody>
+          <a:bodyPr wrap="square" lIns="54864" rIns="54864" tIns="36576" bIns="36576" anchor="ctr">
+            <a:spAutoFit/>
+          </a:bodyPr>
+          <a:lstStyle/>
+          <a:p>
+            <a:pPr algn="l">
+              <a:lnSpc>
+                <a:spcPct val="106000"/>
+              </a:lnSpc>
+              <a:spcAft>
+                <a:spcPts val="400"/>
+              </a:spcAft>
+            </a:pPr>
+            <a:r>
+              <a:rPr sz="950" b="1" i="0">
+                <a:solidFill>
+                  <a:srgbClr val="333333"/>
+                </a:solidFill>
+                <a:latin typeface="Calibri"/>
+              </a:rPr>
+              <a:t>Years 1–10</a:t>
+            </a:r>
+          </a:p>
+        </p:txBody>
+      </p:sp>
+      <p:sp>
+        <p:nvSpPr>
+          <p:cNvPr id="15" name="TextBox 14"/>
+          <p:cNvSpPr txBox="1"/>
+          <p:nvPr/>
+        </p:nvSpPr>
+        <p:spPr>
+          <a:xfrm>
+            <a:off x="2161641" y="5047488"/>
+            <a:ext cx="2503627" cy="347472"/>
+          </a:xfrm>
+          <a:prstGeom prst="rect">
+            <a:avLst/>
+          </a:prstGeom>
+          <a:noFill/>
+        </p:spPr>
+        <p:txBody>
+          <a:bodyPr wrap="square" lIns="54864" rIns="54864" tIns="36576" bIns="36576" anchor="ctr">
+            <a:spAutoFit/>
+          </a:bodyPr>
+          <a:lstStyle/>
+          <a:p>
+            <a:pPr algn="r">
+              <a:lnSpc>
+                <a:spcPct val="106000"/>
+              </a:lnSpc>
+              <a:spcAft>
+                <a:spcPts val="400"/>
+              </a:spcAft>
+            </a:pPr>
+            <a:r>
+              <a:rPr sz="950" b="0" i="0">
+                <a:solidFill>
+                  <a:srgbClr val="333333"/>
+                </a:solidFill>
+                <a:latin typeface="Calibri"/>
+              </a:rPr>
+              <a:t>+ €0.5bn / yr contributions</a:t>
+            </a:r>
+          </a:p>
+        </p:txBody>
+      </p:sp>
+      <p:sp>
+        <p:nvSpPr>
+          <p:cNvPr id="16" name="TextBox 15"/>
+          <p:cNvSpPr txBox="1"/>
+          <p:nvPr/>
+        </p:nvSpPr>
+        <p:spPr>
+          <a:xfrm>
+            <a:off x="4802428" y="5047488"/>
+            <a:ext cx="2503627" cy="347472"/>
+          </a:xfrm>
+          <a:prstGeom prst="rect">
+            <a:avLst/>
+          </a:prstGeom>
+          <a:noFill/>
+        </p:spPr>
+        <p:txBody>
+          <a:bodyPr wrap="square" lIns="54864" rIns="54864" tIns="36576" bIns="36576" anchor="ctr">
+            <a:spAutoFit/>
+          </a:bodyPr>
+          <a:lstStyle/>
+          <a:p>
+            <a:pPr algn="r">
+              <a:lnSpc>
+                <a:spcPct val="106000"/>
+              </a:lnSpc>
+              <a:spcAft>
+                <a:spcPts val="400"/>
+              </a:spcAft>
+            </a:pPr>
+            <a:r>
+              <a:rPr sz="950" b="0" i="0">
+                <a:solidFill>
+                  <a:srgbClr val="333333"/>
+                </a:solidFill>
+                <a:latin typeface="Calibri"/>
+              </a:rPr>
+              <a:t>→ Return portfolio</a:t>
+            </a:r>
+          </a:p>
+        </p:txBody>
+      </p:sp>
+      <p:sp>
+        <p:nvSpPr>
+          <p:cNvPr id="17" name="TextBox 16"/>
+          <p:cNvSpPr txBox="1"/>
+          <p:nvPr/>
+        </p:nvSpPr>
+        <p:spPr>
+          <a:xfrm>
+            <a:off x="493776" y="5394959"/>
+            <a:ext cx="1530705" cy="347472"/>
+          </a:xfrm>
+          <a:prstGeom prst="rect">
+            <a:avLst/>
+          </a:prstGeom>
+          <a:noFill/>
+        </p:spPr>
+        <p:txBody>
+          <a:bodyPr wrap="square" lIns="54864" rIns="54864" tIns="36576" bIns="36576" anchor="ctr">
+            <a:spAutoFit/>
+          </a:bodyPr>
+          <a:lstStyle/>
+          <a:p>
+            <a:pPr algn="l">
+              <a:lnSpc>
+                <a:spcPct val="106000"/>
+              </a:lnSpc>
+              <a:spcAft>
+                <a:spcPts val="400"/>
+              </a:spcAft>
+            </a:pPr>
+            <a:r>
+              <a:rPr sz="950" b="1" i="0">
+                <a:solidFill>
+                  <a:srgbClr val="333333"/>
+                </a:solidFill>
+                <a:latin typeface="Calibri"/>
+              </a:rPr>
+              <a:t>Year 15</a:t>
+            </a:r>
+          </a:p>
+        </p:txBody>
+      </p:sp>
+      <p:sp>
+        <p:nvSpPr>
+          <p:cNvPr id="18" name="TextBox 17"/>
+          <p:cNvSpPr txBox="1"/>
+          <p:nvPr/>
+        </p:nvSpPr>
+        <p:spPr>
+          <a:xfrm>
+            <a:off x="2161641" y="5394959"/>
+            <a:ext cx="2503627" cy="347472"/>
+          </a:xfrm>
+          <a:prstGeom prst="rect">
+            <a:avLst/>
+          </a:prstGeom>
+          <a:noFill/>
+        </p:spPr>
+        <p:txBody>
+          <a:bodyPr wrap="square" lIns="54864" rIns="54864" tIns="36576" bIns="36576" anchor="ctr">
+            <a:spAutoFit/>
+          </a:bodyPr>
+          <a:lstStyle/>
+          <a:p>
+            <a:pPr algn="r">
+              <a:lnSpc>
+                <a:spcPct val="106000"/>
+              </a:lnSpc>
+              <a:spcAft>
+                <a:spcPts val="400"/>
+              </a:spcAft>
+            </a:pPr>
+            <a:r>
+              <a:rPr sz="950" b="0" i="0">
+                <a:solidFill>
+                  <a:srgbClr val="333333"/>
+                </a:solidFill>
+                <a:latin typeface="Calibri"/>
+              </a:rPr>
+              <a:t>− €5.65bn lump sum (50/50)</a:t>
+            </a:r>
+          </a:p>
+        </p:txBody>
+      </p:sp>
+      <p:sp>
+        <p:nvSpPr>
           <p:cNvPr id="19" name="TextBox 18"/>
           <p:cNvSpPr txBox="1"/>
           <p:nvPr/>
         </p:nvSpPr>
         <p:spPr>
           <a:xfrm>
-            <a:off x="493776" y="2267712"/>
-            <a:ext cx="2606040" cy="420624"/>
+            <a:off x="4802428" y="5394959"/>
+            <a:ext cx="2503627" cy="347472"/>
           </a:xfrm>
           <a:prstGeom prst="rect">
             <a:avLst/>
@@ -38541,7 +38683,7 @@
           </a:bodyPr>
           <a:lstStyle/>
           <a:p>
-            <a:pPr algn="l">
+            <a:pPr algn="r">
               <a:lnSpc>
                 <a:spcPct val="106000"/>
               </a:lnSpc>
@@ -38550,405 +38692,27 @@
               </a:spcAft>
             </a:pPr>
             <a:r>
-              <a:rPr sz="950" b="1" i="0">
+              <a:rPr sz="950" b="0" i="0">
                 <a:solidFill>
                   <a:srgbClr val="333333"/>
                 </a:solidFill>
                 <a:latin typeface="Calibri"/>
               </a:rPr>
-              <a:t>0% lump / 100% pension</a:t>
-            </a:r>
-          </a:p>
-        </p:txBody>
-      </p:sp>
-      <p:sp>
-        <p:nvSpPr>
-          <p:cNvPr id="20" name="TextBox 19"/>
-          <p:cNvSpPr txBox="1"/>
-          <p:nvPr/>
-        </p:nvSpPr>
-        <p:spPr>
-          <a:xfrm>
-            <a:off x="3236976" y="2267712"/>
-            <a:ext cx="2034540" cy="420624"/>
-          </a:xfrm>
-          <a:prstGeom prst="rect">
-            <a:avLst/>
-          </a:prstGeom>
-          <a:noFill/>
-        </p:spPr>
-        <p:txBody>
-          <a:bodyPr wrap="square" lIns="54864" rIns="54864" tIns="36576" bIns="36576" anchor="ctr">
-            <a:spAutoFit/>
-          </a:bodyPr>
-          <a:lstStyle/>
-          <a:p>
-            <a:pPr algn="r">
-              <a:lnSpc>
-                <a:spcPct val="106000"/>
-              </a:lnSpc>
-              <a:spcAft>
-                <a:spcPts val="400"/>
-              </a:spcAft>
-            </a:pPr>
-            <a:r>
-              <a:rPr sz="950" b="0" i="0">
-                <a:solidFill>
-                  <a:srgbClr val="333333"/>
-                </a:solidFill>
-                <a:latin typeface="Calibri"/>
-              </a:rPr>
-              <a:t>€0.0bn</a:t>
-            </a:r>
-          </a:p>
-        </p:txBody>
-      </p:sp>
-      <p:sp>
-        <p:nvSpPr>
-          <p:cNvPr id="21" name="TextBox 20"/>
-          <p:cNvSpPr txBox="1"/>
-          <p:nvPr/>
-        </p:nvSpPr>
-        <p:spPr>
-          <a:xfrm>
-            <a:off x="5408675" y="2267712"/>
-            <a:ext cx="2034540" cy="420624"/>
-          </a:xfrm>
-          <a:prstGeom prst="rect">
-            <a:avLst/>
-          </a:prstGeom>
-          <a:noFill/>
-        </p:spPr>
-        <p:txBody>
-          <a:bodyPr wrap="square" lIns="54864" rIns="54864" tIns="36576" bIns="36576" anchor="ctr">
-            <a:spAutoFit/>
-          </a:bodyPr>
-          <a:lstStyle/>
-          <a:p>
-            <a:pPr algn="r">
-              <a:lnSpc>
-                <a:spcPct val="106000"/>
-              </a:lnSpc>
-              <a:spcAft>
-                <a:spcPts val="400"/>
-              </a:spcAft>
-            </a:pPr>
-            <a:r>
-              <a:rPr sz="950" b="0" i="0">
-                <a:solidFill>
-                  <a:srgbClr val="333333"/>
-                </a:solidFill>
-                <a:latin typeface="Calibri"/>
-              </a:rPr>
-              <a:t>100,000</a:t>
-            </a:r>
-          </a:p>
-        </p:txBody>
-      </p:sp>
-      <p:sp>
-        <p:nvSpPr>
-          <p:cNvPr id="22" name="TextBox 21"/>
-          <p:cNvSpPr txBox="1"/>
-          <p:nvPr/>
-        </p:nvSpPr>
-        <p:spPr>
-          <a:xfrm>
-            <a:off x="7580375" y="2267712"/>
-            <a:ext cx="2034540" cy="420624"/>
-          </a:xfrm>
-          <a:prstGeom prst="rect">
-            <a:avLst/>
-          </a:prstGeom>
-          <a:noFill/>
-        </p:spPr>
-        <p:txBody>
-          <a:bodyPr wrap="square" lIns="54864" rIns="54864" tIns="36576" bIns="36576" anchor="ctr">
-            <a:spAutoFit/>
-          </a:bodyPr>
-          <a:lstStyle/>
-          <a:p>
-            <a:pPr algn="r">
-              <a:lnSpc>
-                <a:spcPct val="106000"/>
-              </a:lnSpc>
-              <a:spcAft>
-                <a:spcPts val="400"/>
-              </a:spcAft>
-            </a:pPr>
-            <a:r>
-              <a:rPr sz="950" b="0" i="0">
-                <a:solidFill>
-                  <a:srgbClr val="333333"/>
-                </a:solidFill>
-                <a:latin typeface="Calibri"/>
-              </a:rPr>
-              <a:t>€8.72bn</a:t>
-            </a:r>
-          </a:p>
-        </p:txBody>
-      </p:sp>
-      <p:sp>
-        <p:nvSpPr>
-          <p:cNvPr id="23" name="TextBox 22"/>
-          <p:cNvSpPr txBox="1"/>
-          <p:nvPr/>
-        </p:nvSpPr>
-        <p:spPr>
-          <a:xfrm>
-            <a:off x="9752076" y="2267712"/>
-            <a:ext cx="2034540" cy="420624"/>
-          </a:xfrm>
-          <a:prstGeom prst="rect">
-            <a:avLst/>
-          </a:prstGeom>
-          <a:noFill/>
-        </p:spPr>
-        <p:txBody>
-          <a:bodyPr wrap="square" lIns="54864" rIns="54864" tIns="36576" bIns="36576" anchor="ctr">
-            <a:spAutoFit/>
-          </a:bodyPr>
-          <a:lstStyle/>
-          <a:p>
-            <a:pPr algn="r">
-              <a:lnSpc>
-                <a:spcPct val="106000"/>
-              </a:lnSpc>
-              <a:spcAft>
-                <a:spcPts val="400"/>
-              </a:spcAft>
-            </a:pPr>
-            <a:r>
-              <a:rPr sz="950" b="0" i="0">
-                <a:solidFill>
-                  <a:srgbClr val="333333"/>
-                </a:solidFill>
-                <a:latin typeface="Calibri"/>
-              </a:rPr>
-              <a:t>€5.35bn</a:t>
-            </a:r>
-          </a:p>
-        </p:txBody>
-      </p:sp>
-      <p:sp>
-        <p:nvSpPr>
-          <p:cNvPr id="24" name="TextBox 23"/>
-          <p:cNvSpPr txBox="1"/>
-          <p:nvPr/>
-        </p:nvSpPr>
-        <p:spPr>
-          <a:xfrm>
-            <a:off x="493776" y="2688336"/>
-            <a:ext cx="2606040" cy="420624"/>
-          </a:xfrm>
-          <a:prstGeom prst="rect">
-            <a:avLst/>
-          </a:prstGeom>
-          <a:noFill/>
-        </p:spPr>
-        <p:txBody>
-          <a:bodyPr wrap="square" lIns="54864" rIns="54864" tIns="36576" bIns="36576" anchor="ctr">
-            <a:spAutoFit/>
-          </a:bodyPr>
-          <a:lstStyle/>
-          <a:p>
-            <a:pPr algn="l">
-              <a:lnSpc>
-                <a:spcPct val="106000"/>
-              </a:lnSpc>
-              <a:spcAft>
-                <a:spcPts val="400"/>
-              </a:spcAft>
-            </a:pPr>
-            <a:r>
-              <a:rPr sz="950" b="1" i="0">
-                <a:solidFill>
-                  <a:srgbClr val="333333"/>
-                </a:solidFill>
-                <a:latin typeface="Calibri"/>
-              </a:rPr>
-              <a:t>25% / 75%</a:t>
-            </a:r>
-          </a:p>
-        </p:txBody>
-      </p:sp>
-      <p:sp>
-        <p:nvSpPr>
-          <p:cNvPr id="25" name="TextBox 24"/>
-          <p:cNvSpPr txBox="1"/>
-          <p:nvPr/>
-        </p:nvSpPr>
-        <p:spPr>
-          <a:xfrm>
-            <a:off x="3236976" y="2688336"/>
-            <a:ext cx="2034540" cy="420624"/>
-          </a:xfrm>
-          <a:prstGeom prst="rect">
-            <a:avLst/>
-          </a:prstGeom>
-          <a:noFill/>
-        </p:spPr>
-        <p:txBody>
-          <a:bodyPr wrap="square" lIns="54864" rIns="54864" tIns="36576" bIns="36576" anchor="ctr">
-            <a:spAutoFit/>
-          </a:bodyPr>
-          <a:lstStyle/>
-          <a:p>
-            <a:pPr algn="r">
-              <a:lnSpc>
-                <a:spcPct val="106000"/>
-              </a:lnSpc>
-              <a:spcAft>
-                <a:spcPts val="400"/>
-              </a:spcAft>
-            </a:pPr>
-            <a:r>
-              <a:rPr sz="950" b="0" i="0">
-                <a:solidFill>
-                  <a:srgbClr val="333333"/>
-                </a:solidFill>
-                <a:latin typeface="Calibri"/>
-              </a:rPr>
-              <a:t>€2.83bn</a:t>
-            </a:r>
-          </a:p>
-        </p:txBody>
-      </p:sp>
-      <p:sp>
-        <p:nvSpPr>
-          <p:cNvPr id="26" name="TextBox 25"/>
-          <p:cNvSpPr txBox="1"/>
-          <p:nvPr/>
-        </p:nvSpPr>
-        <p:spPr>
-          <a:xfrm>
-            <a:off x="5408675" y="2688336"/>
-            <a:ext cx="2034540" cy="420624"/>
-          </a:xfrm>
-          <a:prstGeom prst="rect">
-            <a:avLst/>
-          </a:prstGeom>
-          <a:noFill/>
-        </p:spPr>
-        <p:txBody>
-          <a:bodyPr wrap="square" lIns="54864" rIns="54864" tIns="36576" bIns="36576" anchor="ctr">
-            <a:spAutoFit/>
-          </a:bodyPr>
-          <a:lstStyle/>
-          <a:p>
-            <a:pPr algn="r">
-              <a:lnSpc>
-                <a:spcPct val="106000"/>
-              </a:lnSpc>
-              <a:spcAft>
-                <a:spcPts val="400"/>
-              </a:spcAft>
-            </a:pPr>
-            <a:r>
-              <a:rPr sz="950" b="0" i="0">
-                <a:solidFill>
-                  <a:srgbClr val="333333"/>
-                </a:solidFill>
-                <a:latin typeface="Calibri"/>
-              </a:rPr>
-              <a:t>75,000</a:t>
-            </a:r>
-          </a:p>
-        </p:txBody>
-      </p:sp>
-      <p:sp>
-        <p:nvSpPr>
-          <p:cNvPr id="27" name="TextBox 26"/>
-          <p:cNvSpPr txBox="1"/>
-          <p:nvPr/>
-        </p:nvSpPr>
-        <p:spPr>
-          <a:xfrm>
-            <a:off x="7580375" y="2688336"/>
-            <a:ext cx="2034540" cy="420624"/>
-          </a:xfrm>
-          <a:prstGeom prst="rect">
-            <a:avLst/>
-          </a:prstGeom>
-          <a:noFill/>
-        </p:spPr>
-        <p:txBody>
-          <a:bodyPr wrap="square" lIns="54864" rIns="54864" tIns="36576" bIns="36576" anchor="ctr">
-            <a:spAutoFit/>
-          </a:bodyPr>
-          <a:lstStyle/>
-          <a:p>
-            <a:pPr algn="r">
-              <a:lnSpc>
-                <a:spcPct val="106000"/>
-              </a:lnSpc>
-              <a:spcAft>
-                <a:spcPts val="400"/>
-              </a:spcAft>
-            </a:pPr>
-            <a:r>
-              <a:rPr sz="950" b="0" i="0">
-                <a:solidFill>
-                  <a:srgbClr val="333333"/>
-                </a:solidFill>
-                <a:latin typeface="Calibri"/>
-              </a:rPr>
-              <a:t>€6.54bn</a:t>
-            </a:r>
-          </a:p>
-        </p:txBody>
-      </p:sp>
-      <p:sp>
-        <p:nvSpPr>
-          <p:cNvPr id="28" name="TextBox 27"/>
-          <p:cNvSpPr txBox="1"/>
-          <p:nvPr/>
-        </p:nvSpPr>
-        <p:spPr>
-          <a:xfrm>
-            <a:off x="9752076" y="2688336"/>
-            <a:ext cx="2034540" cy="420624"/>
-          </a:xfrm>
-          <a:prstGeom prst="rect">
-            <a:avLst/>
-          </a:prstGeom>
-          <a:noFill/>
-        </p:spPr>
-        <p:txBody>
-          <a:bodyPr wrap="square" lIns="54864" rIns="54864" tIns="36576" bIns="36576" anchor="ctr">
-            <a:spAutoFit/>
-          </a:bodyPr>
-          <a:lstStyle/>
-          <a:p>
-            <a:pPr algn="r">
-              <a:lnSpc>
-                <a:spcPct val="106000"/>
-              </a:lnSpc>
-              <a:spcAft>
-                <a:spcPts val="400"/>
-              </a:spcAft>
-            </a:pPr>
-            <a:r>
-              <a:rPr sz="950" b="0" i="0">
-                <a:solidFill>
-                  <a:srgbClr val="333333"/>
-                </a:solidFill>
-                <a:latin typeface="Calibri"/>
-              </a:rPr>
-              <a:t>€5.75bn</a:t>
-            </a:r>
-          </a:p>
-        </p:txBody>
-      </p:sp>
-      <p:sp>
-        <p:nvSpPr>
-          <p:cNvPr id="29" name="Rectangle 28"/>
+              <a:t>→ safe sleeve</a:t>
+            </a:r>
+          </a:p>
+        </p:txBody>
+      </p:sp>
+      <p:sp>
+        <p:nvSpPr>
+          <p:cNvPr id="20" name="Rectangle 19"/>
           <p:cNvSpPr/>
           <p:nvPr/>
         </p:nvSpPr>
         <p:spPr>
           <a:xfrm>
-            <a:off x="402336" y="3090672"/>
-            <a:ext cx="11430000" cy="420624"/>
+            <a:off x="402336" y="5724144"/>
+            <a:ext cx="6949440" cy="347472"/>
           </a:xfrm>
           <a:prstGeom prst="rect">
             <a:avLst/>
@@ -38985,14 +38749,14 @@
       </p:sp>
       <p:sp>
         <p:nvSpPr>
-          <p:cNvPr id="30" name="TextBox 29"/>
-          <p:cNvSpPr txBox="1"/>
-          <p:nvPr/>
-        </p:nvSpPr>
-        <p:spPr>
-          <a:xfrm>
-            <a:off x="493776" y="3108960"/>
-            <a:ext cx="2606040" cy="420624"/>
+          <p:cNvPr id="21" name="TextBox 20"/>
+          <p:cNvSpPr txBox="1"/>
+          <p:nvPr/>
+        </p:nvSpPr>
+        <p:spPr>
+          <a:xfrm>
+            <a:off x="493776" y="5742431"/>
+            <a:ext cx="1530705" cy="347472"/>
           </a:xfrm>
           <a:prstGeom prst="rect">
             <a:avLst/>
@@ -39020,21 +38784,21 @@
                 </a:solidFill>
                 <a:latin typeface="Calibri"/>
               </a:rPr>
-              <a:t>50% / 50%  (base case)</a:t>
-            </a:r>
-          </a:p>
-        </p:txBody>
-      </p:sp>
-      <p:sp>
-        <p:nvSpPr>
-          <p:cNvPr id="31" name="TextBox 30"/>
-          <p:cNvSpPr txBox="1"/>
-          <p:nvPr/>
-        </p:nvSpPr>
-        <p:spPr>
-          <a:xfrm>
-            <a:off x="3236976" y="3108960"/>
-            <a:ext cx="2034540" cy="420624"/>
+              <a:t>Years 16–50</a:t>
+            </a:r>
+          </a:p>
+        </p:txBody>
+      </p:sp>
+      <p:sp>
+        <p:nvSpPr>
+          <p:cNvPr id="22" name="TextBox 21"/>
+          <p:cNvSpPr txBox="1"/>
+          <p:nvPr/>
+        </p:nvSpPr>
+        <p:spPr>
+          <a:xfrm>
+            <a:off x="2161641" y="5742431"/>
+            <a:ext cx="2503627" cy="347472"/>
           </a:xfrm>
           <a:prstGeom prst="rect">
             <a:avLst/>
@@ -39062,21 +38826,21 @@
                 </a:solidFill>
                 <a:latin typeface="Calibri"/>
               </a:rPr>
-              <a:t>€5.65bn</a:t>
-            </a:r>
-          </a:p>
-        </p:txBody>
-      </p:sp>
-      <p:sp>
-        <p:nvSpPr>
-          <p:cNvPr id="32" name="TextBox 31"/>
-          <p:cNvSpPr txBox="1"/>
-          <p:nvPr/>
-        </p:nvSpPr>
-        <p:spPr>
-          <a:xfrm>
-            <a:off x="5408675" y="3108960"/>
-            <a:ext cx="2034540" cy="420624"/>
+              <a:t>− ≈ €0.3bn / yr pension tail</a:t>
+            </a:r>
+          </a:p>
+        </p:txBody>
+      </p:sp>
+      <p:sp>
+        <p:nvSpPr>
+          <p:cNvPr id="23" name="TextBox 22"/>
+          <p:cNvSpPr txBox="1"/>
+          <p:nvPr/>
+        </p:nvSpPr>
+        <p:spPr>
+          <a:xfrm>
+            <a:off x="4802428" y="5742431"/>
+            <a:ext cx="2503627" cy="347472"/>
           </a:xfrm>
           <a:prstGeom prst="rect">
             <a:avLst/>
@@ -39104,318 +38868,26 @@
                 </a:solidFill>
                 <a:latin typeface="Calibri"/>
               </a:rPr>
-              <a:t>50,000</a:t>
-            </a:r>
-          </a:p>
-        </p:txBody>
-      </p:sp>
-      <p:sp>
-        <p:nvSpPr>
-          <p:cNvPr id="33" name="TextBox 32"/>
-          <p:cNvSpPr txBox="1"/>
-          <p:nvPr/>
-        </p:nvSpPr>
-        <p:spPr>
-          <a:xfrm>
-            <a:off x="7580375" y="3108960"/>
-            <a:ext cx="2034540" cy="420624"/>
-          </a:xfrm>
-          <a:prstGeom prst="rect">
-            <a:avLst/>
-          </a:prstGeom>
-          <a:noFill/>
-        </p:spPr>
-        <p:txBody>
-          <a:bodyPr wrap="square" lIns="54864" rIns="54864" tIns="36576" bIns="36576" anchor="ctr">
-            <a:spAutoFit/>
-          </a:bodyPr>
-          <a:lstStyle/>
-          <a:p>
-            <a:pPr algn="r">
-              <a:lnSpc>
-                <a:spcPct val="106000"/>
-              </a:lnSpc>
-              <a:spcAft>
-                <a:spcPts val="400"/>
-              </a:spcAft>
-            </a:pPr>
-            <a:r>
-              <a:rPr sz="950" b="0" i="0">
-                <a:solidFill>
-                  <a:srgbClr val="333333"/>
-                </a:solidFill>
-                <a:latin typeface="Calibri"/>
-              </a:rPr>
-              <a:t>€4.36bn</a:t>
-            </a:r>
-          </a:p>
-        </p:txBody>
-      </p:sp>
-      <p:sp>
-        <p:nvSpPr>
-          <p:cNvPr id="34" name="TextBox 33"/>
-          <p:cNvSpPr txBox="1"/>
-          <p:nvPr/>
-        </p:nvSpPr>
-        <p:spPr>
-          <a:xfrm>
-            <a:off x="9752076" y="3108960"/>
-            <a:ext cx="2034540" cy="420624"/>
-          </a:xfrm>
-          <a:prstGeom prst="rect">
-            <a:avLst/>
-          </a:prstGeom>
-          <a:noFill/>
-        </p:spPr>
-        <p:txBody>
-          <a:bodyPr wrap="square" lIns="54864" rIns="54864" tIns="36576" bIns="36576" anchor="ctr">
-            <a:spAutoFit/>
-          </a:bodyPr>
-          <a:lstStyle/>
-          <a:p>
-            <a:pPr algn="r">
-              <a:lnSpc>
-                <a:spcPct val="106000"/>
-              </a:lnSpc>
-              <a:spcAft>
-                <a:spcPts val="400"/>
-              </a:spcAft>
-            </a:pPr>
-            <a:r>
-              <a:rPr sz="950" b="0" i="0">
-                <a:solidFill>
-                  <a:srgbClr val="333333"/>
-                </a:solidFill>
-                <a:latin typeface="Calibri"/>
-              </a:rPr>
-              <a:t>€6.14bn</a:t>
-            </a:r>
-          </a:p>
-        </p:txBody>
-      </p:sp>
-      <p:sp>
-        <p:nvSpPr>
-          <p:cNvPr id="35" name="TextBox 34"/>
-          <p:cNvSpPr txBox="1"/>
-          <p:nvPr/>
-        </p:nvSpPr>
-        <p:spPr>
-          <a:xfrm>
-            <a:off x="493776" y="3529584"/>
-            <a:ext cx="2606040" cy="420624"/>
-          </a:xfrm>
-          <a:prstGeom prst="rect">
-            <a:avLst/>
-          </a:prstGeom>
-          <a:noFill/>
-        </p:spPr>
-        <p:txBody>
-          <a:bodyPr wrap="square" lIns="54864" rIns="54864" tIns="36576" bIns="36576" anchor="ctr">
-            <a:spAutoFit/>
-          </a:bodyPr>
-          <a:lstStyle/>
-          <a:p>
-            <a:pPr algn="l">
-              <a:lnSpc>
-                <a:spcPct val="106000"/>
-              </a:lnSpc>
-              <a:spcAft>
-                <a:spcPts val="400"/>
-              </a:spcAft>
-            </a:pPr>
-            <a:r>
-              <a:rPr sz="950" b="1" i="0">
-                <a:solidFill>
-                  <a:srgbClr val="333333"/>
-                </a:solidFill>
-                <a:latin typeface="Calibri"/>
-              </a:rPr>
-              <a:t>75% / 25%</a:t>
-            </a:r>
-          </a:p>
-        </p:txBody>
-      </p:sp>
-      <p:sp>
-        <p:nvSpPr>
-          <p:cNvPr id="36" name="TextBox 35"/>
-          <p:cNvSpPr txBox="1"/>
-          <p:nvPr/>
-        </p:nvSpPr>
-        <p:spPr>
-          <a:xfrm>
-            <a:off x="3236976" y="3529584"/>
-            <a:ext cx="2034540" cy="420624"/>
-          </a:xfrm>
-          <a:prstGeom prst="rect">
-            <a:avLst/>
-          </a:prstGeom>
-          <a:noFill/>
-        </p:spPr>
-        <p:txBody>
-          <a:bodyPr wrap="square" lIns="54864" rIns="54864" tIns="36576" bIns="36576" anchor="ctr">
-            <a:spAutoFit/>
-          </a:bodyPr>
-          <a:lstStyle/>
-          <a:p>
-            <a:pPr algn="r">
-              <a:lnSpc>
-                <a:spcPct val="106000"/>
-              </a:lnSpc>
-              <a:spcAft>
-                <a:spcPts val="400"/>
-              </a:spcAft>
-            </a:pPr>
-            <a:r>
-              <a:rPr sz="950" b="0" i="0">
-                <a:solidFill>
-                  <a:srgbClr val="333333"/>
-                </a:solidFill>
-                <a:latin typeface="Calibri"/>
-              </a:rPr>
-              <a:t>€8.48bn</a:t>
-            </a:r>
-          </a:p>
-        </p:txBody>
-      </p:sp>
-      <p:sp>
-        <p:nvSpPr>
-          <p:cNvPr id="37" name="TextBox 36"/>
-          <p:cNvSpPr txBox="1"/>
-          <p:nvPr/>
-        </p:nvSpPr>
-        <p:spPr>
-          <a:xfrm>
-            <a:off x="5408675" y="3529584"/>
-            <a:ext cx="2034540" cy="420624"/>
-          </a:xfrm>
-          <a:prstGeom prst="rect">
-            <a:avLst/>
-          </a:prstGeom>
-          <a:noFill/>
-        </p:spPr>
-        <p:txBody>
-          <a:bodyPr wrap="square" lIns="54864" rIns="54864" tIns="36576" bIns="36576" anchor="ctr">
-            <a:spAutoFit/>
-          </a:bodyPr>
-          <a:lstStyle/>
-          <a:p>
-            <a:pPr algn="r">
-              <a:lnSpc>
-                <a:spcPct val="106000"/>
-              </a:lnSpc>
-              <a:spcAft>
-                <a:spcPts val="400"/>
-              </a:spcAft>
-            </a:pPr>
-            <a:r>
-              <a:rPr sz="950" b="0" i="0">
-                <a:solidFill>
-                  <a:srgbClr val="333333"/>
-                </a:solidFill>
-                <a:latin typeface="Calibri"/>
-              </a:rPr>
-              <a:t>25,000</a:t>
-            </a:r>
-          </a:p>
-        </p:txBody>
-      </p:sp>
-      <p:sp>
-        <p:nvSpPr>
-          <p:cNvPr id="38" name="TextBox 37"/>
-          <p:cNvSpPr txBox="1"/>
-          <p:nvPr/>
-        </p:nvSpPr>
-        <p:spPr>
-          <a:xfrm>
-            <a:off x="7580375" y="3529584"/>
-            <a:ext cx="2034540" cy="420624"/>
-          </a:xfrm>
-          <a:prstGeom prst="rect">
-            <a:avLst/>
-          </a:prstGeom>
-          <a:noFill/>
-        </p:spPr>
-        <p:txBody>
-          <a:bodyPr wrap="square" lIns="54864" rIns="54864" tIns="36576" bIns="36576" anchor="ctr">
-            <a:spAutoFit/>
-          </a:bodyPr>
-          <a:lstStyle/>
-          <a:p>
-            <a:pPr algn="r">
-              <a:lnSpc>
-                <a:spcPct val="106000"/>
-              </a:lnSpc>
-              <a:spcAft>
-                <a:spcPts val="400"/>
-              </a:spcAft>
-            </a:pPr>
-            <a:r>
-              <a:rPr sz="950" b="0" i="0">
-                <a:solidFill>
-                  <a:srgbClr val="333333"/>
-                </a:solidFill>
-                <a:latin typeface="Calibri"/>
-              </a:rPr>
-              <a:t>€2.18bn</a:t>
-            </a:r>
-          </a:p>
-        </p:txBody>
-      </p:sp>
-      <p:sp>
-        <p:nvSpPr>
-          <p:cNvPr id="39" name="TextBox 38"/>
-          <p:cNvSpPr txBox="1"/>
-          <p:nvPr/>
-        </p:nvSpPr>
-        <p:spPr>
-          <a:xfrm>
-            <a:off x="9752076" y="3529584"/>
-            <a:ext cx="2034540" cy="420624"/>
-          </a:xfrm>
-          <a:prstGeom prst="rect">
-            <a:avLst/>
-          </a:prstGeom>
-          <a:noFill/>
-        </p:spPr>
-        <p:txBody>
-          <a:bodyPr wrap="square" lIns="54864" rIns="54864" tIns="36576" bIns="36576" anchor="ctr">
-            <a:spAutoFit/>
-          </a:bodyPr>
-          <a:lstStyle/>
-          <a:p>
-            <a:pPr algn="r">
-              <a:lnSpc>
-                <a:spcPct val="106000"/>
-              </a:lnSpc>
-              <a:spcAft>
-                <a:spcPts val="400"/>
-              </a:spcAft>
-            </a:pPr>
-            <a:r>
-              <a:rPr sz="950" b="0" i="0">
-                <a:solidFill>
-                  <a:srgbClr val="333333"/>
-                </a:solidFill>
-                <a:latin typeface="Calibri"/>
-              </a:rPr>
-              <a:t>€6.54bn</a:t>
-            </a:r>
-          </a:p>
-        </p:txBody>
-      </p:sp>
-      <p:sp>
-        <p:nvSpPr>
-          <p:cNvPr id="40" name="Rectangle 39"/>
+              <a:t>→ coupons + reinvestment</a:t>
+            </a:r>
+          </a:p>
+        </p:txBody>
+      </p:sp>
+      <p:sp>
+        <p:nvSpPr>
+          <p:cNvPr id="24" name="Rounded Rectangle 23"/>
           <p:cNvSpPr/>
           <p:nvPr/>
         </p:nvSpPr>
         <p:spPr>
           <a:xfrm>
-            <a:off x="402336" y="3931920"/>
-            <a:ext cx="11430000" cy="420624"/>
-          </a:xfrm>
-          <a:prstGeom prst="rect">
-            <a:avLst/>
+            <a:off x="7498079" y="1783080"/>
+            <a:ext cx="4334256" cy="4114800"/>
+          </a:xfrm>
+          <a:prstGeom prst="roundRect">
+            <a:avLst>
+              <a:gd name="adj" fmla="val 4500"/>
+            </a:avLst>
           </a:prstGeom>
           <a:solidFill>
             <a:srgbClr val="EDF2F4"/>
@@ -39449,270 +38921,14 @@
       </p:sp>
       <p:sp>
         <p:nvSpPr>
-          <p:cNvPr id="41" name="TextBox 40"/>
-          <p:cNvSpPr txBox="1"/>
-          <p:nvPr/>
-        </p:nvSpPr>
-        <p:spPr>
-          <a:xfrm>
-            <a:off x="493776" y="3950207"/>
-            <a:ext cx="2606040" cy="420624"/>
-          </a:xfrm>
-          <a:prstGeom prst="rect">
-            <a:avLst/>
-          </a:prstGeom>
-          <a:noFill/>
-        </p:spPr>
-        <p:txBody>
-          <a:bodyPr wrap="square" lIns="54864" rIns="54864" tIns="36576" bIns="36576" anchor="ctr">
-            <a:spAutoFit/>
-          </a:bodyPr>
-          <a:lstStyle/>
-          <a:p>
-            <a:pPr algn="l">
-              <a:lnSpc>
-                <a:spcPct val="106000"/>
-              </a:lnSpc>
-              <a:spcAft>
-                <a:spcPts val="400"/>
-              </a:spcAft>
-            </a:pPr>
-            <a:r>
-              <a:rPr sz="950" b="1" i="0">
-                <a:solidFill>
-                  <a:srgbClr val="333333"/>
-                </a:solidFill>
-                <a:latin typeface="Calibri"/>
-              </a:rPr>
-              <a:t>100% / 0%</a:t>
-            </a:r>
-          </a:p>
-        </p:txBody>
-      </p:sp>
-      <p:sp>
-        <p:nvSpPr>
-          <p:cNvPr id="42" name="TextBox 41"/>
-          <p:cNvSpPr txBox="1"/>
-          <p:nvPr/>
-        </p:nvSpPr>
-        <p:spPr>
-          <a:xfrm>
-            <a:off x="3236976" y="3950207"/>
-            <a:ext cx="2034540" cy="420624"/>
-          </a:xfrm>
-          <a:prstGeom prst="rect">
-            <a:avLst/>
-          </a:prstGeom>
-          <a:noFill/>
-        </p:spPr>
-        <p:txBody>
-          <a:bodyPr wrap="square" lIns="54864" rIns="54864" tIns="36576" bIns="36576" anchor="ctr">
-            <a:spAutoFit/>
-          </a:bodyPr>
-          <a:lstStyle/>
-          <a:p>
-            <a:pPr algn="r">
-              <a:lnSpc>
-                <a:spcPct val="106000"/>
-              </a:lnSpc>
-              <a:spcAft>
-                <a:spcPts val="400"/>
-              </a:spcAft>
-            </a:pPr>
-            <a:r>
-              <a:rPr sz="950" b="0" i="0">
-                <a:solidFill>
-                  <a:srgbClr val="333333"/>
-                </a:solidFill>
-                <a:latin typeface="Calibri"/>
-              </a:rPr>
-              <a:t>€11.30bn</a:t>
-            </a:r>
-          </a:p>
-        </p:txBody>
-      </p:sp>
-      <p:sp>
-        <p:nvSpPr>
-          <p:cNvPr id="43" name="TextBox 42"/>
-          <p:cNvSpPr txBox="1"/>
-          <p:nvPr/>
-        </p:nvSpPr>
-        <p:spPr>
-          <a:xfrm>
-            <a:off x="5408675" y="3950207"/>
-            <a:ext cx="2034540" cy="420624"/>
-          </a:xfrm>
-          <a:prstGeom prst="rect">
-            <a:avLst/>
-          </a:prstGeom>
-          <a:noFill/>
-        </p:spPr>
-        <p:txBody>
-          <a:bodyPr wrap="square" lIns="54864" rIns="54864" tIns="36576" bIns="36576" anchor="ctr">
-            <a:spAutoFit/>
-          </a:bodyPr>
-          <a:lstStyle/>
-          <a:p>
-            <a:pPr algn="r">
-              <a:lnSpc>
-                <a:spcPct val="106000"/>
-              </a:lnSpc>
-              <a:spcAft>
-                <a:spcPts val="400"/>
-              </a:spcAft>
-            </a:pPr>
-            <a:r>
-              <a:rPr sz="950" b="0" i="0">
-                <a:solidFill>
-                  <a:srgbClr val="333333"/>
-                </a:solidFill>
-                <a:latin typeface="Calibri"/>
-              </a:rPr>
-              <a:t>0</a:t>
-            </a:r>
-          </a:p>
-        </p:txBody>
-      </p:sp>
-      <p:sp>
-        <p:nvSpPr>
-          <p:cNvPr id="44" name="TextBox 43"/>
-          <p:cNvSpPr txBox="1"/>
-          <p:nvPr/>
-        </p:nvSpPr>
-        <p:spPr>
-          <a:xfrm>
-            <a:off x="7580375" y="3950207"/>
-            <a:ext cx="2034540" cy="420624"/>
-          </a:xfrm>
-          <a:prstGeom prst="rect">
-            <a:avLst/>
-          </a:prstGeom>
-          <a:noFill/>
-        </p:spPr>
-        <p:txBody>
-          <a:bodyPr wrap="square" lIns="54864" rIns="54864" tIns="36576" bIns="36576" anchor="ctr">
-            <a:spAutoFit/>
-          </a:bodyPr>
-          <a:lstStyle/>
-          <a:p>
-            <a:pPr algn="r">
-              <a:lnSpc>
-                <a:spcPct val="106000"/>
-              </a:lnSpc>
-              <a:spcAft>
-                <a:spcPts val="400"/>
-              </a:spcAft>
-            </a:pPr>
-            <a:r>
-              <a:rPr sz="950" b="0" i="0">
-                <a:solidFill>
-                  <a:srgbClr val="333333"/>
-                </a:solidFill>
-                <a:latin typeface="Calibri"/>
-              </a:rPr>
-              <a:t>€0.00bn</a:t>
-            </a:r>
-          </a:p>
-        </p:txBody>
-      </p:sp>
-      <p:sp>
-        <p:nvSpPr>
-          <p:cNvPr id="45" name="TextBox 44"/>
-          <p:cNvSpPr txBox="1"/>
-          <p:nvPr/>
-        </p:nvSpPr>
-        <p:spPr>
-          <a:xfrm>
-            <a:off x="9752076" y="3950207"/>
-            <a:ext cx="2034540" cy="420624"/>
-          </a:xfrm>
-          <a:prstGeom prst="rect">
-            <a:avLst/>
-          </a:prstGeom>
-          <a:noFill/>
-        </p:spPr>
-        <p:txBody>
-          <a:bodyPr wrap="square" lIns="54864" rIns="54864" tIns="36576" bIns="36576" anchor="ctr">
-            <a:spAutoFit/>
-          </a:bodyPr>
-          <a:lstStyle/>
-          <a:p>
-            <a:pPr algn="r">
-              <a:lnSpc>
-                <a:spcPct val="106000"/>
-              </a:lnSpc>
-              <a:spcAft>
-                <a:spcPts val="400"/>
-              </a:spcAft>
-            </a:pPr>
-            <a:r>
-              <a:rPr sz="950" b="0" i="0">
-                <a:solidFill>
-                  <a:srgbClr val="333333"/>
-                </a:solidFill>
-                <a:latin typeface="Calibri"/>
-              </a:rPr>
-              <a:t>€6.94bn</a:t>
-            </a:r>
-          </a:p>
-        </p:txBody>
-      </p:sp>
-      <p:sp>
-        <p:nvSpPr>
-          <p:cNvPr id="46" name="Rounded Rectangle 45"/>
+          <p:cNvPr id="25" name="Rectangle 24"/>
           <p:cNvSpPr/>
           <p:nvPr/>
         </p:nvSpPr>
         <p:spPr>
           <a:xfrm>
-            <a:off x="402336" y="4480560"/>
-            <a:ext cx="5532120" cy="1463040"/>
-          </a:xfrm>
-          <a:prstGeom prst="roundRect">
-            <a:avLst>
-              <a:gd name="adj" fmla="val 4500"/>
-            </a:avLst>
-          </a:prstGeom>
-          <a:solidFill>
-            <a:srgbClr val="EDF2F4"/>
-          </a:solidFill>
-          <a:ln>
-            <a:noFill/>
-          </a:ln>
-          <a:effectLst/>
-        </p:spPr>
-        <p:style>
-          <a:lnRef idx="1">
-            <a:schemeClr val="accent1"/>
-          </a:lnRef>
-          <a:fillRef idx="3">
-            <a:schemeClr val="accent1"/>
-          </a:fillRef>
-          <a:effectRef idx="2">
-            <a:schemeClr val="accent1"/>
-          </a:effectRef>
-          <a:fontRef idx="minor">
-            <a:schemeClr val="lt1"/>
-          </a:fontRef>
-        </p:style>
-        <p:txBody>
-          <a:bodyPr rtlCol="0" anchor="ctr"/>
-          <a:lstStyle/>
-          <a:p>
-            <a:pPr algn="ctr"/>
-          </a:p>
-        </p:txBody>
-      </p:sp>
-      <p:sp>
-        <p:nvSpPr>
-          <p:cNvPr id="47" name="Rectangle 46"/>
-          <p:cNvSpPr/>
-          <p:nvPr/>
-        </p:nvSpPr>
-        <p:spPr>
-          <a:xfrm>
-            <a:off x="402336" y="4480560"/>
-            <a:ext cx="5532120" cy="50292"/>
+            <a:off x="7498079" y="1783080"/>
+            <a:ext cx="4334256" cy="50292"/>
           </a:xfrm>
           <a:prstGeom prst="rect">
             <a:avLst/>
@@ -39749,14 +38965,14 @@
       </p:sp>
       <p:sp>
         <p:nvSpPr>
-          <p:cNvPr id="48" name="TextBox 47"/>
-          <p:cNvSpPr txBox="1"/>
-          <p:nvPr/>
-        </p:nvSpPr>
-        <p:spPr>
-          <a:xfrm>
-            <a:off x="566928" y="4608576"/>
-            <a:ext cx="5202936" cy="365760"/>
+          <p:cNvPr id="26" name="TextBox 25"/>
+          <p:cNvSpPr txBox="1"/>
+          <p:nvPr/>
+        </p:nvSpPr>
+        <p:spPr>
+          <a:xfrm>
+            <a:off x="7662671" y="1911095"/>
+            <a:ext cx="4005072" cy="365760"/>
           </a:xfrm>
           <a:prstGeom prst="rect">
             <a:avLst/>
@@ -39784,21 +39000,21 @@
                 </a:solidFill>
                 <a:latin typeface="Calibri"/>
               </a:rPr>
-              <a:t>Market path on top</a:t>
-            </a:r>
-          </a:p>
-        </p:txBody>
-      </p:sp>
-      <p:sp>
-        <p:nvSpPr>
-          <p:cNvPr id="49" name="TextBox 48"/>
-          <p:cNvSpPr txBox="1"/>
-          <p:nvPr/>
-        </p:nvSpPr>
-        <p:spPr>
-          <a:xfrm>
-            <a:off x="530352" y="5084064"/>
-            <a:ext cx="5239512" cy="731520"/>
+              <a:t>Reading the structure</a:t>
+            </a:r>
+          </a:p>
+        </p:txBody>
+      </p:sp>
+      <p:sp>
+        <p:nvSpPr>
+          <p:cNvPr id="27" name="TextBox 26"/>
+          <p:cNvSpPr txBox="1"/>
+          <p:nvPr/>
+        </p:nvSpPr>
+        <p:spPr>
+          <a:xfrm>
+            <a:off x="7626096" y="2386584"/>
+            <a:ext cx="4041648" cy="3383280"/>
           </a:xfrm>
           <a:prstGeom prst="rect">
             <a:avLst/>
@@ -39820,7 +39036,7 @@
               </a:spcAft>
             </a:pPr>
             <a:r>
-              <a:rPr sz="950" b="0" i="0">
+              <a:rPr sz="919" b="0" i="0">
                 <a:solidFill>
                   <a:srgbClr val="333333"/>
                 </a:solidFill>
@@ -39829,13 +39045,22 @@
               <a:t>•  </a:t>
             </a:r>
             <a:r>
-              <a:rPr sz="950" b="0" i="0">
+              <a:rPr sz="919" b="1" i="0">
+                <a:solidFill>
+                  <a:srgbClr val="1F4E5F"/>
+                </a:solidFill>
+                <a:latin typeface="Calibri"/>
+              </a:rPr>
+              <a:t>Years 1–10.  </a:t>
+            </a:r>
+            <a:r>
+              <a:rPr sz="919" b="0" i="0">
                 <a:solidFill>
                   <a:srgbClr val="333333"/>
                 </a:solidFill>
                 <a:latin typeface="Calibri"/>
               </a:rPr>
-              <a:t>Base 15y median assets €20.7bn vs a €10.0bn liability → funded ratio ≈ 2.1×.</a:t>
+              <a:t>€0.5bn/yr contributions fund the RSP; the LMP coupons accrue.</a:t>
             </a:r>
           </a:p>
           <a:p>
@@ -39848,7 +39073,7 @@
               </a:spcAft>
             </a:pPr>
             <a:r>
-              <a:rPr sz="950" b="0" i="0">
+              <a:rPr sz="919" b="0" i="0">
                 <a:solidFill>
                   <a:srgbClr val="333333"/>
                 </a:solidFill>
@@ -39857,170 +39082,61 @@
               <a:t>•  </a:t>
             </a:r>
             <a:r>
-              <a:rPr sz="950" b="0" i="0">
+              <a:rPr sz="919" b="1" i="0">
+                <a:solidFill>
+                  <a:srgbClr val="1F4E5F"/>
+                </a:solidFill>
+                <a:latin typeface="Calibri"/>
+              </a:rPr>
+              <a:t>Year 15.  </a:t>
+            </a:r>
+            <a:r>
+              <a:rPr sz="919" b="0" i="0">
                 <a:solidFill>
                   <a:srgbClr val="333333"/>
                 </a:solidFill>
                 <a:latin typeface="Calibri"/>
               </a:rPr>
-              <a:t>Even the 0.5th-percentile path (€11.2bn) covers the €11.3bn floor.</a:t>
-            </a:r>
-          </a:p>
-        </p:txBody>
-      </p:sp>
-      <p:sp>
-        <p:nvSpPr>
-          <p:cNvPr id="50" name="Rounded Rectangle 49"/>
-          <p:cNvSpPr/>
-          <p:nvPr/>
-        </p:nvSpPr>
-        <p:spPr>
-          <a:xfrm>
-            <a:off x="6144768" y="4480560"/>
-            <a:ext cx="5687568" cy="1463040"/>
-          </a:xfrm>
-          <a:prstGeom prst="roundRect">
-            <a:avLst>
-              <a:gd name="adj" fmla="val 4500"/>
-            </a:avLst>
-          </a:prstGeom>
-          <a:solidFill>
-            <a:srgbClr val="EDF2F4"/>
-          </a:solidFill>
-          <a:ln>
-            <a:noFill/>
-          </a:ln>
-          <a:effectLst/>
-        </p:spPr>
-        <p:style>
-          <a:lnRef idx="1">
-            <a:schemeClr val="accent1"/>
-          </a:lnRef>
-          <a:fillRef idx="3">
-            <a:schemeClr val="accent1"/>
-          </a:fillRef>
-          <a:effectRef idx="2">
-            <a:schemeClr val="accent1"/>
-          </a:effectRef>
-          <a:fontRef idx="minor">
-            <a:schemeClr val="lt1"/>
-          </a:fontRef>
-        </p:style>
-        <p:txBody>
-          <a:bodyPr rtlCol="0" anchor="ctr"/>
-          <a:lstStyle/>
-          <a:p>
-            <a:pPr algn="ctr"/>
-          </a:p>
-        </p:txBody>
-      </p:sp>
-      <p:sp>
-        <p:nvSpPr>
-          <p:cNvPr id="51" name="Rectangle 50"/>
-          <p:cNvSpPr/>
-          <p:nvPr/>
-        </p:nvSpPr>
-        <p:spPr>
-          <a:xfrm>
-            <a:off x="6144768" y="4480560"/>
-            <a:ext cx="5687568" cy="50292"/>
-          </a:xfrm>
-          <a:prstGeom prst="rect">
-            <a:avLst/>
-          </a:prstGeom>
-          <a:solidFill>
-            <a:srgbClr val="3B8E9E"/>
-          </a:solidFill>
-          <a:ln>
-            <a:noFill/>
-          </a:ln>
-          <a:effectLst/>
-        </p:spPr>
-        <p:style>
-          <a:lnRef idx="1">
-            <a:schemeClr val="accent1"/>
-          </a:lnRef>
-          <a:fillRef idx="3">
-            <a:schemeClr val="accent1"/>
-          </a:fillRef>
-          <a:effectRef idx="2">
-            <a:schemeClr val="accent1"/>
-          </a:effectRef>
-          <a:fontRef idx="minor">
-            <a:schemeClr val="lt1"/>
-          </a:fontRef>
-        </p:style>
-        <p:txBody>
-          <a:bodyPr rtlCol="0" anchor="ctr"/>
-          <a:lstStyle/>
-          <a:p>
-            <a:pPr algn="ctr"/>
-          </a:p>
-        </p:txBody>
-      </p:sp>
-      <p:sp>
-        <p:nvSpPr>
-          <p:cNvPr id="52" name="TextBox 51"/>
-          <p:cNvSpPr txBox="1"/>
-          <p:nvPr/>
-        </p:nvSpPr>
-        <p:spPr>
-          <a:xfrm>
-            <a:off x="6309359" y="4608576"/>
-            <a:ext cx="5358383" cy="365760"/>
-          </a:xfrm>
-          <a:prstGeom prst="rect">
-            <a:avLst/>
-          </a:prstGeom>
-          <a:noFill/>
-        </p:spPr>
-        <p:txBody>
-          <a:bodyPr wrap="square" lIns="54864" rIns="54864" tIns="36576" bIns="36576" anchor="t">
-            <a:spAutoFit/>
-          </a:bodyPr>
-          <a:lstStyle/>
-          <a:p>
-            <a:pPr algn="l">
-              <a:lnSpc>
-                <a:spcPct val="106000"/>
-              </a:lnSpc>
-              <a:spcAft>
-                <a:spcPts val="400"/>
-              </a:spcAft>
-            </a:pPr>
-            <a:r>
-              <a:rPr sz="1300" b="1" i="0">
+              <a:t>the lump-sum spike – €5.65bn at 50/50 (€2.3–9.0bn across the election).</a:t>
+            </a:r>
+          </a:p>
+          <a:p>
+            <a:pPr>
+              <a:lnSpc>
+                <a:spcPct val="105000"/>
+              </a:lnSpc>
+              <a:spcAft>
+                <a:spcPts val="500"/>
+              </a:spcAft>
+            </a:pPr>
+            <a:r>
+              <a:rPr sz="919" b="0" i="0">
+                <a:solidFill>
+                  <a:srgbClr val="333333"/>
+                </a:solidFill>
+                <a:latin typeface="Calibri"/>
+              </a:rPr>
+              <a:t>•  </a:t>
+            </a:r>
+            <a:r>
+              <a:rPr sz="919" b="1" i="0">
                 <a:solidFill>
                   <a:srgbClr val="1F4E5F"/>
                 </a:solidFill>
                 <a:latin typeface="Calibri"/>
               </a:rPr>
-              <a:t>So the upside is real</a:t>
-            </a:r>
-          </a:p>
-        </p:txBody>
-      </p:sp>
-      <p:sp>
-        <p:nvSpPr>
-          <p:cNvPr id="53" name="TextBox 52"/>
-          <p:cNvSpPr txBox="1"/>
-          <p:nvPr/>
-        </p:nvSpPr>
-        <p:spPr>
-          <a:xfrm>
-            <a:off x="6272783" y="5084064"/>
-            <a:ext cx="5394959" cy="731520"/>
-          </a:xfrm>
-          <a:prstGeom prst="rect">
-            <a:avLst/>
-          </a:prstGeom>
-          <a:noFill/>
-        </p:spPr>
-        <p:txBody>
-          <a:bodyPr wrap="square" lIns="54864" rIns="54864" tIns="36576" bIns="36576">
-            <a:spAutoFit/>
-          </a:bodyPr>
-          <a:lstStyle/>
+              <a:t>Years 16–50.  </a:t>
+            </a:r>
+            <a:r>
+              <a:rPr sz="919" b="0" i="0">
+                <a:solidFill>
+                  <a:srgbClr val="333333"/>
+                </a:solidFill>
+                <a:latin typeface="Calibri"/>
+              </a:rPr>
+              <a:t>≈ €0.3bn/yr pension tail, decaying with mortality; 11% of PV beyond year 30.</a:t>
+            </a:r>
+          </a:p>
           <a:p>
             <a:pPr>
               <a:lnSpc>
@@ -40031,7 +39147,7 @@
               </a:spcAft>
             </a:pPr>
             <a:r>
-              <a:rPr sz="950" b="0" i="0">
+              <a:rPr sz="919" b="0" i="0">
                 <a:solidFill>
                   <a:srgbClr val="333333"/>
                 </a:solidFill>
@@ -40040,83 +39156,22 @@
               <a:t>•  </a:t>
             </a:r>
             <a:r>
-              <a:rPr sz="950" b="0" i="0">
+              <a:rPr sz="919" b="1" i="0">
+                <a:solidFill>
+                  <a:srgbClr val="1F4E5F"/>
+                </a:solidFill>
+                <a:latin typeface="Calibri"/>
+              </a:rPr>
+              <a:t>Coverage.  </a:t>
+            </a:r>
+            <a:r>
+              <a:rPr sz="919" b="0" i="0">
                 <a:solidFill>
                   <a:srgbClr val="333333"/>
                 </a:solidFill>
                 <a:latin typeface="Calibri"/>
               </a:rPr>
-              <a:t>Across every election and almost every market path the book finishes above the guarantee.</a:t>
-            </a:r>
-          </a:p>
-          <a:p>
-            <a:pPr>
-              <a:lnSpc>
-                <a:spcPct val="105000"/>
-              </a:lnSpc>
-              <a:spcAft>
-                <a:spcPts val="500"/>
-              </a:spcAft>
-            </a:pPr>
-            <a:r>
-              <a:rPr sz="950" b="0" i="0">
-                <a:solidFill>
-                  <a:srgbClr val="333333"/>
-                </a:solidFill>
-                <a:latin typeface="Calibri"/>
-              </a:rPr>
-              <a:t>•  </a:t>
-            </a:r>
-            <a:r>
-              <a:rPr sz="950" b="0" i="0">
-                <a:solidFill>
-                  <a:srgbClr val="333333"/>
-                </a:solidFill>
-                <a:latin typeface="Calibri"/>
-              </a:rPr>
-              <a:t>P(underfunded) ≈ 0.1% at the base election, still &lt; 0.6% even at a 100% lump election – before the de-risking glidepath.</a:t>
-            </a:r>
-          </a:p>
-        </p:txBody>
-      </p:sp>
-      <p:sp>
-        <p:nvSpPr>
-          <p:cNvPr id="54" name="TextBox 53"/>
-          <p:cNvSpPr txBox="1"/>
-          <p:nvPr/>
-        </p:nvSpPr>
-        <p:spPr>
-          <a:xfrm>
-            <a:off x="402336" y="6053328"/>
-            <a:ext cx="11430000" cy="365760"/>
-          </a:xfrm>
-          <a:prstGeom prst="rect">
-            <a:avLst/>
-          </a:prstGeom>
-          <a:noFill/>
-        </p:spPr>
-        <p:txBody>
-          <a:bodyPr wrap="square" lIns="54864" rIns="54864" tIns="36576" bIns="36576" anchor="t">
-            <a:spAutoFit/>
-          </a:bodyPr>
-          <a:lstStyle/>
-          <a:p>
-            <a:pPr algn="l">
-              <a:lnSpc>
-                <a:spcPct val="106000"/>
-              </a:lnSpc>
-              <a:spcAft>
-                <a:spcPts val="400"/>
-              </a:spcAft>
-            </a:pPr>
-            <a:r>
-              <a:rPr sz="900" b="0" i="1">
-                <a:solidFill>
-                  <a:srgbClr val="8A8A8A"/>
-                </a:solidFill>
-                <a:latin typeface="Calibri"/>
-              </a:rPr>
-              <a:t>Source: mixed_liability_scenarios.xlsx (Scenario Summary); monte_carlo_ALM_results.xlsx (Scenario EUR bn).</a:t>
+              <a:t>Stage-1 dedication keeps the running cash balance ≥ 0 every year to year 50 – no external top-up; ultra-long / zero-coupon bonds reach the 30y+ tail.</a:t>
             </a:r>
           </a:p>
         </p:txBody>
@@ -40264,7 +39319,7 @@
                 </a:solidFill>
                 <a:latin typeface="Calibri Light"/>
               </a:rPr>
-              <a:t>Sharing the Upside – 90 / 10 From Year 15</a:t>
+              <a:t>Flows Under Every Scenario</a:t>
             </a:r>
           </a:p>
         </p:txBody>
@@ -40306,7 +39361,7 @@
                 </a:solidFill>
                 <a:latin typeface="Calibri"/>
               </a:rPr>
-              <a:t>The whole return compounds until benefits begin; then 90% of profit goes to policyholders</a:t>
+              <a:t>The year-15 need and the pension tail move with the election; the surplus absorbs the market path</a:t>
             </a:r>
           </a:p>
         </p:txBody>
@@ -40646,50 +39701,278 @@
                 </a:solidFill>
                 <a:latin typeface="Calibri"/>
               </a:rPr>
-              <a:t>WHERE THE SURPLUS GOES</a:t>
-            </a:r>
-          </a:p>
-        </p:txBody>
-      </p:sp>
-      <p:pic>
-        <p:nvPicPr>
-          <p:cNvPr id="12" name="Picture 11" descr="profit_share.png"/>
-          <p:cNvPicPr>
-            <a:picLocks noChangeAspect="1"/>
-          </p:cNvPicPr>
-          <p:nvPr/>
-        </p:nvPicPr>
-        <p:blipFill>
-          <a:blip r:embed="rId2"/>
-          <a:stretch>
-            <a:fillRect/>
-          </a:stretch>
-        </p:blipFill>
-        <p:spPr>
-          <a:xfrm>
-            <a:off x="402336" y="1737360"/>
-            <a:ext cx="6858000" cy="2911011"/>
-          </a:xfrm>
-          <a:prstGeom prst="rect">
-            <a:avLst/>
-          </a:prstGeom>
-        </p:spPr>
-      </p:pic>
-      <p:sp>
-        <p:nvSpPr>
-          <p:cNvPr id="13" name="Rounded Rectangle 12"/>
+              <a:t>POLICYHOLDER-ELECTION SCENARIOS</a:t>
+            </a:r>
+          </a:p>
+        </p:txBody>
+      </p:sp>
+      <p:sp>
+        <p:nvSpPr>
+          <p:cNvPr id="12" name="Rectangle 11"/>
           <p:cNvSpPr/>
           <p:nvPr/>
         </p:nvSpPr>
         <p:spPr>
           <a:xfrm>
-            <a:off x="7452360" y="1737360"/>
-            <a:ext cx="4379976" cy="4160520"/>
-          </a:xfrm>
-          <a:prstGeom prst="roundRect">
-            <a:avLst>
-              <a:gd name="adj" fmla="val 4500"/>
-            </a:avLst>
+            <a:off x="402336" y="1828800"/>
+            <a:ext cx="11430000" cy="420624"/>
+          </a:xfrm>
+          <a:prstGeom prst="rect">
+            <a:avLst/>
+          </a:prstGeom>
+          <a:solidFill>
+            <a:srgbClr val="1F4E5F"/>
+          </a:solidFill>
+          <a:ln>
+            <a:noFill/>
+          </a:ln>
+          <a:effectLst/>
+        </p:spPr>
+        <p:style>
+          <a:lnRef idx="1">
+            <a:schemeClr val="accent1"/>
+          </a:lnRef>
+          <a:fillRef idx="3">
+            <a:schemeClr val="accent1"/>
+          </a:fillRef>
+          <a:effectRef idx="2">
+            <a:schemeClr val="accent1"/>
+          </a:effectRef>
+          <a:fontRef idx="minor">
+            <a:schemeClr val="lt1"/>
+          </a:fontRef>
+        </p:style>
+        <p:txBody>
+          <a:bodyPr rtlCol="0" anchor="ctr"/>
+          <a:lstStyle/>
+          <a:p>
+            <a:pPr algn="ctr"/>
+          </a:p>
+        </p:txBody>
+      </p:sp>
+      <p:sp>
+        <p:nvSpPr>
+          <p:cNvPr id="13" name="TextBox 12"/>
+          <p:cNvSpPr txBox="1"/>
+          <p:nvPr/>
+        </p:nvSpPr>
+        <p:spPr>
+          <a:xfrm>
+            <a:off x="493776" y="1847088"/>
+            <a:ext cx="2606040" cy="420624"/>
+          </a:xfrm>
+          <a:prstGeom prst="rect">
+            <a:avLst/>
+          </a:prstGeom>
+          <a:noFill/>
+        </p:spPr>
+        <p:txBody>
+          <a:bodyPr wrap="square" lIns="54864" rIns="54864" tIns="36576" bIns="36576" anchor="ctr">
+            <a:spAutoFit/>
+          </a:bodyPr>
+          <a:lstStyle/>
+          <a:p>
+            <a:pPr algn="l">
+              <a:lnSpc>
+                <a:spcPct val="106000"/>
+              </a:lnSpc>
+              <a:spcAft>
+                <a:spcPts val="400"/>
+              </a:spcAft>
+            </a:pPr>
+            <a:r>
+              <a:rPr sz="950" b="1" i="0">
+                <a:solidFill>
+                  <a:srgbClr val="FFFFFF"/>
+                </a:solidFill>
+                <a:latin typeface="Calibri"/>
+              </a:rPr>
+              <a:t>Election</a:t>
+            </a:r>
+          </a:p>
+        </p:txBody>
+      </p:sp>
+      <p:sp>
+        <p:nvSpPr>
+          <p:cNvPr id="14" name="TextBox 13"/>
+          <p:cNvSpPr txBox="1"/>
+          <p:nvPr/>
+        </p:nvSpPr>
+        <p:spPr>
+          <a:xfrm>
+            <a:off x="3236976" y="1847088"/>
+            <a:ext cx="2034540" cy="420624"/>
+          </a:xfrm>
+          <a:prstGeom prst="rect">
+            <a:avLst/>
+          </a:prstGeom>
+          <a:noFill/>
+        </p:spPr>
+        <p:txBody>
+          <a:bodyPr wrap="square" lIns="54864" rIns="54864" tIns="36576" bIns="36576" anchor="ctr">
+            <a:spAutoFit/>
+          </a:bodyPr>
+          <a:lstStyle/>
+          <a:p>
+            <a:pPr algn="r">
+              <a:lnSpc>
+                <a:spcPct val="106000"/>
+              </a:lnSpc>
+              <a:spcAft>
+                <a:spcPts val="400"/>
+              </a:spcAft>
+            </a:pPr>
+            <a:r>
+              <a:rPr sz="950" b="1" i="0">
+                <a:solidFill>
+                  <a:srgbClr val="FFFFFF"/>
+                </a:solidFill>
+                <a:latin typeface="Calibri"/>
+              </a:rPr>
+              <a:t>Lump-sum at yr 15</a:t>
+            </a:r>
+          </a:p>
+        </p:txBody>
+      </p:sp>
+      <p:sp>
+        <p:nvSpPr>
+          <p:cNvPr id="15" name="TextBox 14"/>
+          <p:cNvSpPr txBox="1"/>
+          <p:nvPr/>
+        </p:nvSpPr>
+        <p:spPr>
+          <a:xfrm>
+            <a:off x="5408675" y="1847088"/>
+            <a:ext cx="2034540" cy="420624"/>
+          </a:xfrm>
+          <a:prstGeom prst="rect">
+            <a:avLst/>
+          </a:prstGeom>
+          <a:noFill/>
+        </p:spPr>
+        <p:txBody>
+          <a:bodyPr wrap="square" lIns="54864" rIns="54864" tIns="36576" bIns="36576" anchor="ctr">
+            <a:spAutoFit/>
+          </a:bodyPr>
+          <a:lstStyle/>
+          <a:p>
+            <a:pPr algn="r">
+              <a:lnSpc>
+                <a:spcPct val="106000"/>
+              </a:lnSpc>
+              <a:spcAft>
+                <a:spcPts val="400"/>
+              </a:spcAft>
+            </a:pPr>
+            <a:r>
+              <a:rPr sz="950" b="1" i="0">
+                <a:solidFill>
+                  <a:srgbClr val="FFFFFF"/>
+                </a:solidFill>
+                <a:latin typeface="Calibri"/>
+              </a:rPr>
+              <a:t>Pensioners</a:t>
+            </a:r>
+          </a:p>
+        </p:txBody>
+      </p:sp>
+      <p:sp>
+        <p:nvSpPr>
+          <p:cNvPr id="16" name="TextBox 15"/>
+          <p:cNvSpPr txBox="1"/>
+          <p:nvPr/>
+        </p:nvSpPr>
+        <p:spPr>
+          <a:xfrm>
+            <a:off x="7580375" y="1847088"/>
+            <a:ext cx="2034540" cy="420624"/>
+          </a:xfrm>
+          <a:prstGeom prst="rect">
+            <a:avLst/>
+          </a:prstGeom>
+          <a:noFill/>
+        </p:spPr>
+        <p:txBody>
+          <a:bodyPr wrap="square" lIns="54864" rIns="54864" tIns="36576" bIns="36576" anchor="ctr">
+            <a:spAutoFit/>
+          </a:bodyPr>
+          <a:lstStyle/>
+          <a:p>
+            <a:pPr algn="r">
+              <a:lnSpc>
+                <a:spcPct val="106000"/>
+              </a:lnSpc>
+              <a:spcAft>
+                <a:spcPts val="400"/>
+              </a:spcAft>
+            </a:pPr>
+            <a:r>
+              <a:rPr sz="950" b="1" i="0">
+                <a:solidFill>
+                  <a:srgbClr val="FFFFFF"/>
+                </a:solidFill>
+                <a:latin typeface="Calibri"/>
+              </a:rPr>
+              <a:t>Pension PV at yr 15</a:t>
+            </a:r>
+          </a:p>
+        </p:txBody>
+      </p:sp>
+      <p:sp>
+        <p:nvSpPr>
+          <p:cNvPr id="17" name="TextBox 16"/>
+          <p:cNvSpPr txBox="1"/>
+          <p:nvPr/>
+        </p:nvSpPr>
+        <p:spPr>
+          <a:xfrm>
+            <a:off x="9752076" y="1847088"/>
+            <a:ext cx="2034540" cy="420624"/>
+          </a:xfrm>
+          <a:prstGeom prst="rect">
+            <a:avLst/>
+          </a:prstGeom>
+          <a:noFill/>
+        </p:spPr>
+        <p:txBody>
+          <a:bodyPr wrap="square" lIns="54864" rIns="54864" tIns="36576" bIns="36576" anchor="ctr">
+            <a:spAutoFit/>
+          </a:bodyPr>
+          <a:lstStyle/>
+          <a:p>
+            <a:pPr algn="r">
+              <a:lnSpc>
+                <a:spcPct val="106000"/>
+              </a:lnSpc>
+              <a:spcAft>
+                <a:spcPts val="400"/>
+              </a:spcAft>
+            </a:pPr>
+            <a:r>
+              <a:rPr sz="950" b="1" i="0">
+                <a:solidFill>
+                  <a:srgbClr val="FFFFFF"/>
+                </a:solidFill>
+                <a:latin typeface="Calibri"/>
+              </a:rPr>
+              <a:t>Total PV today</a:t>
+            </a:r>
+          </a:p>
+        </p:txBody>
+      </p:sp>
+      <p:sp>
+        <p:nvSpPr>
+          <p:cNvPr id="18" name="Rectangle 17"/>
+          <p:cNvSpPr/>
+          <p:nvPr/>
+        </p:nvSpPr>
+        <p:spPr>
+          <a:xfrm>
+            <a:off x="402336" y="2249424"/>
+            <a:ext cx="11430000" cy="420624"/>
+          </a:xfrm>
+          <a:prstGeom prst="rect">
+            <a:avLst/>
           </a:prstGeom>
           <a:solidFill>
             <a:srgbClr val="EDF2F4"/>
@@ -40723,14 +40006,1198 @@
       </p:sp>
       <p:sp>
         <p:nvSpPr>
-          <p:cNvPr id="14" name="Rectangle 13"/>
+          <p:cNvPr id="19" name="TextBox 18"/>
+          <p:cNvSpPr txBox="1"/>
+          <p:nvPr/>
+        </p:nvSpPr>
+        <p:spPr>
+          <a:xfrm>
+            <a:off x="493776" y="2267712"/>
+            <a:ext cx="2606040" cy="420624"/>
+          </a:xfrm>
+          <a:prstGeom prst="rect">
+            <a:avLst/>
+          </a:prstGeom>
+          <a:noFill/>
+        </p:spPr>
+        <p:txBody>
+          <a:bodyPr wrap="square" lIns="54864" rIns="54864" tIns="36576" bIns="36576" anchor="ctr">
+            <a:spAutoFit/>
+          </a:bodyPr>
+          <a:lstStyle/>
+          <a:p>
+            <a:pPr algn="l">
+              <a:lnSpc>
+                <a:spcPct val="106000"/>
+              </a:lnSpc>
+              <a:spcAft>
+                <a:spcPts val="400"/>
+              </a:spcAft>
+            </a:pPr>
+            <a:r>
+              <a:rPr sz="950" b="1" i="0">
+                <a:solidFill>
+                  <a:srgbClr val="333333"/>
+                </a:solidFill>
+                <a:latin typeface="Calibri"/>
+              </a:rPr>
+              <a:t>0% lump / 100% pension</a:t>
+            </a:r>
+          </a:p>
+        </p:txBody>
+      </p:sp>
+      <p:sp>
+        <p:nvSpPr>
+          <p:cNvPr id="20" name="TextBox 19"/>
+          <p:cNvSpPr txBox="1"/>
+          <p:nvPr/>
+        </p:nvSpPr>
+        <p:spPr>
+          <a:xfrm>
+            <a:off x="3236976" y="2267712"/>
+            <a:ext cx="2034540" cy="420624"/>
+          </a:xfrm>
+          <a:prstGeom prst="rect">
+            <a:avLst/>
+          </a:prstGeom>
+          <a:noFill/>
+        </p:spPr>
+        <p:txBody>
+          <a:bodyPr wrap="square" lIns="54864" rIns="54864" tIns="36576" bIns="36576" anchor="ctr">
+            <a:spAutoFit/>
+          </a:bodyPr>
+          <a:lstStyle/>
+          <a:p>
+            <a:pPr algn="r">
+              <a:lnSpc>
+                <a:spcPct val="106000"/>
+              </a:lnSpc>
+              <a:spcAft>
+                <a:spcPts val="400"/>
+              </a:spcAft>
+            </a:pPr>
+            <a:r>
+              <a:rPr sz="950" b="0" i="0">
+                <a:solidFill>
+                  <a:srgbClr val="333333"/>
+                </a:solidFill>
+                <a:latin typeface="Calibri"/>
+              </a:rPr>
+              <a:t>€0.0bn</a:t>
+            </a:r>
+          </a:p>
+        </p:txBody>
+      </p:sp>
+      <p:sp>
+        <p:nvSpPr>
+          <p:cNvPr id="21" name="TextBox 20"/>
+          <p:cNvSpPr txBox="1"/>
+          <p:nvPr/>
+        </p:nvSpPr>
+        <p:spPr>
+          <a:xfrm>
+            <a:off x="5408675" y="2267712"/>
+            <a:ext cx="2034540" cy="420624"/>
+          </a:xfrm>
+          <a:prstGeom prst="rect">
+            <a:avLst/>
+          </a:prstGeom>
+          <a:noFill/>
+        </p:spPr>
+        <p:txBody>
+          <a:bodyPr wrap="square" lIns="54864" rIns="54864" tIns="36576" bIns="36576" anchor="ctr">
+            <a:spAutoFit/>
+          </a:bodyPr>
+          <a:lstStyle/>
+          <a:p>
+            <a:pPr algn="r">
+              <a:lnSpc>
+                <a:spcPct val="106000"/>
+              </a:lnSpc>
+              <a:spcAft>
+                <a:spcPts val="400"/>
+              </a:spcAft>
+            </a:pPr>
+            <a:r>
+              <a:rPr sz="950" b="0" i="0">
+                <a:solidFill>
+                  <a:srgbClr val="333333"/>
+                </a:solidFill>
+                <a:latin typeface="Calibri"/>
+              </a:rPr>
+              <a:t>100,000</a:t>
+            </a:r>
+          </a:p>
+        </p:txBody>
+      </p:sp>
+      <p:sp>
+        <p:nvSpPr>
+          <p:cNvPr id="22" name="TextBox 21"/>
+          <p:cNvSpPr txBox="1"/>
+          <p:nvPr/>
+        </p:nvSpPr>
+        <p:spPr>
+          <a:xfrm>
+            <a:off x="7580375" y="2267712"/>
+            <a:ext cx="2034540" cy="420624"/>
+          </a:xfrm>
+          <a:prstGeom prst="rect">
+            <a:avLst/>
+          </a:prstGeom>
+          <a:noFill/>
+        </p:spPr>
+        <p:txBody>
+          <a:bodyPr wrap="square" lIns="54864" rIns="54864" tIns="36576" bIns="36576" anchor="ctr">
+            <a:spAutoFit/>
+          </a:bodyPr>
+          <a:lstStyle/>
+          <a:p>
+            <a:pPr algn="r">
+              <a:lnSpc>
+                <a:spcPct val="106000"/>
+              </a:lnSpc>
+              <a:spcAft>
+                <a:spcPts val="400"/>
+              </a:spcAft>
+            </a:pPr>
+            <a:r>
+              <a:rPr sz="950" b="0" i="0">
+                <a:solidFill>
+                  <a:srgbClr val="333333"/>
+                </a:solidFill>
+                <a:latin typeface="Calibri"/>
+              </a:rPr>
+              <a:t>€8.72bn</a:t>
+            </a:r>
+          </a:p>
+        </p:txBody>
+      </p:sp>
+      <p:sp>
+        <p:nvSpPr>
+          <p:cNvPr id="23" name="TextBox 22"/>
+          <p:cNvSpPr txBox="1"/>
+          <p:nvPr/>
+        </p:nvSpPr>
+        <p:spPr>
+          <a:xfrm>
+            <a:off x="9752076" y="2267712"/>
+            <a:ext cx="2034540" cy="420624"/>
+          </a:xfrm>
+          <a:prstGeom prst="rect">
+            <a:avLst/>
+          </a:prstGeom>
+          <a:noFill/>
+        </p:spPr>
+        <p:txBody>
+          <a:bodyPr wrap="square" lIns="54864" rIns="54864" tIns="36576" bIns="36576" anchor="ctr">
+            <a:spAutoFit/>
+          </a:bodyPr>
+          <a:lstStyle/>
+          <a:p>
+            <a:pPr algn="r">
+              <a:lnSpc>
+                <a:spcPct val="106000"/>
+              </a:lnSpc>
+              <a:spcAft>
+                <a:spcPts val="400"/>
+              </a:spcAft>
+            </a:pPr>
+            <a:r>
+              <a:rPr sz="950" b="0" i="0">
+                <a:solidFill>
+                  <a:srgbClr val="333333"/>
+                </a:solidFill>
+                <a:latin typeface="Calibri"/>
+              </a:rPr>
+              <a:t>€5.35bn</a:t>
+            </a:r>
+          </a:p>
+        </p:txBody>
+      </p:sp>
+      <p:sp>
+        <p:nvSpPr>
+          <p:cNvPr id="24" name="TextBox 23"/>
+          <p:cNvSpPr txBox="1"/>
+          <p:nvPr/>
+        </p:nvSpPr>
+        <p:spPr>
+          <a:xfrm>
+            <a:off x="493776" y="2688336"/>
+            <a:ext cx="2606040" cy="420624"/>
+          </a:xfrm>
+          <a:prstGeom prst="rect">
+            <a:avLst/>
+          </a:prstGeom>
+          <a:noFill/>
+        </p:spPr>
+        <p:txBody>
+          <a:bodyPr wrap="square" lIns="54864" rIns="54864" tIns="36576" bIns="36576" anchor="ctr">
+            <a:spAutoFit/>
+          </a:bodyPr>
+          <a:lstStyle/>
+          <a:p>
+            <a:pPr algn="l">
+              <a:lnSpc>
+                <a:spcPct val="106000"/>
+              </a:lnSpc>
+              <a:spcAft>
+                <a:spcPts val="400"/>
+              </a:spcAft>
+            </a:pPr>
+            <a:r>
+              <a:rPr sz="950" b="1" i="0">
+                <a:solidFill>
+                  <a:srgbClr val="333333"/>
+                </a:solidFill>
+                <a:latin typeface="Calibri"/>
+              </a:rPr>
+              <a:t>25% / 75%</a:t>
+            </a:r>
+          </a:p>
+        </p:txBody>
+      </p:sp>
+      <p:sp>
+        <p:nvSpPr>
+          <p:cNvPr id="25" name="TextBox 24"/>
+          <p:cNvSpPr txBox="1"/>
+          <p:nvPr/>
+        </p:nvSpPr>
+        <p:spPr>
+          <a:xfrm>
+            <a:off x="3236976" y="2688336"/>
+            <a:ext cx="2034540" cy="420624"/>
+          </a:xfrm>
+          <a:prstGeom prst="rect">
+            <a:avLst/>
+          </a:prstGeom>
+          <a:noFill/>
+        </p:spPr>
+        <p:txBody>
+          <a:bodyPr wrap="square" lIns="54864" rIns="54864" tIns="36576" bIns="36576" anchor="ctr">
+            <a:spAutoFit/>
+          </a:bodyPr>
+          <a:lstStyle/>
+          <a:p>
+            <a:pPr algn="r">
+              <a:lnSpc>
+                <a:spcPct val="106000"/>
+              </a:lnSpc>
+              <a:spcAft>
+                <a:spcPts val="400"/>
+              </a:spcAft>
+            </a:pPr>
+            <a:r>
+              <a:rPr sz="950" b="0" i="0">
+                <a:solidFill>
+                  <a:srgbClr val="333333"/>
+                </a:solidFill>
+                <a:latin typeface="Calibri"/>
+              </a:rPr>
+              <a:t>€2.83bn</a:t>
+            </a:r>
+          </a:p>
+        </p:txBody>
+      </p:sp>
+      <p:sp>
+        <p:nvSpPr>
+          <p:cNvPr id="26" name="TextBox 25"/>
+          <p:cNvSpPr txBox="1"/>
+          <p:nvPr/>
+        </p:nvSpPr>
+        <p:spPr>
+          <a:xfrm>
+            <a:off x="5408675" y="2688336"/>
+            <a:ext cx="2034540" cy="420624"/>
+          </a:xfrm>
+          <a:prstGeom prst="rect">
+            <a:avLst/>
+          </a:prstGeom>
+          <a:noFill/>
+        </p:spPr>
+        <p:txBody>
+          <a:bodyPr wrap="square" lIns="54864" rIns="54864" tIns="36576" bIns="36576" anchor="ctr">
+            <a:spAutoFit/>
+          </a:bodyPr>
+          <a:lstStyle/>
+          <a:p>
+            <a:pPr algn="r">
+              <a:lnSpc>
+                <a:spcPct val="106000"/>
+              </a:lnSpc>
+              <a:spcAft>
+                <a:spcPts val="400"/>
+              </a:spcAft>
+            </a:pPr>
+            <a:r>
+              <a:rPr sz="950" b="0" i="0">
+                <a:solidFill>
+                  <a:srgbClr val="333333"/>
+                </a:solidFill>
+                <a:latin typeface="Calibri"/>
+              </a:rPr>
+              <a:t>75,000</a:t>
+            </a:r>
+          </a:p>
+        </p:txBody>
+      </p:sp>
+      <p:sp>
+        <p:nvSpPr>
+          <p:cNvPr id="27" name="TextBox 26"/>
+          <p:cNvSpPr txBox="1"/>
+          <p:nvPr/>
+        </p:nvSpPr>
+        <p:spPr>
+          <a:xfrm>
+            <a:off x="7580375" y="2688336"/>
+            <a:ext cx="2034540" cy="420624"/>
+          </a:xfrm>
+          <a:prstGeom prst="rect">
+            <a:avLst/>
+          </a:prstGeom>
+          <a:noFill/>
+        </p:spPr>
+        <p:txBody>
+          <a:bodyPr wrap="square" lIns="54864" rIns="54864" tIns="36576" bIns="36576" anchor="ctr">
+            <a:spAutoFit/>
+          </a:bodyPr>
+          <a:lstStyle/>
+          <a:p>
+            <a:pPr algn="r">
+              <a:lnSpc>
+                <a:spcPct val="106000"/>
+              </a:lnSpc>
+              <a:spcAft>
+                <a:spcPts val="400"/>
+              </a:spcAft>
+            </a:pPr>
+            <a:r>
+              <a:rPr sz="950" b="0" i="0">
+                <a:solidFill>
+                  <a:srgbClr val="333333"/>
+                </a:solidFill>
+                <a:latin typeface="Calibri"/>
+              </a:rPr>
+              <a:t>€6.54bn</a:t>
+            </a:r>
+          </a:p>
+        </p:txBody>
+      </p:sp>
+      <p:sp>
+        <p:nvSpPr>
+          <p:cNvPr id="28" name="TextBox 27"/>
+          <p:cNvSpPr txBox="1"/>
+          <p:nvPr/>
+        </p:nvSpPr>
+        <p:spPr>
+          <a:xfrm>
+            <a:off x="9752076" y="2688336"/>
+            <a:ext cx="2034540" cy="420624"/>
+          </a:xfrm>
+          <a:prstGeom prst="rect">
+            <a:avLst/>
+          </a:prstGeom>
+          <a:noFill/>
+        </p:spPr>
+        <p:txBody>
+          <a:bodyPr wrap="square" lIns="54864" rIns="54864" tIns="36576" bIns="36576" anchor="ctr">
+            <a:spAutoFit/>
+          </a:bodyPr>
+          <a:lstStyle/>
+          <a:p>
+            <a:pPr algn="r">
+              <a:lnSpc>
+                <a:spcPct val="106000"/>
+              </a:lnSpc>
+              <a:spcAft>
+                <a:spcPts val="400"/>
+              </a:spcAft>
+            </a:pPr>
+            <a:r>
+              <a:rPr sz="950" b="0" i="0">
+                <a:solidFill>
+                  <a:srgbClr val="333333"/>
+                </a:solidFill>
+                <a:latin typeface="Calibri"/>
+              </a:rPr>
+              <a:t>€5.75bn</a:t>
+            </a:r>
+          </a:p>
+        </p:txBody>
+      </p:sp>
+      <p:sp>
+        <p:nvSpPr>
+          <p:cNvPr id="29" name="Rectangle 28"/>
           <p:cNvSpPr/>
           <p:nvPr/>
         </p:nvSpPr>
         <p:spPr>
           <a:xfrm>
-            <a:off x="7452360" y="1737360"/>
-            <a:ext cx="4379976" cy="50292"/>
+            <a:off x="402336" y="3090672"/>
+            <a:ext cx="11430000" cy="420624"/>
+          </a:xfrm>
+          <a:prstGeom prst="rect">
+            <a:avLst/>
+          </a:prstGeom>
+          <a:solidFill>
+            <a:srgbClr val="EDF2F4"/>
+          </a:solidFill>
+          <a:ln>
+            <a:noFill/>
+          </a:ln>
+          <a:effectLst/>
+        </p:spPr>
+        <p:style>
+          <a:lnRef idx="1">
+            <a:schemeClr val="accent1"/>
+          </a:lnRef>
+          <a:fillRef idx="3">
+            <a:schemeClr val="accent1"/>
+          </a:fillRef>
+          <a:effectRef idx="2">
+            <a:schemeClr val="accent1"/>
+          </a:effectRef>
+          <a:fontRef idx="minor">
+            <a:schemeClr val="lt1"/>
+          </a:fontRef>
+        </p:style>
+        <p:txBody>
+          <a:bodyPr rtlCol="0" anchor="ctr"/>
+          <a:lstStyle/>
+          <a:p>
+            <a:pPr algn="ctr"/>
+          </a:p>
+        </p:txBody>
+      </p:sp>
+      <p:sp>
+        <p:nvSpPr>
+          <p:cNvPr id="30" name="TextBox 29"/>
+          <p:cNvSpPr txBox="1"/>
+          <p:nvPr/>
+        </p:nvSpPr>
+        <p:spPr>
+          <a:xfrm>
+            <a:off x="493776" y="3108960"/>
+            <a:ext cx="2606040" cy="420624"/>
+          </a:xfrm>
+          <a:prstGeom prst="rect">
+            <a:avLst/>
+          </a:prstGeom>
+          <a:noFill/>
+        </p:spPr>
+        <p:txBody>
+          <a:bodyPr wrap="square" lIns="54864" rIns="54864" tIns="36576" bIns="36576" anchor="ctr">
+            <a:spAutoFit/>
+          </a:bodyPr>
+          <a:lstStyle/>
+          <a:p>
+            <a:pPr algn="l">
+              <a:lnSpc>
+                <a:spcPct val="106000"/>
+              </a:lnSpc>
+              <a:spcAft>
+                <a:spcPts val="400"/>
+              </a:spcAft>
+            </a:pPr>
+            <a:r>
+              <a:rPr sz="950" b="1" i="0">
+                <a:solidFill>
+                  <a:srgbClr val="333333"/>
+                </a:solidFill>
+                <a:latin typeface="Calibri"/>
+              </a:rPr>
+              <a:t>50% / 50%  (base case)</a:t>
+            </a:r>
+          </a:p>
+        </p:txBody>
+      </p:sp>
+      <p:sp>
+        <p:nvSpPr>
+          <p:cNvPr id="31" name="TextBox 30"/>
+          <p:cNvSpPr txBox="1"/>
+          <p:nvPr/>
+        </p:nvSpPr>
+        <p:spPr>
+          <a:xfrm>
+            <a:off x="3236976" y="3108960"/>
+            <a:ext cx="2034540" cy="420624"/>
+          </a:xfrm>
+          <a:prstGeom prst="rect">
+            <a:avLst/>
+          </a:prstGeom>
+          <a:noFill/>
+        </p:spPr>
+        <p:txBody>
+          <a:bodyPr wrap="square" lIns="54864" rIns="54864" tIns="36576" bIns="36576" anchor="ctr">
+            <a:spAutoFit/>
+          </a:bodyPr>
+          <a:lstStyle/>
+          <a:p>
+            <a:pPr algn="r">
+              <a:lnSpc>
+                <a:spcPct val="106000"/>
+              </a:lnSpc>
+              <a:spcAft>
+                <a:spcPts val="400"/>
+              </a:spcAft>
+            </a:pPr>
+            <a:r>
+              <a:rPr sz="950" b="0" i="0">
+                <a:solidFill>
+                  <a:srgbClr val="333333"/>
+                </a:solidFill>
+                <a:latin typeface="Calibri"/>
+              </a:rPr>
+              <a:t>€5.65bn</a:t>
+            </a:r>
+          </a:p>
+        </p:txBody>
+      </p:sp>
+      <p:sp>
+        <p:nvSpPr>
+          <p:cNvPr id="32" name="TextBox 31"/>
+          <p:cNvSpPr txBox="1"/>
+          <p:nvPr/>
+        </p:nvSpPr>
+        <p:spPr>
+          <a:xfrm>
+            <a:off x="5408675" y="3108960"/>
+            <a:ext cx="2034540" cy="420624"/>
+          </a:xfrm>
+          <a:prstGeom prst="rect">
+            <a:avLst/>
+          </a:prstGeom>
+          <a:noFill/>
+        </p:spPr>
+        <p:txBody>
+          <a:bodyPr wrap="square" lIns="54864" rIns="54864" tIns="36576" bIns="36576" anchor="ctr">
+            <a:spAutoFit/>
+          </a:bodyPr>
+          <a:lstStyle/>
+          <a:p>
+            <a:pPr algn="r">
+              <a:lnSpc>
+                <a:spcPct val="106000"/>
+              </a:lnSpc>
+              <a:spcAft>
+                <a:spcPts val="400"/>
+              </a:spcAft>
+            </a:pPr>
+            <a:r>
+              <a:rPr sz="950" b="0" i="0">
+                <a:solidFill>
+                  <a:srgbClr val="333333"/>
+                </a:solidFill>
+                <a:latin typeface="Calibri"/>
+              </a:rPr>
+              <a:t>50,000</a:t>
+            </a:r>
+          </a:p>
+        </p:txBody>
+      </p:sp>
+      <p:sp>
+        <p:nvSpPr>
+          <p:cNvPr id="33" name="TextBox 32"/>
+          <p:cNvSpPr txBox="1"/>
+          <p:nvPr/>
+        </p:nvSpPr>
+        <p:spPr>
+          <a:xfrm>
+            <a:off x="7580375" y="3108960"/>
+            <a:ext cx="2034540" cy="420624"/>
+          </a:xfrm>
+          <a:prstGeom prst="rect">
+            <a:avLst/>
+          </a:prstGeom>
+          <a:noFill/>
+        </p:spPr>
+        <p:txBody>
+          <a:bodyPr wrap="square" lIns="54864" rIns="54864" tIns="36576" bIns="36576" anchor="ctr">
+            <a:spAutoFit/>
+          </a:bodyPr>
+          <a:lstStyle/>
+          <a:p>
+            <a:pPr algn="r">
+              <a:lnSpc>
+                <a:spcPct val="106000"/>
+              </a:lnSpc>
+              <a:spcAft>
+                <a:spcPts val="400"/>
+              </a:spcAft>
+            </a:pPr>
+            <a:r>
+              <a:rPr sz="950" b="0" i="0">
+                <a:solidFill>
+                  <a:srgbClr val="333333"/>
+                </a:solidFill>
+                <a:latin typeface="Calibri"/>
+              </a:rPr>
+              <a:t>€4.36bn</a:t>
+            </a:r>
+          </a:p>
+        </p:txBody>
+      </p:sp>
+      <p:sp>
+        <p:nvSpPr>
+          <p:cNvPr id="34" name="TextBox 33"/>
+          <p:cNvSpPr txBox="1"/>
+          <p:nvPr/>
+        </p:nvSpPr>
+        <p:spPr>
+          <a:xfrm>
+            <a:off x="9752076" y="3108960"/>
+            <a:ext cx="2034540" cy="420624"/>
+          </a:xfrm>
+          <a:prstGeom prst="rect">
+            <a:avLst/>
+          </a:prstGeom>
+          <a:noFill/>
+        </p:spPr>
+        <p:txBody>
+          <a:bodyPr wrap="square" lIns="54864" rIns="54864" tIns="36576" bIns="36576" anchor="ctr">
+            <a:spAutoFit/>
+          </a:bodyPr>
+          <a:lstStyle/>
+          <a:p>
+            <a:pPr algn="r">
+              <a:lnSpc>
+                <a:spcPct val="106000"/>
+              </a:lnSpc>
+              <a:spcAft>
+                <a:spcPts val="400"/>
+              </a:spcAft>
+            </a:pPr>
+            <a:r>
+              <a:rPr sz="950" b="0" i="0">
+                <a:solidFill>
+                  <a:srgbClr val="333333"/>
+                </a:solidFill>
+                <a:latin typeface="Calibri"/>
+              </a:rPr>
+              <a:t>€6.14bn</a:t>
+            </a:r>
+          </a:p>
+        </p:txBody>
+      </p:sp>
+      <p:sp>
+        <p:nvSpPr>
+          <p:cNvPr id="35" name="TextBox 34"/>
+          <p:cNvSpPr txBox="1"/>
+          <p:nvPr/>
+        </p:nvSpPr>
+        <p:spPr>
+          <a:xfrm>
+            <a:off x="493776" y="3529584"/>
+            <a:ext cx="2606040" cy="420624"/>
+          </a:xfrm>
+          <a:prstGeom prst="rect">
+            <a:avLst/>
+          </a:prstGeom>
+          <a:noFill/>
+        </p:spPr>
+        <p:txBody>
+          <a:bodyPr wrap="square" lIns="54864" rIns="54864" tIns="36576" bIns="36576" anchor="ctr">
+            <a:spAutoFit/>
+          </a:bodyPr>
+          <a:lstStyle/>
+          <a:p>
+            <a:pPr algn="l">
+              <a:lnSpc>
+                <a:spcPct val="106000"/>
+              </a:lnSpc>
+              <a:spcAft>
+                <a:spcPts val="400"/>
+              </a:spcAft>
+            </a:pPr>
+            <a:r>
+              <a:rPr sz="950" b="1" i="0">
+                <a:solidFill>
+                  <a:srgbClr val="333333"/>
+                </a:solidFill>
+                <a:latin typeface="Calibri"/>
+              </a:rPr>
+              <a:t>75% / 25%</a:t>
+            </a:r>
+          </a:p>
+        </p:txBody>
+      </p:sp>
+      <p:sp>
+        <p:nvSpPr>
+          <p:cNvPr id="36" name="TextBox 35"/>
+          <p:cNvSpPr txBox="1"/>
+          <p:nvPr/>
+        </p:nvSpPr>
+        <p:spPr>
+          <a:xfrm>
+            <a:off x="3236976" y="3529584"/>
+            <a:ext cx="2034540" cy="420624"/>
+          </a:xfrm>
+          <a:prstGeom prst="rect">
+            <a:avLst/>
+          </a:prstGeom>
+          <a:noFill/>
+        </p:spPr>
+        <p:txBody>
+          <a:bodyPr wrap="square" lIns="54864" rIns="54864" tIns="36576" bIns="36576" anchor="ctr">
+            <a:spAutoFit/>
+          </a:bodyPr>
+          <a:lstStyle/>
+          <a:p>
+            <a:pPr algn="r">
+              <a:lnSpc>
+                <a:spcPct val="106000"/>
+              </a:lnSpc>
+              <a:spcAft>
+                <a:spcPts val="400"/>
+              </a:spcAft>
+            </a:pPr>
+            <a:r>
+              <a:rPr sz="950" b="0" i="0">
+                <a:solidFill>
+                  <a:srgbClr val="333333"/>
+                </a:solidFill>
+                <a:latin typeface="Calibri"/>
+              </a:rPr>
+              <a:t>€8.48bn</a:t>
+            </a:r>
+          </a:p>
+        </p:txBody>
+      </p:sp>
+      <p:sp>
+        <p:nvSpPr>
+          <p:cNvPr id="37" name="TextBox 36"/>
+          <p:cNvSpPr txBox="1"/>
+          <p:nvPr/>
+        </p:nvSpPr>
+        <p:spPr>
+          <a:xfrm>
+            <a:off x="5408675" y="3529584"/>
+            <a:ext cx="2034540" cy="420624"/>
+          </a:xfrm>
+          <a:prstGeom prst="rect">
+            <a:avLst/>
+          </a:prstGeom>
+          <a:noFill/>
+        </p:spPr>
+        <p:txBody>
+          <a:bodyPr wrap="square" lIns="54864" rIns="54864" tIns="36576" bIns="36576" anchor="ctr">
+            <a:spAutoFit/>
+          </a:bodyPr>
+          <a:lstStyle/>
+          <a:p>
+            <a:pPr algn="r">
+              <a:lnSpc>
+                <a:spcPct val="106000"/>
+              </a:lnSpc>
+              <a:spcAft>
+                <a:spcPts val="400"/>
+              </a:spcAft>
+            </a:pPr>
+            <a:r>
+              <a:rPr sz="950" b="0" i="0">
+                <a:solidFill>
+                  <a:srgbClr val="333333"/>
+                </a:solidFill>
+                <a:latin typeface="Calibri"/>
+              </a:rPr>
+              <a:t>25,000</a:t>
+            </a:r>
+          </a:p>
+        </p:txBody>
+      </p:sp>
+      <p:sp>
+        <p:nvSpPr>
+          <p:cNvPr id="38" name="TextBox 37"/>
+          <p:cNvSpPr txBox="1"/>
+          <p:nvPr/>
+        </p:nvSpPr>
+        <p:spPr>
+          <a:xfrm>
+            <a:off x="7580375" y="3529584"/>
+            <a:ext cx="2034540" cy="420624"/>
+          </a:xfrm>
+          <a:prstGeom prst="rect">
+            <a:avLst/>
+          </a:prstGeom>
+          <a:noFill/>
+        </p:spPr>
+        <p:txBody>
+          <a:bodyPr wrap="square" lIns="54864" rIns="54864" tIns="36576" bIns="36576" anchor="ctr">
+            <a:spAutoFit/>
+          </a:bodyPr>
+          <a:lstStyle/>
+          <a:p>
+            <a:pPr algn="r">
+              <a:lnSpc>
+                <a:spcPct val="106000"/>
+              </a:lnSpc>
+              <a:spcAft>
+                <a:spcPts val="400"/>
+              </a:spcAft>
+            </a:pPr>
+            <a:r>
+              <a:rPr sz="950" b="0" i="0">
+                <a:solidFill>
+                  <a:srgbClr val="333333"/>
+                </a:solidFill>
+                <a:latin typeface="Calibri"/>
+              </a:rPr>
+              <a:t>€2.18bn</a:t>
+            </a:r>
+          </a:p>
+        </p:txBody>
+      </p:sp>
+      <p:sp>
+        <p:nvSpPr>
+          <p:cNvPr id="39" name="TextBox 38"/>
+          <p:cNvSpPr txBox="1"/>
+          <p:nvPr/>
+        </p:nvSpPr>
+        <p:spPr>
+          <a:xfrm>
+            <a:off x="9752076" y="3529584"/>
+            <a:ext cx="2034540" cy="420624"/>
+          </a:xfrm>
+          <a:prstGeom prst="rect">
+            <a:avLst/>
+          </a:prstGeom>
+          <a:noFill/>
+        </p:spPr>
+        <p:txBody>
+          <a:bodyPr wrap="square" lIns="54864" rIns="54864" tIns="36576" bIns="36576" anchor="ctr">
+            <a:spAutoFit/>
+          </a:bodyPr>
+          <a:lstStyle/>
+          <a:p>
+            <a:pPr algn="r">
+              <a:lnSpc>
+                <a:spcPct val="106000"/>
+              </a:lnSpc>
+              <a:spcAft>
+                <a:spcPts val="400"/>
+              </a:spcAft>
+            </a:pPr>
+            <a:r>
+              <a:rPr sz="950" b="0" i="0">
+                <a:solidFill>
+                  <a:srgbClr val="333333"/>
+                </a:solidFill>
+                <a:latin typeface="Calibri"/>
+              </a:rPr>
+              <a:t>€6.54bn</a:t>
+            </a:r>
+          </a:p>
+        </p:txBody>
+      </p:sp>
+      <p:sp>
+        <p:nvSpPr>
+          <p:cNvPr id="40" name="Rectangle 39"/>
+          <p:cNvSpPr/>
+          <p:nvPr/>
+        </p:nvSpPr>
+        <p:spPr>
+          <a:xfrm>
+            <a:off x="402336" y="3931920"/>
+            <a:ext cx="11430000" cy="420624"/>
+          </a:xfrm>
+          <a:prstGeom prst="rect">
+            <a:avLst/>
+          </a:prstGeom>
+          <a:solidFill>
+            <a:srgbClr val="EDF2F4"/>
+          </a:solidFill>
+          <a:ln>
+            <a:noFill/>
+          </a:ln>
+          <a:effectLst/>
+        </p:spPr>
+        <p:style>
+          <a:lnRef idx="1">
+            <a:schemeClr val="accent1"/>
+          </a:lnRef>
+          <a:fillRef idx="3">
+            <a:schemeClr val="accent1"/>
+          </a:fillRef>
+          <a:effectRef idx="2">
+            <a:schemeClr val="accent1"/>
+          </a:effectRef>
+          <a:fontRef idx="minor">
+            <a:schemeClr val="lt1"/>
+          </a:fontRef>
+        </p:style>
+        <p:txBody>
+          <a:bodyPr rtlCol="0" anchor="ctr"/>
+          <a:lstStyle/>
+          <a:p>
+            <a:pPr algn="ctr"/>
+          </a:p>
+        </p:txBody>
+      </p:sp>
+      <p:sp>
+        <p:nvSpPr>
+          <p:cNvPr id="41" name="TextBox 40"/>
+          <p:cNvSpPr txBox="1"/>
+          <p:nvPr/>
+        </p:nvSpPr>
+        <p:spPr>
+          <a:xfrm>
+            <a:off x="493776" y="3950207"/>
+            <a:ext cx="2606040" cy="420624"/>
+          </a:xfrm>
+          <a:prstGeom prst="rect">
+            <a:avLst/>
+          </a:prstGeom>
+          <a:noFill/>
+        </p:spPr>
+        <p:txBody>
+          <a:bodyPr wrap="square" lIns="54864" rIns="54864" tIns="36576" bIns="36576" anchor="ctr">
+            <a:spAutoFit/>
+          </a:bodyPr>
+          <a:lstStyle/>
+          <a:p>
+            <a:pPr algn="l">
+              <a:lnSpc>
+                <a:spcPct val="106000"/>
+              </a:lnSpc>
+              <a:spcAft>
+                <a:spcPts val="400"/>
+              </a:spcAft>
+            </a:pPr>
+            <a:r>
+              <a:rPr sz="950" b="1" i="0">
+                <a:solidFill>
+                  <a:srgbClr val="333333"/>
+                </a:solidFill>
+                <a:latin typeface="Calibri"/>
+              </a:rPr>
+              <a:t>100% / 0%</a:t>
+            </a:r>
+          </a:p>
+        </p:txBody>
+      </p:sp>
+      <p:sp>
+        <p:nvSpPr>
+          <p:cNvPr id="42" name="TextBox 41"/>
+          <p:cNvSpPr txBox="1"/>
+          <p:nvPr/>
+        </p:nvSpPr>
+        <p:spPr>
+          <a:xfrm>
+            <a:off x="3236976" y="3950207"/>
+            <a:ext cx="2034540" cy="420624"/>
+          </a:xfrm>
+          <a:prstGeom prst="rect">
+            <a:avLst/>
+          </a:prstGeom>
+          <a:noFill/>
+        </p:spPr>
+        <p:txBody>
+          <a:bodyPr wrap="square" lIns="54864" rIns="54864" tIns="36576" bIns="36576" anchor="ctr">
+            <a:spAutoFit/>
+          </a:bodyPr>
+          <a:lstStyle/>
+          <a:p>
+            <a:pPr algn="r">
+              <a:lnSpc>
+                <a:spcPct val="106000"/>
+              </a:lnSpc>
+              <a:spcAft>
+                <a:spcPts val="400"/>
+              </a:spcAft>
+            </a:pPr>
+            <a:r>
+              <a:rPr sz="950" b="0" i="0">
+                <a:solidFill>
+                  <a:srgbClr val="333333"/>
+                </a:solidFill>
+                <a:latin typeface="Calibri"/>
+              </a:rPr>
+              <a:t>€11.30bn</a:t>
+            </a:r>
+          </a:p>
+        </p:txBody>
+      </p:sp>
+      <p:sp>
+        <p:nvSpPr>
+          <p:cNvPr id="43" name="TextBox 42"/>
+          <p:cNvSpPr txBox="1"/>
+          <p:nvPr/>
+        </p:nvSpPr>
+        <p:spPr>
+          <a:xfrm>
+            <a:off x="5408675" y="3950207"/>
+            <a:ext cx="2034540" cy="420624"/>
+          </a:xfrm>
+          <a:prstGeom prst="rect">
+            <a:avLst/>
+          </a:prstGeom>
+          <a:noFill/>
+        </p:spPr>
+        <p:txBody>
+          <a:bodyPr wrap="square" lIns="54864" rIns="54864" tIns="36576" bIns="36576" anchor="ctr">
+            <a:spAutoFit/>
+          </a:bodyPr>
+          <a:lstStyle/>
+          <a:p>
+            <a:pPr algn="r">
+              <a:lnSpc>
+                <a:spcPct val="106000"/>
+              </a:lnSpc>
+              <a:spcAft>
+                <a:spcPts val="400"/>
+              </a:spcAft>
+            </a:pPr>
+            <a:r>
+              <a:rPr sz="950" b="0" i="0">
+                <a:solidFill>
+                  <a:srgbClr val="333333"/>
+                </a:solidFill>
+                <a:latin typeface="Calibri"/>
+              </a:rPr>
+              <a:t>0</a:t>
+            </a:r>
+          </a:p>
+        </p:txBody>
+      </p:sp>
+      <p:sp>
+        <p:nvSpPr>
+          <p:cNvPr id="44" name="TextBox 43"/>
+          <p:cNvSpPr txBox="1"/>
+          <p:nvPr/>
+        </p:nvSpPr>
+        <p:spPr>
+          <a:xfrm>
+            <a:off x="7580375" y="3950207"/>
+            <a:ext cx="2034540" cy="420624"/>
+          </a:xfrm>
+          <a:prstGeom prst="rect">
+            <a:avLst/>
+          </a:prstGeom>
+          <a:noFill/>
+        </p:spPr>
+        <p:txBody>
+          <a:bodyPr wrap="square" lIns="54864" rIns="54864" tIns="36576" bIns="36576" anchor="ctr">
+            <a:spAutoFit/>
+          </a:bodyPr>
+          <a:lstStyle/>
+          <a:p>
+            <a:pPr algn="r">
+              <a:lnSpc>
+                <a:spcPct val="106000"/>
+              </a:lnSpc>
+              <a:spcAft>
+                <a:spcPts val="400"/>
+              </a:spcAft>
+            </a:pPr>
+            <a:r>
+              <a:rPr sz="950" b="0" i="0">
+                <a:solidFill>
+                  <a:srgbClr val="333333"/>
+                </a:solidFill>
+                <a:latin typeface="Calibri"/>
+              </a:rPr>
+              <a:t>€0.00bn</a:t>
+            </a:r>
+          </a:p>
+        </p:txBody>
+      </p:sp>
+      <p:sp>
+        <p:nvSpPr>
+          <p:cNvPr id="45" name="TextBox 44"/>
+          <p:cNvSpPr txBox="1"/>
+          <p:nvPr/>
+        </p:nvSpPr>
+        <p:spPr>
+          <a:xfrm>
+            <a:off x="9752076" y="3950207"/>
+            <a:ext cx="2034540" cy="420624"/>
+          </a:xfrm>
+          <a:prstGeom prst="rect">
+            <a:avLst/>
+          </a:prstGeom>
+          <a:noFill/>
+        </p:spPr>
+        <p:txBody>
+          <a:bodyPr wrap="square" lIns="54864" rIns="54864" tIns="36576" bIns="36576" anchor="ctr">
+            <a:spAutoFit/>
+          </a:bodyPr>
+          <a:lstStyle/>
+          <a:p>
+            <a:pPr algn="r">
+              <a:lnSpc>
+                <a:spcPct val="106000"/>
+              </a:lnSpc>
+              <a:spcAft>
+                <a:spcPts val="400"/>
+              </a:spcAft>
+            </a:pPr>
+            <a:r>
+              <a:rPr sz="950" b="0" i="0">
+                <a:solidFill>
+                  <a:srgbClr val="333333"/>
+                </a:solidFill>
+                <a:latin typeface="Calibri"/>
+              </a:rPr>
+              <a:t>€6.94bn</a:t>
+            </a:r>
+          </a:p>
+        </p:txBody>
+      </p:sp>
+      <p:sp>
+        <p:nvSpPr>
+          <p:cNvPr id="46" name="Rounded Rectangle 45"/>
+          <p:cNvSpPr/>
+          <p:nvPr/>
+        </p:nvSpPr>
+        <p:spPr>
+          <a:xfrm>
+            <a:off x="402336" y="4480560"/>
+            <a:ext cx="5532120" cy="1463040"/>
+          </a:xfrm>
+          <a:prstGeom prst="roundRect">
+            <a:avLst>
+              <a:gd name="adj" fmla="val 4500"/>
+            </a:avLst>
+          </a:prstGeom>
+          <a:solidFill>
+            <a:srgbClr val="EDF2F4"/>
+          </a:solidFill>
+          <a:ln>
+            <a:noFill/>
+          </a:ln>
+          <a:effectLst/>
+        </p:spPr>
+        <p:style>
+          <a:lnRef idx="1">
+            <a:schemeClr val="accent1"/>
+          </a:lnRef>
+          <a:fillRef idx="3">
+            <a:schemeClr val="accent1"/>
+          </a:fillRef>
+          <a:effectRef idx="2">
+            <a:schemeClr val="accent1"/>
+          </a:effectRef>
+          <a:fontRef idx="minor">
+            <a:schemeClr val="lt1"/>
+          </a:fontRef>
+        </p:style>
+        <p:txBody>
+          <a:bodyPr rtlCol="0" anchor="ctr"/>
+          <a:lstStyle/>
+          <a:p>
+            <a:pPr algn="ctr"/>
+          </a:p>
+        </p:txBody>
+      </p:sp>
+      <p:sp>
+        <p:nvSpPr>
+          <p:cNvPr id="47" name="Rectangle 46"/>
+          <p:cNvSpPr/>
+          <p:nvPr/>
+        </p:nvSpPr>
+        <p:spPr>
+          <a:xfrm>
+            <a:off x="402336" y="4480560"/>
+            <a:ext cx="5532120" cy="50292"/>
           </a:xfrm>
           <a:prstGeom prst="rect">
             <a:avLst/>
@@ -40767,14 +41234,14 @@
       </p:sp>
       <p:sp>
         <p:nvSpPr>
-          <p:cNvPr id="15" name="TextBox 14"/>
-          <p:cNvSpPr txBox="1"/>
-          <p:nvPr/>
-        </p:nvSpPr>
-        <p:spPr>
-          <a:xfrm>
-            <a:off x="7616952" y="1865376"/>
-            <a:ext cx="4050791" cy="365760"/>
+          <p:cNvPr id="48" name="TextBox 47"/>
+          <p:cNvSpPr txBox="1"/>
+          <p:nvPr/>
+        </p:nvSpPr>
+        <p:spPr>
+          <a:xfrm>
+            <a:off x="566928" y="4608576"/>
+            <a:ext cx="5202936" cy="365760"/>
           </a:xfrm>
           <a:prstGeom prst="rect">
             <a:avLst/>
@@ -40802,21 +41269,21 @@
                 </a:solidFill>
                 <a:latin typeface="Calibri"/>
               </a:rPr>
-              <a:t>Mechanics</a:t>
-            </a:r>
-          </a:p>
-        </p:txBody>
-      </p:sp>
-      <p:sp>
-        <p:nvSpPr>
-          <p:cNvPr id="16" name="TextBox 15"/>
-          <p:cNvSpPr txBox="1"/>
-          <p:nvPr/>
-        </p:nvSpPr>
-        <p:spPr>
-          <a:xfrm>
-            <a:off x="7580376" y="2340864"/>
-            <a:ext cx="4087368" cy="3429000"/>
+              <a:t>Market path on top</a:t>
+            </a:r>
+          </a:p>
+        </p:txBody>
+      </p:sp>
+      <p:sp>
+        <p:nvSpPr>
+          <p:cNvPr id="49" name="TextBox 48"/>
+          <p:cNvSpPr txBox="1"/>
+          <p:nvPr/>
+        </p:nvSpPr>
+        <p:spPr>
+          <a:xfrm>
+            <a:off x="530352" y="5084064"/>
+            <a:ext cx="5239512" cy="731520"/>
           </a:xfrm>
           <a:prstGeom prst="rect">
             <a:avLst/>
@@ -40838,7 +41305,7 @@
               </a:spcAft>
             </a:pPr>
             <a:r>
-              <a:rPr sz="919" b="0" i="0">
+              <a:rPr sz="950" b="0" i="0">
                 <a:solidFill>
                   <a:srgbClr val="333333"/>
                 </a:solidFill>
@@ -40847,22 +41314,224 @@
               <a:t>•  </a:t>
             </a:r>
             <a:r>
-              <a:rPr sz="919" b="1" i="0">
+              <a:rPr sz="950" b="0" i="0">
+                <a:solidFill>
+                  <a:srgbClr val="333333"/>
+                </a:solidFill>
+                <a:latin typeface="Calibri"/>
+              </a:rPr>
+              <a:t>Base 15y median assets €20.5bn vs a €10.0bn liability → median funded ratio ≈ 2.05×.</a:t>
+            </a:r>
+          </a:p>
+          <a:p>
+            <a:pPr>
+              <a:lnSpc>
+                <a:spcPct val="105000"/>
+              </a:lnSpc>
+              <a:spcAft>
+                <a:spcPts val="500"/>
+              </a:spcAft>
+            </a:pPr>
+            <a:r>
+              <a:rPr sz="950" b="0" i="0">
+                <a:solidFill>
+                  <a:srgbClr val="333333"/>
+                </a:solidFill>
+                <a:latin typeface="Calibri"/>
+              </a:rPr>
+              <a:t>•  </a:t>
+            </a:r>
+            <a:r>
+              <a:rPr sz="950" b="0" i="0">
+                <a:solidFill>
+                  <a:srgbClr val="333333"/>
+                </a:solidFill>
+                <a:latin typeface="Calibri"/>
+              </a:rPr>
+              <a:t>5th-pct path €11.3bn still covers it; the 0.5th-pct path (€7.1bn) does not.</a:t>
+            </a:r>
+          </a:p>
+        </p:txBody>
+      </p:sp>
+      <p:sp>
+        <p:nvSpPr>
+          <p:cNvPr id="50" name="Rounded Rectangle 49"/>
+          <p:cNvSpPr/>
+          <p:nvPr/>
+        </p:nvSpPr>
+        <p:spPr>
+          <a:xfrm>
+            <a:off x="6144768" y="4480560"/>
+            <a:ext cx="5687568" cy="1463040"/>
+          </a:xfrm>
+          <a:prstGeom prst="roundRect">
+            <a:avLst>
+              <a:gd name="adj" fmla="val 4500"/>
+            </a:avLst>
+          </a:prstGeom>
+          <a:solidFill>
+            <a:srgbClr val="EDF2F4"/>
+          </a:solidFill>
+          <a:ln>
+            <a:noFill/>
+          </a:ln>
+          <a:effectLst/>
+        </p:spPr>
+        <p:style>
+          <a:lnRef idx="1">
+            <a:schemeClr val="accent1"/>
+          </a:lnRef>
+          <a:fillRef idx="3">
+            <a:schemeClr val="accent1"/>
+          </a:fillRef>
+          <a:effectRef idx="2">
+            <a:schemeClr val="accent1"/>
+          </a:effectRef>
+          <a:fontRef idx="minor">
+            <a:schemeClr val="lt1"/>
+          </a:fontRef>
+        </p:style>
+        <p:txBody>
+          <a:bodyPr rtlCol="0" anchor="ctr"/>
+          <a:lstStyle/>
+          <a:p>
+            <a:pPr algn="ctr"/>
+          </a:p>
+        </p:txBody>
+      </p:sp>
+      <p:sp>
+        <p:nvSpPr>
+          <p:cNvPr id="51" name="Rectangle 50"/>
+          <p:cNvSpPr/>
+          <p:nvPr/>
+        </p:nvSpPr>
+        <p:spPr>
+          <a:xfrm>
+            <a:off x="6144768" y="4480560"/>
+            <a:ext cx="5687568" cy="50292"/>
+          </a:xfrm>
+          <a:prstGeom prst="rect">
+            <a:avLst/>
+          </a:prstGeom>
+          <a:solidFill>
+            <a:srgbClr val="3B8E9E"/>
+          </a:solidFill>
+          <a:ln>
+            <a:noFill/>
+          </a:ln>
+          <a:effectLst/>
+        </p:spPr>
+        <p:style>
+          <a:lnRef idx="1">
+            <a:schemeClr val="accent1"/>
+          </a:lnRef>
+          <a:fillRef idx="3">
+            <a:schemeClr val="accent1"/>
+          </a:fillRef>
+          <a:effectRef idx="2">
+            <a:schemeClr val="accent1"/>
+          </a:effectRef>
+          <a:fontRef idx="minor">
+            <a:schemeClr val="lt1"/>
+          </a:fontRef>
+        </p:style>
+        <p:txBody>
+          <a:bodyPr rtlCol="0" anchor="ctr"/>
+          <a:lstStyle/>
+          <a:p>
+            <a:pPr algn="ctr"/>
+          </a:p>
+        </p:txBody>
+      </p:sp>
+      <p:sp>
+        <p:nvSpPr>
+          <p:cNvPr id="52" name="TextBox 51"/>
+          <p:cNvSpPr txBox="1"/>
+          <p:nvPr/>
+        </p:nvSpPr>
+        <p:spPr>
+          <a:xfrm>
+            <a:off x="6309359" y="4608576"/>
+            <a:ext cx="5358383" cy="365760"/>
+          </a:xfrm>
+          <a:prstGeom prst="rect">
+            <a:avLst/>
+          </a:prstGeom>
+          <a:noFill/>
+        </p:spPr>
+        <p:txBody>
+          <a:bodyPr wrap="square" lIns="54864" rIns="54864" tIns="36576" bIns="36576" anchor="t">
+            <a:spAutoFit/>
+          </a:bodyPr>
+          <a:lstStyle/>
+          <a:p>
+            <a:pPr algn="l">
+              <a:lnSpc>
+                <a:spcPct val="106000"/>
+              </a:lnSpc>
+              <a:spcAft>
+                <a:spcPts val="400"/>
+              </a:spcAft>
+            </a:pPr>
+            <a:r>
+              <a:rPr sz="1300" b="1" i="0">
                 <a:solidFill>
                   <a:srgbClr val="1F4E5F"/>
                 </a:solidFill>
                 <a:latin typeface="Calibri"/>
               </a:rPr>
-              <a:t>Years 1–14: no sharing.  </a:t>
-            </a:r>
-            <a:r>
-              <a:rPr sz="919" b="0" i="0">
+              <a:t>So the upside is real – with a real tail</a:t>
+            </a:r>
+          </a:p>
+        </p:txBody>
+      </p:sp>
+      <p:sp>
+        <p:nvSpPr>
+          <p:cNvPr id="53" name="TextBox 52"/>
+          <p:cNvSpPr txBox="1"/>
+          <p:nvPr/>
+        </p:nvSpPr>
+        <p:spPr>
+          <a:xfrm>
+            <a:off x="6272783" y="5084064"/>
+            <a:ext cx="5394959" cy="731520"/>
+          </a:xfrm>
+          <a:prstGeom prst="rect">
+            <a:avLst/>
+          </a:prstGeom>
+          <a:noFill/>
+        </p:spPr>
+        <p:txBody>
+          <a:bodyPr wrap="square" lIns="54864" rIns="54864" tIns="36576" bIns="36576">
+            <a:spAutoFit/>
+          </a:bodyPr>
+          <a:lstStyle/>
+          <a:p>
+            <a:pPr>
+              <a:lnSpc>
+                <a:spcPct val="105000"/>
+              </a:lnSpc>
+              <a:spcAft>
+                <a:spcPts val="500"/>
+              </a:spcAft>
+            </a:pPr>
+            <a:r>
+              <a:rPr sz="930" b="0" i="0">
                 <a:solidFill>
                   <a:srgbClr val="333333"/>
                 </a:solidFill>
                 <a:latin typeface="Calibri"/>
               </a:rPr>
-              <a:t>the whole investment return compounds in the book – contributions €5.0bn → return-book MV ≈ €8.4bn by year 10.</a:t>
+              <a:t>•  </a:t>
+            </a:r>
+            <a:r>
+              <a:rPr sz="930" b="0" i="0">
+                <a:solidFill>
+                  <a:srgbClr val="333333"/>
+                </a:solidFill>
+                <a:latin typeface="Calibri"/>
+              </a:rPr>
+              <a:t>≈ 97.5% of paths finish funded at the base election (P(underfunded) ≈ 2.5%), ≈ 95% at a 100% lump election.</a:t>
             </a:r>
           </a:p>
           <a:p>
@@ -40875,7 +41544,7 @@
               </a:spcAft>
             </a:pPr>
             <a:r>
-              <a:rPr sz="919" b="0" i="0">
+              <a:rPr sz="930" b="0" i="0">
                 <a:solidFill>
                   <a:srgbClr val="333333"/>
                 </a:solidFill>
@@ -40884,103 +41553,20 @@
               <a:t>•  </a:t>
             </a:r>
             <a:r>
-              <a:rPr sz="919" b="1" i="0">
-                <a:solidFill>
-                  <a:srgbClr val="1F4E5F"/>
-                </a:solidFill>
-                <a:latin typeface="Calibri"/>
-              </a:rPr>
-              <a:t>Year 15+: 90 / 10.  </a:t>
-            </a:r>
-            <a:r>
-              <a:rPr sz="919" b="0" i="0">
+              <a:rPr sz="930" b="0" i="0">
                 <a:solidFill>
                   <a:srgbClr val="333333"/>
                 </a:solidFill>
                 <a:latin typeface="Calibri"/>
               </a:rPr>
-              <a:t>90% of each year's investment profit paid to policyholders (equal EUR sold from every sleeve), 10% retained and reinvested; losses carry forward first.</a:t>
-            </a:r>
-          </a:p>
-          <a:p>
-            <a:pPr>
-              <a:lnSpc>
-                <a:spcPct val="105000"/>
-              </a:lnSpc>
-              <a:spcAft>
-                <a:spcPts val="500"/>
-              </a:spcAft>
-            </a:pPr>
-            <a:r>
-              <a:rPr sz="919" b="0" i="0">
-                <a:solidFill>
-                  <a:srgbClr val="333333"/>
-                </a:solidFill>
-                <a:latin typeface="Calibri"/>
-              </a:rPr>
-              <a:t>•  </a:t>
-            </a:r>
-            <a:r>
-              <a:rPr sz="919" b="1" i="0">
-                <a:solidFill>
-                  <a:srgbClr val="1F4E5F"/>
-                </a:solidFill>
-                <a:latin typeface="Calibri"/>
-              </a:rPr>
-              <a:t>Payout phase (yr 15–20).  </a:t>
-            </a:r>
-            <a:r>
-              <a:rPr sz="919" b="0" i="0">
-                <a:solidFill>
-                  <a:srgbClr val="333333"/>
-                </a:solidFill>
-                <a:latin typeface="Calibri"/>
-              </a:rPr>
-              <a:t>≈ €7.8bn cumulative to policyholders, ≈ €0.9bn retained; book ≈ €13.6bn at year 20 (deterministic-return projection).</a:t>
-            </a:r>
-          </a:p>
-          <a:p>
-            <a:pPr>
-              <a:lnSpc>
-                <a:spcPct val="105000"/>
-              </a:lnSpc>
-              <a:spcAft>
-                <a:spcPts val="500"/>
-              </a:spcAft>
-            </a:pPr>
-            <a:r>
-              <a:rPr sz="919" b="0" i="0">
-                <a:solidFill>
-                  <a:srgbClr val="333333"/>
-                </a:solidFill>
-                <a:latin typeface="Calibri"/>
-              </a:rPr>
-              <a:t>•  </a:t>
-            </a:r>
-            <a:r>
-              <a:rPr sz="919" b="1" i="0">
-                <a:solidFill>
-                  <a:srgbClr val="1F4E5F"/>
-                </a:solidFill>
-                <a:latin typeface="Calibri"/>
-              </a:rPr>
-              <a:t>Guarantee untouched.  </a:t>
-            </a:r>
-            <a:r>
-              <a:rPr sz="919" b="0" i="0">
-                <a:solidFill>
-                  <a:srgbClr val="333333"/>
-                </a:solidFill>
-                <a:latin typeface="Calibri"/>
-              </a:rPr>
-              <a:t>the 90% is a pass-through off the insurer's asset side – it never draws on the LMP.</a:t>
-            </a:r>
-          </a:p>
-        </p:txBody>
-      </p:sp>
-      <p:sp>
-        <p:nvSpPr>
-          <p:cNvPr id="17" name="TextBox 16"/>
+              <a:t>The deep tail is the RSP's – the €5bn LMP still backs the guaranteed cash flows; the years 11–15 glidepath de-risks it further.</a:t>
+            </a:r>
+          </a:p>
+        </p:txBody>
+      </p:sp>
+      <p:sp>
+        <p:nvSpPr>
+          <p:cNvPr id="54" name="TextBox 53"/>
           <p:cNvSpPr txBox="1"/>
           <p:nvPr/>
         </p:nvSpPr>
@@ -41015,7 +41601,7 @@
                 </a:solidFill>
                 <a:latin typeface="Calibri"/>
               </a:rPr>
-              <a:t>Source: return_book.py (profit_share_start_year = 15).  Headline VaR uses the conservative flat €5.0bn return book; the projected €8.4bn book is the 'full_projected' sensitivity (assets €13.4bn, Surplus VaR €1.42bn).</a:t>
+              <a:t>Source: mixed_liability_scenarios.xlsx (Scenario Summary); mc_lifecycle.py (50k paths, consistent funding waterfall).</a:t>
             </a:r>
           </a:p>
         </p:txBody>
@@ -41163,7 +41749,7 @@
                 </a:solidFill>
                 <a:latin typeface="Calibri Light"/>
               </a:rPr>
-              <a:t>Key Selling Points and Recommendations</a:t>
+              <a:t>Sharing the Upside – 90 / 10 From Year 15</a:t>
             </a:r>
           </a:p>
         </p:txBody>
@@ -41205,7 +41791,7 @@
                 </a:solidFill>
                 <a:latin typeface="Calibri"/>
               </a:rPr>
-              <a:t>What we propose, and why All-Kanns should mandate it</a:t>
+              <a:t>The whole return compounds until benefits begin; then 90% of profit goes to policyholders</a:t>
             </a:r>
           </a:p>
         </p:txBody>
@@ -41545,21 +42131,45 @@
                 </a:solidFill>
                 <a:latin typeface="Calibri"/>
               </a:rPr>
-              <a:t>RECOMMENDATION</a:t>
-            </a:r>
-          </a:p>
-        </p:txBody>
-      </p:sp>
-      <p:sp>
-        <p:nvSpPr>
-          <p:cNvPr id="12" name="Rounded Rectangle 11"/>
+              <a:t>WHERE THE SURPLUS GOES</a:t>
+            </a:r>
+          </a:p>
+        </p:txBody>
+      </p:sp>
+      <p:pic>
+        <p:nvPicPr>
+          <p:cNvPr id="12" name="Picture 11" descr="profit_share.png"/>
+          <p:cNvPicPr>
+            <a:picLocks noChangeAspect="1"/>
+          </p:cNvPicPr>
+          <p:nvPr/>
+        </p:nvPicPr>
+        <p:blipFill>
+          <a:blip r:embed="rId2"/>
+          <a:stretch>
+            <a:fillRect/>
+          </a:stretch>
+        </p:blipFill>
+        <p:spPr>
+          <a:xfrm>
+            <a:off x="402336" y="1737360"/>
+            <a:ext cx="6858000" cy="2911011"/>
+          </a:xfrm>
+          <a:prstGeom prst="rect">
+            <a:avLst/>
+          </a:prstGeom>
+        </p:spPr>
+      </p:pic>
+      <p:sp>
+        <p:nvSpPr>
+          <p:cNvPr id="13" name="Rounded Rectangle 12"/>
           <p:cNvSpPr/>
           <p:nvPr/>
         </p:nvSpPr>
         <p:spPr>
           <a:xfrm>
-            <a:off x="402336" y="1783080"/>
-            <a:ext cx="5715000" cy="4160520"/>
+            <a:off x="7452360" y="1737360"/>
+            <a:ext cx="4379976" cy="4160520"/>
           </a:xfrm>
           <a:prstGeom prst="roundRect">
             <a:avLst>
@@ -41598,14 +42208,14 @@
       </p:sp>
       <p:sp>
         <p:nvSpPr>
-          <p:cNvPr id="13" name="Rectangle 12"/>
+          <p:cNvPr id="14" name="Rectangle 13"/>
           <p:cNvSpPr/>
           <p:nvPr/>
         </p:nvSpPr>
         <p:spPr>
           <a:xfrm>
-            <a:off x="402336" y="1783080"/>
-            <a:ext cx="5715000" cy="50292"/>
+            <a:off x="7452360" y="1737360"/>
+            <a:ext cx="4379976" cy="50292"/>
           </a:xfrm>
           <a:prstGeom prst="rect">
             <a:avLst/>
@@ -41642,14 +42252,14 @@
       </p:sp>
       <p:sp>
         <p:nvSpPr>
-          <p:cNvPr id="14" name="TextBox 13"/>
-          <p:cNvSpPr txBox="1"/>
-          <p:nvPr/>
-        </p:nvSpPr>
-        <p:spPr>
-          <a:xfrm>
-            <a:off x="566928" y="1911095"/>
-            <a:ext cx="5385816" cy="365760"/>
+          <p:cNvPr id="15" name="TextBox 14"/>
+          <p:cNvSpPr txBox="1"/>
+          <p:nvPr/>
+        </p:nvSpPr>
+        <p:spPr>
+          <a:xfrm>
+            <a:off x="7616952" y="1865376"/>
+            <a:ext cx="4050791" cy="365760"/>
           </a:xfrm>
           <a:prstGeom prst="rect">
             <a:avLst/>
@@ -41677,21 +42287,21 @@
                 </a:solidFill>
                 <a:latin typeface="Calibri"/>
               </a:rPr>
-              <a:t>What we propose</a:t>
-            </a:r>
-          </a:p>
-        </p:txBody>
-      </p:sp>
-      <p:sp>
-        <p:nvSpPr>
-          <p:cNvPr id="15" name="TextBox 14"/>
-          <p:cNvSpPr txBox="1"/>
-          <p:nvPr/>
-        </p:nvSpPr>
-        <p:spPr>
-          <a:xfrm>
-            <a:off x="530352" y="2386584"/>
-            <a:ext cx="5422392" cy="3429000"/>
+              <a:t>Mechanics</a:t>
+            </a:r>
+          </a:p>
+        </p:txBody>
+      </p:sp>
+      <p:sp>
+        <p:nvSpPr>
+          <p:cNvPr id="16" name="TextBox 15"/>
+          <p:cNvSpPr txBox="1"/>
+          <p:nvPr/>
+        </p:nvSpPr>
+        <p:spPr>
+          <a:xfrm>
+            <a:off x="7580376" y="2340864"/>
+            <a:ext cx="4087368" cy="3429000"/>
           </a:xfrm>
           <a:prstGeom prst="rect">
             <a:avLst/>
@@ -41713,7 +42323,7 @@
               </a:spcAft>
             </a:pPr>
             <a:r>
-              <a:rPr sz="940" b="0" i="0">
+              <a:rPr sz="919" b="0" i="0">
                 <a:solidFill>
                   <a:srgbClr val="333333"/>
                 </a:solidFill>
@@ -41722,22 +42332,22 @@
               <a:t>•  </a:t>
             </a:r>
             <a:r>
-              <a:rPr sz="940" b="1" i="0">
+              <a:rPr sz="919" b="1" i="0">
                 <a:solidFill>
                   <a:srgbClr val="1F4E5F"/>
                 </a:solidFill>
                 <a:latin typeface="Calibri"/>
               </a:rPr>
-              <a:t>Split the book.  </a:t>
-            </a:r>
-            <a:r>
-              <a:rPr sz="940" b="0" i="0">
+              <a:t>Years 1–14: no sharing.  </a:t>
+            </a:r>
+            <a:r>
+              <a:rPr sz="919" b="0" i="0">
                 <a:solidFill>
                   <a:srgbClr val="333333"/>
                 </a:solidFill>
                 <a:latin typeface="Calibri"/>
               </a:rPr>
-              <a:t>€5.0bn into a cash-flow + key-rate matched LMP; contributions into the Aggressive Diversified RSP; re-strike the split yearly.</a:t>
+              <a:t>the whole investment return compounds in the book – contributions €5.0bn → return-book MV ≈ €8.4bn by year 10.</a:t>
             </a:r>
           </a:p>
           <a:p>
@@ -41750,7 +42360,7 @@
               </a:spcAft>
             </a:pPr>
             <a:r>
-              <a:rPr sz="940" b="0" i="0">
+              <a:rPr sz="919" b="0" i="0">
                 <a:solidFill>
                   <a:srgbClr val="333333"/>
                 </a:solidFill>
@@ -41759,22 +42369,22 @@
               <a:t>•  </a:t>
             </a:r>
             <a:r>
-              <a:rPr sz="940" b="1" i="0">
+              <a:rPr sz="919" b="1" i="0">
                 <a:solidFill>
                   <a:srgbClr val="1F4E5F"/>
                 </a:solidFill>
                 <a:latin typeface="Calibri"/>
               </a:rPr>
-              <a:t>Add a receiver-IRS overlay.  </a:t>
-            </a:r>
-            <a:r>
-              <a:rPr sz="940" b="0" i="0">
+              <a:t>Year 15+: 90 / 10.  </a:t>
+            </a:r>
+            <a:r>
+              <a:rPr sz="919" b="0" i="0">
                 <a:solidFill>
                   <a:srgbClr val="333333"/>
                 </a:solidFill>
                 <a:latin typeface="Calibri"/>
               </a:rPr>
-              <a:t>15y €2.8bn + 30y €0.3bn, par, notional not exchanged – no cash, only variation margin.</a:t>
+              <a:t>90% of each year's investment profit paid to policyholders (equal EUR sold from every sleeve), 10% retained and reinvested; losses carry forward first.</a:t>
             </a:r>
           </a:p>
           <a:p>
@@ -41787,7 +42397,7 @@
               </a:spcAft>
             </a:pPr>
             <a:r>
-              <a:rPr sz="940" b="0" i="0">
+              <a:rPr sz="919" b="0" i="0">
                 <a:solidFill>
                   <a:srgbClr val="333333"/>
                 </a:solidFill>
@@ -41796,22 +42406,22 @@
               <a:t>•  </a:t>
             </a:r>
             <a:r>
-              <a:rPr sz="940" b="1" i="0">
+              <a:rPr sz="919" b="1" i="0">
                 <a:solidFill>
                   <a:srgbClr val="1F4E5F"/>
                 </a:solidFill>
                 <a:latin typeface="Calibri"/>
               </a:rPr>
-              <a:t>Extend the LMP.  </a:t>
-            </a:r>
-            <a:r>
-              <a:rPr sz="940" b="0" i="0">
+              <a:t>Payout phase (yr 15–20).  </a:t>
+            </a:r>
+            <a:r>
+              <a:rPr sz="919" b="0" i="0">
                 <a:solidFill>
                   <a:srgbClr val="333333"/>
                 </a:solidFill>
                 <a:latin typeface="Calibri"/>
               </a:rPr>
-              <a:t>ultra-long and zero-coupon (STRIPS) bonds to reach the 20y+ liability without breaching the 15% instrument cap.</a:t>
+              <a:t>≈ €7.8bn cumulative to policyholders, ≈ €0.9bn retained; book ≈ €13.6bn at year 20 (deterministic-return projection).</a:t>
             </a:r>
           </a:p>
           <a:p>
@@ -41824,7 +42434,7 @@
               </a:spcAft>
             </a:pPr>
             <a:r>
-              <a:rPr sz="940" b="0" i="0">
+              <a:rPr sz="919" b="0" i="0">
                 <a:solidFill>
                   <a:srgbClr val="333333"/>
                 </a:solidFill>
@@ -41833,73 +42443,608 @@
               <a:t>•  </a:t>
             </a:r>
             <a:r>
-              <a:rPr sz="940" b="1" i="0">
+              <a:rPr sz="919" b="1" i="0">
                 <a:solidFill>
                   <a:srgbClr val="1F4E5F"/>
                 </a:solidFill>
                 <a:latin typeface="Calibri"/>
               </a:rPr>
-              <a:t>Swap USD → EUR  </a:t>
-            </a:r>
-            <a:r>
-              <a:rPr sz="940" b="0" i="0">
+              <a:t>Guarantee untouched.  </a:t>
+            </a:r>
+            <a:r>
+              <a:rPr sz="919" b="0" i="0">
                 <a:solidFill>
                   <a:srgbClr val="333333"/>
                 </a:solidFill>
                 <a:latin typeface="Calibri"/>
               </a:rPr>
-              <a:t>on every sleeve; leave part of the RSP unhedged as a diversifier.</a:t>
-            </a:r>
-          </a:p>
-          <a:p>
-            <a:pPr>
-              <a:lnSpc>
-                <a:spcPct val="105000"/>
-              </a:lnSpc>
-              <a:spcAft>
-                <a:spcPts val="500"/>
-              </a:spcAft>
-            </a:pPr>
-            <a:r>
-              <a:rPr sz="940" b="0" i="0">
-                <a:solidFill>
-                  <a:srgbClr val="333333"/>
-                </a:solidFill>
-                <a:latin typeface="Calibri"/>
-              </a:rPr>
-              <a:t>•  </a:t>
-            </a:r>
-            <a:r>
-              <a:rPr sz="940" b="1" i="0">
+              <a:t>the 90% is a pass-through off the insurer's asset side – it never draws on the LMP.</a:t>
+            </a:r>
+          </a:p>
+        </p:txBody>
+      </p:sp>
+      <p:sp>
+        <p:nvSpPr>
+          <p:cNvPr id="17" name="TextBox 16"/>
+          <p:cNvSpPr txBox="1"/>
+          <p:nvPr/>
+        </p:nvSpPr>
+        <p:spPr>
+          <a:xfrm>
+            <a:off x="402336" y="6053328"/>
+            <a:ext cx="11430000" cy="365760"/>
+          </a:xfrm>
+          <a:prstGeom prst="rect">
+            <a:avLst/>
+          </a:prstGeom>
+          <a:noFill/>
+        </p:spPr>
+        <p:txBody>
+          <a:bodyPr wrap="square" lIns="54864" rIns="54864" tIns="36576" bIns="36576" anchor="t">
+            <a:spAutoFit/>
+          </a:bodyPr>
+          <a:lstStyle/>
+          <a:p>
+            <a:pPr algn="l">
+              <a:lnSpc>
+                <a:spcPct val="106000"/>
+              </a:lnSpc>
+              <a:spcAft>
+                <a:spcPts val="400"/>
+              </a:spcAft>
+            </a:pPr>
+            <a:r>
+              <a:rPr sz="900" b="0" i="1">
+                <a:solidFill>
+                  <a:srgbClr val="8A8A8A"/>
+                </a:solidFill>
+                <a:latin typeface="Calibri"/>
+              </a:rPr>
+              <a:t>Source: return_book.py (profit_share_start_year = 15).  Headline VaR uses the conservative flat €5.0bn return book; the projected €8.4bn book is the 'full_projected' sensitivity (assets €13.4bn, Surplus VaR €1.42bn).</a:t>
+            </a:r>
+          </a:p>
+        </p:txBody>
+      </p:sp>
+    </p:spTree>
+  </p:cSld>
+  <p:clrMapOvr>
+    <a:masterClrMapping/>
+  </p:clrMapOvr>
+</p:sld>
+</file>
+
+<file path=ppt/slides/slide39.xml><?xml version="1.0" encoding="utf-8"?>
+<p:sld xmlns:a="http://schemas.openxmlformats.org/drawingml/2006/main" xmlns:p="http://schemas.openxmlformats.org/presentationml/2006/main" xmlns:r="http://schemas.openxmlformats.org/officeDocument/2006/relationships">
+  <p:cSld>
+    <p:spTree>
+      <p:nvGrpSpPr>
+        <p:cNvPr id="1" name=""/>
+        <p:cNvGrpSpPr/>
+        <p:nvPr/>
+      </p:nvGrpSpPr>
+      <p:grpSpPr/>
+      <p:sp>
+        <p:nvSpPr>
+          <p:cNvPr id="2" name="Rectangle 1"/>
+          <p:cNvSpPr/>
+          <p:nvPr/>
+        </p:nvSpPr>
+        <p:spPr>
+          <a:xfrm>
+            <a:off x="0" y="274320"/>
+            <a:ext cx="128016" cy="566928"/>
+          </a:xfrm>
+          <a:prstGeom prst="rect">
+            <a:avLst/>
+          </a:prstGeom>
+          <a:solidFill>
+            <a:srgbClr val="3B8E9E"/>
+          </a:solidFill>
+          <a:ln>
+            <a:noFill/>
+          </a:ln>
+          <a:effectLst/>
+        </p:spPr>
+        <p:style>
+          <a:lnRef idx="1">
+            <a:schemeClr val="accent1"/>
+          </a:lnRef>
+          <a:fillRef idx="3">
+            <a:schemeClr val="accent1"/>
+          </a:fillRef>
+          <a:effectRef idx="2">
+            <a:schemeClr val="accent1"/>
+          </a:effectRef>
+          <a:fontRef idx="minor">
+            <a:schemeClr val="lt1"/>
+          </a:fontRef>
+        </p:style>
+        <p:txBody>
+          <a:bodyPr rtlCol="0" anchor="ctr"/>
+          <a:lstStyle/>
+          <a:p>
+            <a:pPr algn="ctr"/>
+          </a:p>
+        </p:txBody>
+      </p:sp>
+      <p:sp>
+        <p:nvSpPr>
+          <p:cNvPr id="3" name="Rectangle 2"/>
+          <p:cNvSpPr/>
+          <p:nvPr/>
+        </p:nvSpPr>
+        <p:spPr>
+          <a:xfrm>
+            <a:off x="11759184" y="182880"/>
+            <a:ext cx="310896" cy="310896"/>
+          </a:xfrm>
+          <a:prstGeom prst="rect">
+            <a:avLst/>
+          </a:prstGeom>
+          <a:solidFill>
+            <a:srgbClr val="E080E0"/>
+          </a:solidFill>
+          <a:ln>
+            <a:noFill/>
+          </a:ln>
+          <a:effectLst/>
+        </p:spPr>
+        <p:style>
+          <a:lnRef idx="1">
+            <a:schemeClr val="accent1"/>
+          </a:lnRef>
+          <a:fillRef idx="3">
+            <a:schemeClr val="accent1"/>
+          </a:fillRef>
+          <a:effectRef idx="2">
+            <a:schemeClr val="accent1"/>
+          </a:effectRef>
+          <a:fontRef idx="minor">
+            <a:schemeClr val="lt1"/>
+          </a:fontRef>
+        </p:style>
+        <p:txBody>
+          <a:bodyPr rtlCol="0" anchor="ctr"/>
+          <a:lstStyle/>
+          <a:p>
+            <a:pPr algn="ctr"/>
+          </a:p>
+        </p:txBody>
+      </p:sp>
+      <p:sp>
+        <p:nvSpPr>
+          <p:cNvPr id="4" name="TextBox 3"/>
+          <p:cNvSpPr txBox="1"/>
+          <p:nvPr/>
+        </p:nvSpPr>
+        <p:spPr>
+          <a:xfrm>
+            <a:off x="384048" y="219456"/>
+            <a:ext cx="10881360" cy="566928"/>
+          </a:xfrm>
+          <a:prstGeom prst="rect">
+            <a:avLst/>
+          </a:prstGeom>
+          <a:noFill/>
+        </p:spPr>
+        <p:txBody>
+          <a:bodyPr wrap="square" lIns="54864" rIns="54864" tIns="36576" bIns="36576" anchor="t">
+            <a:spAutoFit/>
+          </a:bodyPr>
+          <a:lstStyle/>
+          <a:p>
+            <a:pPr algn="l">
+              <a:lnSpc>
+                <a:spcPct val="106000"/>
+              </a:lnSpc>
+              <a:spcAft>
+                <a:spcPts val="400"/>
+              </a:spcAft>
+            </a:pPr>
+            <a:r>
+              <a:rPr sz="2400" b="1" i="0">
+                <a:solidFill>
+                  <a:srgbClr val="12323F"/>
+                </a:solidFill>
+                <a:latin typeface="Calibri Light"/>
+              </a:rPr>
+              <a:t>Key Selling Points and Recommendations</a:t>
+            </a:r>
+          </a:p>
+        </p:txBody>
+      </p:sp>
+      <p:sp>
+        <p:nvSpPr>
+          <p:cNvPr id="5" name="TextBox 4"/>
+          <p:cNvSpPr txBox="1"/>
+          <p:nvPr/>
+        </p:nvSpPr>
+        <p:spPr>
+          <a:xfrm>
+            <a:off x="402336" y="749808"/>
+            <a:ext cx="11155680" cy="365760"/>
+          </a:xfrm>
+          <a:prstGeom prst="rect">
+            <a:avLst/>
+          </a:prstGeom>
+          <a:noFill/>
+        </p:spPr>
+        <p:txBody>
+          <a:bodyPr wrap="square" lIns="54864" rIns="54864" tIns="36576" bIns="36576" anchor="t">
+            <a:spAutoFit/>
+          </a:bodyPr>
+          <a:lstStyle/>
+          <a:p>
+            <a:pPr algn="l">
+              <a:lnSpc>
+                <a:spcPct val="106000"/>
+              </a:lnSpc>
+              <a:spcAft>
+                <a:spcPts val="400"/>
+              </a:spcAft>
+            </a:pPr>
+            <a:r>
+              <a:rPr sz="1250" b="0" i="0">
+                <a:solidFill>
+                  <a:srgbClr val="3B8E9E"/>
+                </a:solidFill>
+                <a:latin typeface="Calibri"/>
+              </a:rPr>
+              <a:t>What we propose, and why All-Kanns should mandate it</a:t>
+            </a:r>
+          </a:p>
+        </p:txBody>
+      </p:sp>
+      <p:sp>
+        <p:nvSpPr>
+          <p:cNvPr id="6" name="Rectangle 5"/>
+          <p:cNvSpPr/>
+          <p:nvPr/>
+        </p:nvSpPr>
+        <p:spPr>
+          <a:xfrm>
+            <a:off x="402336" y="1133856"/>
+            <a:ext cx="11430000" cy="12801"/>
+          </a:xfrm>
+          <a:prstGeom prst="rect">
+            <a:avLst/>
+          </a:prstGeom>
+          <a:solidFill>
+            <a:srgbClr val="C7D3D7"/>
+          </a:solidFill>
+          <a:ln>
+            <a:noFill/>
+          </a:ln>
+          <a:effectLst/>
+        </p:spPr>
+        <p:style>
+          <a:lnRef idx="1">
+            <a:schemeClr val="accent1"/>
+          </a:lnRef>
+          <a:fillRef idx="3">
+            <a:schemeClr val="accent1"/>
+          </a:fillRef>
+          <a:effectRef idx="2">
+            <a:schemeClr val="accent1"/>
+          </a:effectRef>
+          <a:fontRef idx="minor">
+            <a:schemeClr val="lt1"/>
+          </a:fontRef>
+        </p:style>
+        <p:txBody>
+          <a:bodyPr rtlCol="0" anchor="ctr"/>
+          <a:lstStyle/>
+          <a:p>
+            <a:pPr algn="ctr"/>
+          </a:p>
+        </p:txBody>
+      </p:sp>
+      <p:sp>
+        <p:nvSpPr>
+          <p:cNvPr id="7" name="TextBox 6"/>
+          <p:cNvSpPr txBox="1"/>
+          <p:nvPr/>
+        </p:nvSpPr>
+        <p:spPr>
+          <a:xfrm>
+            <a:off x="11338560" y="164592"/>
+            <a:ext cx="640080" cy="274320"/>
+          </a:xfrm>
+          <a:prstGeom prst="rect">
+            <a:avLst/>
+          </a:prstGeom>
+          <a:noFill/>
+        </p:spPr>
+        <p:txBody>
+          <a:bodyPr wrap="square" lIns="54864" rIns="54864" tIns="36576" bIns="36576" anchor="t">
+            <a:spAutoFit/>
+          </a:bodyPr>
+          <a:lstStyle/>
+          <a:p>
+            <a:pPr algn="r">
+              <a:lnSpc>
+                <a:spcPct val="106000"/>
+              </a:lnSpc>
+              <a:spcAft>
+                <a:spcPts val="400"/>
+              </a:spcAft>
+            </a:pPr>
+            <a:r>
+              <a:rPr sz="1200" b="0" i="0">
+                <a:solidFill>
+                  <a:srgbClr val="8A8A8A"/>
+                </a:solidFill>
+                <a:latin typeface="Calibri"/>
+              </a:rPr>
+              <a:t>32</a:t>
+            </a:r>
+          </a:p>
+        </p:txBody>
+      </p:sp>
+      <p:sp>
+        <p:nvSpPr>
+          <p:cNvPr id="8" name="TextBox 7"/>
+          <p:cNvSpPr txBox="1"/>
+          <p:nvPr/>
+        </p:nvSpPr>
+        <p:spPr>
+          <a:xfrm>
+            <a:off x="402336" y="6437376"/>
+            <a:ext cx="11338560" cy="274320"/>
+          </a:xfrm>
+          <a:prstGeom prst="rect">
+            <a:avLst/>
+          </a:prstGeom>
+          <a:noFill/>
+        </p:spPr>
+        <p:txBody>
+          <a:bodyPr wrap="square" lIns="54864" rIns="54864" tIns="36576" bIns="36576">
+            <a:spAutoFit/>
+          </a:bodyPr>
+          <a:lstStyle/>
+          <a:p>
+            <a:r>
+              <a:rPr sz="800" b="0" i="0">
+                <a:solidFill>
+                  <a:srgbClr val="B6C2C6"/>
+                </a:solidFill>
+                <a:latin typeface="Calibri"/>
+              </a:rPr>
+              <a:t>CLIENT SITUATION</a:t>
+            </a:r>
+            <a:r>
+              <a:rPr sz="800" b="0" i="0">
+                <a:solidFill>
+                  <a:srgbClr val="B6C2C6"/>
+                </a:solidFill>
+                <a:latin typeface="Calibri"/>
+              </a:rPr>
+              <a:t>   |   </a:t>
+            </a:r>
+            <a:r>
+              <a:rPr sz="800" b="0" i="0">
+                <a:solidFill>
+                  <a:srgbClr val="B6C2C6"/>
+                </a:solidFill>
+                <a:latin typeface="Calibri"/>
+              </a:rPr>
+              <a:t>OUR SELLING POINTS</a:t>
+            </a:r>
+            <a:r>
+              <a:rPr sz="800" b="0" i="0">
+                <a:solidFill>
+                  <a:srgbClr val="B6C2C6"/>
+                </a:solidFill>
+                <a:latin typeface="Calibri"/>
+              </a:rPr>
+              <a:t>   |   </a:t>
+            </a:r>
+            <a:r>
+              <a:rPr sz="800" b="0" i="0">
+                <a:solidFill>
+                  <a:srgbClr val="B6C2C6"/>
+                </a:solidFill>
+                <a:latin typeface="Calibri"/>
+              </a:rPr>
+              <a:t>STRATEGIC CHALLENGES &amp; MARKET OVERVIEW</a:t>
+            </a:r>
+            <a:r>
+              <a:rPr sz="800" b="0" i="0">
+                <a:solidFill>
+                  <a:srgbClr val="B6C2C6"/>
+                </a:solidFill>
+                <a:latin typeface="Calibri"/>
+              </a:rPr>
+              <a:t>   |   </a:t>
+            </a:r>
+            <a:r>
+              <a:rPr sz="800" b="0" i="0">
+                <a:solidFill>
+                  <a:srgbClr val="B6C2C6"/>
+                </a:solidFill>
+                <a:latin typeface="Calibri"/>
+              </a:rPr>
+              <a:t>PRODUCT STRATEGY</a:t>
+            </a:r>
+            <a:r>
+              <a:rPr sz="800" b="0" i="0">
+                <a:solidFill>
+                  <a:srgbClr val="B6C2C6"/>
+                </a:solidFill>
+                <a:latin typeface="Calibri"/>
+              </a:rPr>
+              <a:t>   |   </a:t>
+            </a:r>
+            <a:r>
+              <a:rPr sz="800" b="0" i="0">
+                <a:solidFill>
+                  <a:srgbClr val="B6C2C6"/>
+                </a:solidFill>
+                <a:latin typeface="Calibri"/>
+              </a:rPr>
+              <a:t>PORTFOLIO RESULTS</a:t>
+            </a:r>
+            <a:r>
+              <a:rPr sz="800" b="0" i="0">
+                <a:solidFill>
+                  <a:srgbClr val="B6C2C6"/>
+                </a:solidFill>
+                <a:latin typeface="Calibri"/>
+              </a:rPr>
+              <a:t>   |   </a:t>
+            </a:r>
+            <a:r>
+              <a:rPr sz="800" b="1" i="0">
                 <a:solidFill>
                   <a:srgbClr val="1F4E5F"/>
                 </a:solidFill>
                 <a:latin typeface="Calibri"/>
               </a:rPr>
-              <a:t>Glidepath years 11–15  </a:t>
-            </a:r>
-            <a:r>
-              <a:rPr sz="940" b="0" i="0">
-                <a:solidFill>
-                  <a:srgbClr val="333333"/>
-                </a:solidFill>
-                <a:latin typeface="Calibri"/>
-              </a:rPr>
-              <a:t>de-risk into the year-15 payout; hold ≥ 1.1× the next 12m of outflows in cash + sovereigns.</a:t>
-            </a:r>
-          </a:p>
-        </p:txBody>
-      </p:sp>
-      <p:sp>
-        <p:nvSpPr>
-          <p:cNvPr id="16" name="Rounded Rectangle 15"/>
+              <a:t>WHAT HAPPENS WITH THE UPSIDE</a:t>
+            </a:r>
+          </a:p>
+        </p:txBody>
+      </p:sp>
+      <p:sp>
+        <p:nvSpPr>
+          <p:cNvPr id="9" name="Rectangle 8"/>
           <p:cNvSpPr/>
           <p:nvPr/>
         </p:nvSpPr>
         <p:spPr>
           <a:xfrm>
-            <a:off x="6263640" y="1783080"/>
-            <a:ext cx="5568696" cy="4160520"/>
+            <a:off x="0" y="6729984"/>
+            <a:ext cx="12191695" cy="128016"/>
+          </a:xfrm>
+          <a:prstGeom prst="rect">
+            <a:avLst/>
+          </a:prstGeom>
+          <a:solidFill>
+            <a:srgbClr val="1F4E5F"/>
+          </a:solidFill>
+          <a:ln>
+            <a:noFill/>
+          </a:ln>
+          <a:effectLst/>
+        </p:spPr>
+        <p:style>
+          <a:lnRef idx="1">
+            <a:schemeClr val="accent1"/>
+          </a:lnRef>
+          <a:fillRef idx="3">
+            <a:schemeClr val="accent1"/>
+          </a:fillRef>
+          <a:effectRef idx="2">
+            <a:schemeClr val="accent1"/>
+          </a:effectRef>
+          <a:fontRef idx="minor">
+            <a:schemeClr val="lt1"/>
+          </a:fontRef>
+        </p:style>
+        <p:txBody>
+          <a:bodyPr rtlCol="0" anchor="ctr"/>
+          <a:lstStyle/>
+          <a:p>
+            <a:pPr algn="ctr"/>
+          </a:p>
+        </p:txBody>
+      </p:sp>
+      <p:sp>
+        <p:nvSpPr>
+          <p:cNvPr id="10" name="Rectangle 9"/>
+          <p:cNvSpPr/>
+          <p:nvPr/>
+        </p:nvSpPr>
+        <p:spPr>
+          <a:xfrm>
+            <a:off x="402336" y="1316736"/>
+            <a:ext cx="11430000" cy="329184"/>
+          </a:xfrm>
+          <a:prstGeom prst="rect">
+            <a:avLst/>
+          </a:prstGeom>
+          <a:solidFill>
+            <a:srgbClr val="1F4E5F"/>
+          </a:solidFill>
+          <a:ln>
+            <a:noFill/>
+          </a:ln>
+          <a:effectLst/>
+        </p:spPr>
+        <p:style>
+          <a:lnRef idx="1">
+            <a:schemeClr val="accent1"/>
+          </a:lnRef>
+          <a:fillRef idx="3">
+            <a:schemeClr val="accent1"/>
+          </a:fillRef>
+          <a:effectRef idx="2">
+            <a:schemeClr val="accent1"/>
+          </a:effectRef>
+          <a:fontRef idx="minor">
+            <a:schemeClr val="lt1"/>
+          </a:fontRef>
+        </p:style>
+        <p:txBody>
+          <a:bodyPr rtlCol="0" anchor="ctr"/>
+          <a:lstStyle/>
+          <a:p>
+            <a:pPr algn="ctr"/>
+          </a:p>
+        </p:txBody>
+      </p:sp>
+      <p:sp>
+        <p:nvSpPr>
+          <p:cNvPr id="11" name="TextBox 10"/>
+          <p:cNvSpPr txBox="1"/>
+          <p:nvPr/>
+        </p:nvSpPr>
+        <p:spPr>
+          <a:xfrm>
+            <a:off x="548640" y="1330451"/>
+            <a:ext cx="11155680" cy="301752"/>
+          </a:xfrm>
+          <a:prstGeom prst="rect">
+            <a:avLst/>
+          </a:prstGeom>
+          <a:noFill/>
+        </p:spPr>
+        <p:txBody>
+          <a:bodyPr wrap="square" lIns="54864" rIns="54864" tIns="36576" bIns="36576" anchor="ctr">
+            <a:spAutoFit/>
+          </a:bodyPr>
+          <a:lstStyle/>
+          <a:p>
+            <a:pPr algn="l">
+              <a:lnSpc>
+                <a:spcPct val="106000"/>
+              </a:lnSpc>
+              <a:spcAft>
+                <a:spcPts val="400"/>
+              </a:spcAft>
+            </a:pPr>
+            <a:r>
+              <a:rPr sz="1100" b="1" i="0">
+                <a:solidFill>
+                  <a:srgbClr val="FFFFFF"/>
+                </a:solidFill>
+                <a:latin typeface="Calibri"/>
+              </a:rPr>
+              <a:t>RECOMMENDATION</a:t>
+            </a:r>
+          </a:p>
+        </p:txBody>
+      </p:sp>
+      <p:sp>
+        <p:nvSpPr>
+          <p:cNvPr id="12" name="Rounded Rectangle 11"/>
+          <p:cNvSpPr/>
+          <p:nvPr/>
+        </p:nvSpPr>
+        <p:spPr>
+          <a:xfrm>
+            <a:off x="402336" y="1783080"/>
+            <a:ext cx="5715000" cy="4160520"/>
           </a:xfrm>
           <a:prstGeom prst="roundRect">
             <a:avLst>
@@ -41938,14 +43083,14 @@
       </p:sp>
       <p:sp>
         <p:nvSpPr>
-          <p:cNvPr id="17" name="Rectangle 16"/>
+          <p:cNvPr id="13" name="Rectangle 12"/>
           <p:cNvSpPr/>
           <p:nvPr/>
         </p:nvSpPr>
         <p:spPr>
           <a:xfrm>
-            <a:off x="6263640" y="1783080"/>
-            <a:ext cx="5568696" cy="50292"/>
+            <a:off x="402336" y="1783080"/>
+            <a:ext cx="5715000" cy="50292"/>
           </a:xfrm>
           <a:prstGeom prst="rect">
             <a:avLst/>
@@ -41982,6 +43127,346 @@
       </p:sp>
       <p:sp>
         <p:nvSpPr>
+          <p:cNvPr id="14" name="TextBox 13"/>
+          <p:cNvSpPr txBox="1"/>
+          <p:nvPr/>
+        </p:nvSpPr>
+        <p:spPr>
+          <a:xfrm>
+            <a:off x="566928" y="1911095"/>
+            <a:ext cx="5385816" cy="365760"/>
+          </a:xfrm>
+          <a:prstGeom prst="rect">
+            <a:avLst/>
+          </a:prstGeom>
+          <a:noFill/>
+        </p:spPr>
+        <p:txBody>
+          <a:bodyPr wrap="square" lIns="54864" rIns="54864" tIns="36576" bIns="36576" anchor="t">
+            <a:spAutoFit/>
+          </a:bodyPr>
+          <a:lstStyle/>
+          <a:p>
+            <a:pPr algn="l">
+              <a:lnSpc>
+                <a:spcPct val="106000"/>
+              </a:lnSpc>
+              <a:spcAft>
+                <a:spcPts val="400"/>
+              </a:spcAft>
+            </a:pPr>
+            <a:r>
+              <a:rPr sz="1300" b="1" i="0">
+                <a:solidFill>
+                  <a:srgbClr val="1F4E5F"/>
+                </a:solidFill>
+                <a:latin typeface="Calibri"/>
+              </a:rPr>
+              <a:t>What we propose</a:t>
+            </a:r>
+          </a:p>
+        </p:txBody>
+      </p:sp>
+      <p:sp>
+        <p:nvSpPr>
+          <p:cNvPr id="15" name="TextBox 14"/>
+          <p:cNvSpPr txBox="1"/>
+          <p:nvPr/>
+        </p:nvSpPr>
+        <p:spPr>
+          <a:xfrm>
+            <a:off x="530352" y="2386584"/>
+            <a:ext cx="5422392" cy="3429000"/>
+          </a:xfrm>
+          <a:prstGeom prst="rect">
+            <a:avLst/>
+          </a:prstGeom>
+          <a:noFill/>
+        </p:spPr>
+        <p:txBody>
+          <a:bodyPr wrap="square" lIns="54864" rIns="54864" tIns="36576" bIns="36576">
+            <a:spAutoFit/>
+          </a:bodyPr>
+          <a:lstStyle/>
+          <a:p>
+            <a:pPr>
+              <a:lnSpc>
+                <a:spcPct val="105000"/>
+              </a:lnSpc>
+              <a:spcAft>
+                <a:spcPts val="500"/>
+              </a:spcAft>
+            </a:pPr>
+            <a:r>
+              <a:rPr sz="940" b="0" i="0">
+                <a:solidFill>
+                  <a:srgbClr val="333333"/>
+                </a:solidFill>
+                <a:latin typeface="Calibri"/>
+              </a:rPr>
+              <a:t>•  </a:t>
+            </a:r>
+            <a:r>
+              <a:rPr sz="940" b="1" i="0">
+                <a:solidFill>
+                  <a:srgbClr val="1F4E5F"/>
+                </a:solidFill>
+                <a:latin typeface="Calibri"/>
+              </a:rPr>
+              <a:t>Split the book.  </a:t>
+            </a:r>
+            <a:r>
+              <a:rPr sz="940" b="0" i="0">
+                <a:solidFill>
+                  <a:srgbClr val="333333"/>
+                </a:solidFill>
+                <a:latin typeface="Calibri"/>
+              </a:rPr>
+              <a:t>€5.0bn into a cash-flow + key-rate matched LMP; contributions into the Aggressive Diversified RSP; re-strike the split yearly.</a:t>
+            </a:r>
+          </a:p>
+          <a:p>
+            <a:pPr>
+              <a:lnSpc>
+                <a:spcPct val="105000"/>
+              </a:lnSpc>
+              <a:spcAft>
+                <a:spcPts val="500"/>
+              </a:spcAft>
+            </a:pPr>
+            <a:r>
+              <a:rPr sz="940" b="0" i="0">
+                <a:solidFill>
+                  <a:srgbClr val="333333"/>
+                </a:solidFill>
+                <a:latin typeface="Calibri"/>
+              </a:rPr>
+              <a:t>•  </a:t>
+            </a:r>
+            <a:r>
+              <a:rPr sz="940" b="1" i="0">
+                <a:solidFill>
+                  <a:srgbClr val="1F4E5F"/>
+                </a:solidFill>
+                <a:latin typeface="Calibri"/>
+              </a:rPr>
+              <a:t>Add a receiver-IRS overlay.  </a:t>
+            </a:r>
+            <a:r>
+              <a:rPr sz="940" b="0" i="0">
+                <a:solidFill>
+                  <a:srgbClr val="333333"/>
+                </a:solidFill>
+                <a:latin typeface="Calibri"/>
+              </a:rPr>
+              <a:t>15y €2.8bn + 30y €0.3bn, par, notional not exchanged – no cash, only variation margin.</a:t>
+            </a:r>
+          </a:p>
+          <a:p>
+            <a:pPr>
+              <a:lnSpc>
+                <a:spcPct val="105000"/>
+              </a:lnSpc>
+              <a:spcAft>
+                <a:spcPts val="500"/>
+              </a:spcAft>
+            </a:pPr>
+            <a:r>
+              <a:rPr sz="940" b="0" i="0">
+                <a:solidFill>
+                  <a:srgbClr val="333333"/>
+                </a:solidFill>
+                <a:latin typeface="Calibri"/>
+              </a:rPr>
+              <a:t>•  </a:t>
+            </a:r>
+            <a:r>
+              <a:rPr sz="940" b="1" i="0">
+                <a:solidFill>
+                  <a:srgbClr val="1F4E5F"/>
+                </a:solidFill>
+                <a:latin typeface="Calibri"/>
+              </a:rPr>
+              <a:t>Extend the LMP.  </a:t>
+            </a:r>
+            <a:r>
+              <a:rPr sz="940" b="0" i="0">
+                <a:solidFill>
+                  <a:srgbClr val="333333"/>
+                </a:solidFill>
+                <a:latin typeface="Calibri"/>
+              </a:rPr>
+              <a:t>ultra-long and zero-coupon (STRIPS) bonds to reach the 20y+ liability without breaching the 15% instrument cap.</a:t>
+            </a:r>
+          </a:p>
+          <a:p>
+            <a:pPr>
+              <a:lnSpc>
+                <a:spcPct val="105000"/>
+              </a:lnSpc>
+              <a:spcAft>
+                <a:spcPts val="500"/>
+              </a:spcAft>
+            </a:pPr>
+            <a:r>
+              <a:rPr sz="940" b="0" i="0">
+                <a:solidFill>
+                  <a:srgbClr val="333333"/>
+                </a:solidFill>
+                <a:latin typeface="Calibri"/>
+              </a:rPr>
+              <a:t>•  </a:t>
+            </a:r>
+            <a:r>
+              <a:rPr sz="940" b="1" i="0">
+                <a:solidFill>
+                  <a:srgbClr val="1F4E5F"/>
+                </a:solidFill>
+                <a:latin typeface="Calibri"/>
+              </a:rPr>
+              <a:t>Swap USD → EUR  </a:t>
+            </a:r>
+            <a:r>
+              <a:rPr sz="940" b="0" i="0">
+                <a:solidFill>
+                  <a:srgbClr val="333333"/>
+                </a:solidFill>
+                <a:latin typeface="Calibri"/>
+              </a:rPr>
+              <a:t>on every sleeve; leave part of the RSP unhedged as a diversifier.</a:t>
+            </a:r>
+          </a:p>
+          <a:p>
+            <a:pPr>
+              <a:lnSpc>
+                <a:spcPct val="105000"/>
+              </a:lnSpc>
+              <a:spcAft>
+                <a:spcPts val="500"/>
+              </a:spcAft>
+            </a:pPr>
+            <a:r>
+              <a:rPr sz="940" b="0" i="0">
+                <a:solidFill>
+                  <a:srgbClr val="333333"/>
+                </a:solidFill>
+                <a:latin typeface="Calibri"/>
+              </a:rPr>
+              <a:t>•  </a:t>
+            </a:r>
+            <a:r>
+              <a:rPr sz="940" b="1" i="0">
+                <a:solidFill>
+                  <a:srgbClr val="1F4E5F"/>
+                </a:solidFill>
+                <a:latin typeface="Calibri"/>
+              </a:rPr>
+              <a:t>Glidepath years 11–15  </a:t>
+            </a:r>
+            <a:r>
+              <a:rPr sz="940" b="0" i="0">
+                <a:solidFill>
+                  <a:srgbClr val="333333"/>
+                </a:solidFill>
+                <a:latin typeface="Calibri"/>
+              </a:rPr>
+              <a:t>de-risk into the year-15 payout; hold ≥ 1.1× the next 12m of outflows in cash + sovereigns.</a:t>
+            </a:r>
+          </a:p>
+        </p:txBody>
+      </p:sp>
+      <p:sp>
+        <p:nvSpPr>
+          <p:cNvPr id="16" name="Rounded Rectangle 15"/>
+          <p:cNvSpPr/>
+          <p:nvPr/>
+        </p:nvSpPr>
+        <p:spPr>
+          <a:xfrm>
+            <a:off x="6263640" y="1783080"/>
+            <a:ext cx="5568696" cy="4160520"/>
+          </a:xfrm>
+          <a:prstGeom prst="roundRect">
+            <a:avLst>
+              <a:gd name="adj" fmla="val 4500"/>
+            </a:avLst>
+          </a:prstGeom>
+          <a:solidFill>
+            <a:srgbClr val="EDF2F4"/>
+          </a:solidFill>
+          <a:ln>
+            <a:noFill/>
+          </a:ln>
+          <a:effectLst/>
+        </p:spPr>
+        <p:style>
+          <a:lnRef idx="1">
+            <a:schemeClr val="accent1"/>
+          </a:lnRef>
+          <a:fillRef idx="3">
+            <a:schemeClr val="accent1"/>
+          </a:fillRef>
+          <a:effectRef idx="2">
+            <a:schemeClr val="accent1"/>
+          </a:effectRef>
+          <a:fontRef idx="minor">
+            <a:schemeClr val="lt1"/>
+          </a:fontRef>
+        </p:style>
+        <p:txBody>
+          <a:bodyPr rtlCol="0" anchor="ctr"/>
+          <a:lstStyle/>
+          <a:p>
+            <a:pPr algn="ctr"/>
+          </a:p>
+        </p:txBody>
+      </p:sp>
+      <p:sp>
+        <p:nvSpPr>
+          <p:cNvPr id="17" name="Rectangle 16"/>
+          <p:cNvSpPr/>
+          <p:nvPr/>
+        </p:nvSpPr>
+        <p:spPr>
+          <a:xfrm>
+            <a:off x="6263640" y="1783080"/>
+            <a:ext cx="5568696" cy="50292"/>
+          </a:xfrm>
+          <a:prstGeom prst="rect">
+            <a:avLst/>
+          </a:prstGeom>
+          <a:solidFill>
+            <a:srgbClr val="3B8E9E"/>
+          </a:solidFill>
+          <a:ln>
+            <a:noFill/>
+          </a:ln>
+          <a:effectLst/>
+        </p:spPr>
+        <p:style>
+          <a:lnRef idx="1">
+            <a:schemeClr val="accent1"/>
+          </a:lnRef>
+          <a:fillRef idx="3">
+            <a:schemeClr val="accent1"/>
+          </a:fillRef>
+          <a:effectRef idx="2">
+            <a:schemeClr val="accent1"/>
+          </a:effectRef>
+          <a:fontRef idx="minor">
+            <a:schemeClr val="lt1"/>
+          </a:fontRef>
+        </p:style>
+        <p:txBody>
+          <a:bodyPr rtlCol="0" anchor="ctr"/>
+          <a:lstStyle/>
+          <a:p>
+            <a:pPr algn="ctr"/>
+          </a:p>
+        </p:txBody>
+      </p:sp>
+      <p:sp>
+        <p:nvSpPr>
           <p:cNvPr id="18" name="TextBox 17"/>
           <p:cNvSpPr txBox="1"/>
           <p:nvPr/>
@@ -42068,7 +43553,7 @@
                 </a:solidFill>
                 <a:latin typeface="Calibri"/>
               </a:rPr>
-              <a:t>Floor is safe.  </a:t>
+              <a:t>Floor is backed.  </a:t>
             </a:r>
             <a:r>
               <a:rPr sz="940" b="0" i="0">
@@ -42077,7 +43562,7 @@
                 </a:solidFill>
                 <a:latin typeface="Calibri"/>
               </a:rPr>
-              <a:t>€11.3bn guarantee covered even on the 0.5th-percentile 15-year path; P(underfunded) &lt; 0.6%.</a:t>
+              <a:t>the €5bn cash-flow-dedicated LMP funds the guaranteed benefits directly; ≈ 97.5% of 15-year MC paths finish funded at the base election (P(underfunded) ≈ 2.5%), the glidepath cuts the tail further.</a:t>
             </a:r>
           </a:p>
           <a:p>
@@ -42114,7 +43599,7 @@
                 </a:solidFill>
                 <a:latin typeface="Calibri"/>
               </a:rPr>
-              <a:t>median 15-year IRR ≈ 6.0% – ≈ 500bps above the 1.0% guarantee; 90% shared with policyholders.</a:t>
+              <a:t>median 15-year IRR ≈ 5.9% – ≈ 490bps above the 1.0% guarantee; 90% shared with policyholders from year 15.</a:t>
             </a:r>
           </a:p>
           <a:p>
